--- a/models/northwind/docs/Northwind_Sales_Insights.pptx
+++ b/models/northwind/docs/Northwind_Sales_Insights.pptx
@@ -4,6 +4,9 @@
   <p:sldMasterIdLst>
     <p:sldMasterId id="2147483648" r:id="rId1"/>
   </p:sldMasterIdLst>
+  <p:notesMasterIdLst>
+    <p:notesMasterId r:id="rId15"/>
+  </p:notesMasterIdLst>
   <p:sldIdLst>
     <p:sldId id="256" r:id="rId2"/>
     <p:sldId id="257" r:id="rId3"/>
@@ -17,10 +20,8 @@
     <p:sldId id="265" r:id="rId11"/>
     <p:sldId id="266" r:id="rId12"/>
     <p:sldId id="267" r:id="rId13"/>
+    <p:sldId id="268" r:id="rId14"/>
   </p:sldIdLst>
-  <p:notesMasterIdLst>
-    <p:notesMasterId r:id="rId14"/>
-  </p:notesMasterIdLst>
   <p:sldSz cx="12192000" cy="6858000"/>
   <p:notesSz cx="6858000" cy="12192000"/>
   <p:defaultTextStyle>
@@ -115,6 +116,11 @@
       </a:defRPr>
     </a:lvl9pPr>
   </p:defaultTextStyle>
+  <p:extLst>
+    <p:ext uri="{EFAFB233-063F-42B5-8137-9DF3F51BA10A}">
+      <p15:sldGuideLst xmlns:p15="http://schemas.microsoft.com/office/powerpoint/2012/main"/>
+    </p:ext>
+  </p:extLst>
 </p:presentation>
 </file>
 
@@ -140,234 +146,10 @@
           <a:chExt cx="0" cy="0"/>
         </a:xfrm>
       </p:grpSpPr>
-      <p:sp>
-        <p:nvSpPr>
-          <p:cNvPr id="2" name="Header Placeholder 1"/>
-          <p:cNvSpPr>
-            <a:spLocks noGrp="1"/>
-          </p:cNvSpPr>
-          <p:nvPr>
-            <p:ph type="hdr" sz="quarter"/>
-          </p:nvPr>
-        </p:nvSpPr>
-        <p:spPr>
-          <a:xfrm>
-            <a:off x="0" y="0"/>
-            <a:ext cx="2971800" cy="458788"/>
-          </a:xfrm>
-          <a:prstGeom prst="rect">
-            <a:avLst/>
-          </a:prstGeom>
-        </p:spPr>
-        <p:txBody>
-          <a:bodyPr vert="horz" lIns="91440" tIns="45720" rIns="91440" bIns="45720" rtlCol="0"/>
-          <a:lstStyle>
-            <a:lvl1pPr algn="l">
-              <a:defRPr sz="1200"/>
-            </a:lvl1pPr>
-          </a:lstStyle>
-          <a:p>
-            <a:endParaRPr lang="en-US"/>
-          </a:p>
-        </p:txBody>
-      </p:sp>
-      <p:sp>
-        <p:nvSpPr>
-          <p:cNvPr id="3" name="Date Placeholder 2"/>
-          <p:cNvSpPr>
-            <a:spLocks noGrp="1"/>
-          </p:cNvSpPr>
-          <p:nvPr>
-            <p:ph type="dt" idx="1"/>
-          </p:nvPr>
-        </p:nvSpPr>
-        <p:spPr>
-          <a:xfrm>
-            <a:off x="3884613" y="0"/>
-            <a:ext cx="2971800" cy="458788"/>
-          </a:xfrm>
-          <a:prstGeom prst="rect">
-            <a:avLst/>
-          </a:prstGeom>
-        </p:spPr>
-        <p:txBody>
-          <a:bodyPr vert="horz" lIns="91440" tIns="45720" rIns="91440" bIns="45720" rtlCol="0"/>
-          <a:lstStyle>
-            <a:lvl1pPr algn="r">
-              <a:defRPr sz="1200"/>
-            </a:lvl1pPr>
-          </a:lstStyle>
-          <a:p>
-            <a:fld id="{5282F153-3F37-0F45-9E97-73ACFA13230C}" type="datetimeFigureOut">
-              <a:rPr lang="en-US"/>
-              <a:t>7/23/19</a:t>
-            </a:fld>
-            <a:endParaRPr lang="en-US"/>
-          </a:p>
-        </p:txBody>
-      </p:sp>
-      <p:sp>
-        <p:nvSpPr>
-          <p:cNvPr id="4" name="Slide Image Placeholder 3"/>
-          <p:cNvSpPr>
-            <a:spLocks noGrp="1" noRot="1" noChangeAspect="1"/>
-          </p:cNvSpPr>
-          <p:nvPr>
-            <p:ph type="sldImg" idx="2"/>
-          </p:nvPr>
-        </p:nvSpPr>
-        <p:spPr>
-          <a:xfrm>
-            <a:off x="685800" y="1143000"/>
-            <a:ext cx="5486400" cy="3086100"/>
-          </a:xfrm>
-          <a:prstGeom prst="rect">
-            <a:avLst/>
-          </a:prstGeom>
-          <a:noFill/>
-          <a:ln w="12700">
-            <a:solidFill>
-              <a:prstClr val="black"/>
-            </a:solidFill>
-          </a:ln>
-        </p:spPr>
-        <p:txBody>
-          <a:bodyPr vert="horz" lIns="91440" tIns="45720" rIns="91440" bIns="45720" rtlCol="0" anchor="ctr"/>
-          <a:lstStyle/>
-          <a:p>
-            <a:endParaRPr lang="en-US"/>
-          </a:p>
-        </p:txBody>
-      </p:sp>
-      <p:sp>
-        <p:nvSpPr>
-          <p:cNvPr id="5" name="Notes Placeholder 4"/>
-          <p:cNvSpPr>
-            <a:spLocks noGrp="1"/>
-          </p:cNvSpPr>
-          <p:nvPr>
-            <p:ph type="body" sz="quarter" idx="3"/>
-          </p:nvPr>
-        </p:nvSpPr>
-        <p:spPr>
-          <a:xfrm>
-            <a:off x="685800" y="4400550"/>
-            <a:ext cx="5486400" cy="3600450"/>
-          </a:xfrm>
-          <a:prstGeom prst="rect">
-            <a:avLst/>
-          </a:prstGeom>
-        </p:spPr>
-        <p:txBody>
-          <a:bodyPr vert="horz" lIns="91440" tIns="45720" rIns="91440" bIns="45720" rtlCol="0"/>
-          <a:lstStyle/>
-          <a:p>
-            <a:pPr lvl="0"/>
-            <a:r>
-              <a:rPr lang="en-US"/>
-              <a:t>Click to edit Master text styles</a:t>
-            </a:r>
-          </a:p>
-          <a:p>
-            <a:pPr lvl="1"/>
-            <a:r>
-              <a:rPr lang="en-US"/>
-              <a:t>Second level</a:t>
-            </a:r>
-          </a:p>
-          <a:p>
-            <a:pPr lvl="2"/>
-            <a:r>
-              <a:rPr lang="en-US"/>
-              <a:t>Third level</a:t>
-            </a:r>
-          </a:p>
-          <a:p>
-            <a:pPr lvl="3"/>
-            <a:r>
-              <a:rPr lang="en-US"/>
-              <a:t>Fourth level</a:t>
-            </a:r>
-          </a:p>
-          <a:p>
-            <a:pPr lvl="4"/>
-            <a:r>
-              <a:rPr lang="en-US"/>
-              <a:t>Fifth level</a:t>
-            </a:r>
-          </a:p>
-        </p:txBody>
-      </p:sp>
-      <p:sp>
-        <p:nvSpPr>
-          <p:cNvPr id="6" name="Footer Placeholder 5"/>
-          <p:cNvSpPr>
-            <a:spLocks noGrp="1"/>
-          </p:cNvSpPr>
-          <p:nvPr>
-            <p:ph type="ftr" sz="quarter" idx="4"/>
-          </p:nvPr>
-        </p:nvSpPr>
-        <p:spPr>
-          <a:xfrm>
-            <a:off x="0" y="8685213"/>
-            <a:ext cx="2971800" cy="458787"/>
-          </a:xfrm>
-          <a:prstGeom prst="rect">
-            <a:avLst/>
-          </a:prstGeom>
-        </p:spPr>
-        <p:txBody>
-          <a:bodyPr vert="horz" lIns="91440" tIns="45720" rIns="91440" bIns="45720" rtlCol="0" anchor="b"/>
-          <a:lstStyle>
-            <a:lvl1pPr algn="l">
-              <a:defRPr sz="1200"/>
-            </a:lvl1pPr>
-          </a:lstStyle>
-          <a:p>
-            <a:endParaRPr lang="en-US"/>
-          </a:p>
-        </p:txBody>
-      </p:sp>
-      <p:sp>
-        <p:nvSpPr>
-          <p:cNvPr id="7" name="Slide Number Placeholder 6"/>
-          <p:cNvSpPr>
-            <a:spLocks noGrp="1"/>
-          </p:cNvSpPr>
-          <p:nvPr>
-            <p:ph type="sldNum" sz="quarter" idx="5"/>
-          </p:nvPr>
-        </p:nvSpPr>
-        <p:spPr>
-          <a:xfrm>
-            <a:off x="3884613" y="8685213"/>
-            <a:ext cx="2971800" cy="458787"/>
-          </a:xfrm>
-          <a:prstGeom prst="rect">
-            <a:avLst/>
-          </a:prstGeom>
-        </p:spPr>
-        <p:txBody>
-          <a:bodyPr vert="horz" lIns="91440" tIns="45720" rIns="91440" bIns="45720" rtlCol="0" anchor="b"/>
-          <a:lstStyle>
-            <a:lvl1pPr algn="r">
-              <a:defRPr sz="1200"/>
-            </a:lvl1pPr>
-          </a:lstStyle>
-          <a:p>
-            <a:fld id="{CE5E9CC1-C706-0F49-92D6-E571CC5EEA8F}" type="slidenum">
-              <a:rPr lang="en-US"/>
-              <a:t>‹#›</a:t>
-            </a:fld>
-            <a:endParaRPr lang="en-US"/>
-          </a:p>
-        </p:txBody>
-      </p:sp>
     </p:spTree>
     <p:extLst>
       <p:ext uri="{BB962C8B-B14F-4D97-AF65-F5344CB8AC3E}">
-        <p14:creationId xmlns:p14="http://schemas.microsoft.com/office/powerpoint/2010/main" val="1024086991"/>
+        <p14:creationId xmlns:p14="http://schemas.microsoft.com/office/powerpoint/2010/main" val="2084378315"/>
       </p:ext>
     </p:extLst>
   </p:cSld>
@@ -511,10 +293,6 @@
           <a:bodyPr/>
           <a:lstStyle/>
           <a:p>
-            <a:r>
-              <a:rPr lang="en-US" dirty="0"/>
-              <a:t/>
-            </a:r>
             <a:endParaRPr lang="en-US" dirty="0"/>
           </a:p>
         </p:txBody>
@@ -599,10 +377,6 @@
           <a:bodyPr/>
           <a:lstStyle/>
           <a:p>
-            <a:r>
-              <a:rPr lang="en-US" dirty="0"/>
-              <a:t/>
-            </a:r>
             <a:endParaRPr lang="en-US" dirty="0"/>
           </a:p>
         </p:txBody>
@@ -687,10 +461,6 @@
           <a:bodyPr/>
           <a:lstStyle/>
           <a:p>
-            <a:r>
-              <a:rPr lang="en-US" dirty="0"/>
-              <a:t/>
-            </a:r>
             <a:endParaRPr lang="en-US" dirty="0"/>
           </a:p>
         </p:txBody>
@@ -775,10 +545,6 @@
           <a:bodyPr/>
           <a:lstStyle/>
           <a:p>
-            <a:r>
-              <a:rPr lang="en-US" dirty="0"/>
-              <a:t/>
-            </a:r>
             <a:endParaRPr lang="en-US" dirty="0"/>
           </a:p>
         </p:txBody>
@@ -801,6 +567,90 @@
             <a:fld id="{F7021451-1387-4CA6-816F-3879F97B5CBC}" type="slidenum">
               <a:rPr lang="en-US"/>
               <a:t>12</a:t>
+            </a:fld>
+            <a:endParaRPr lang="en-US"/>
+          </a:p>
+        </p:txBody>
+      </p:sp>
+    </p:spTree>
+    <p:extLst>
+      <p:ext uri="{BB962C8B-B14F-4D97-AF65-F5344CB8AC3E}">
+        <p14:creationId xmlns:p14="http://schemas.microsoft.com/office/powerpoint/2010/main" val="1024086991"/>
+      </p:ext>
+    </p:extLst>
+  </p:cSld>
+  <p:clrMapOvr>
+    <a:masterClrMapping/>
+  </p:clrMapOvr>
+</p:notes>
+</file>
+
+<file path=ppt/notesSlides/notesSlide13.xml><?xml version="1.0" encoding="utf-8"?>
+<p:notes xmlns:a="http://schemas.openxmlformats.org/drawingml/2006/main" xmlns:r="http://schemas.openxmlformats.org/officeDocument/2006/relationships" xmlns:p="http://schemas.openxmlformats.org/presentationml/2006/main">
+  <p:cSld>
+    <p:spTree>
+      <p:nvGrpSpPr>
+        <p:cNvPr id="1" name=""/>
+        <p:cNvGrpSpPr/>
+        <p:nvPr/>
+      </p:nvGrpSpPr>
+      <p:grpSpPr>
+        <a:xfrm>
+          <a:off x="0" y="0"/>
+          <a:ext cx="0" cy="0"/>
+          <a:chOff x="0" y="0"/>
+          <a:chExt cx="0" cy="0"/>
+        </a:xfrm>
+      </p:grpSpPr>
+      <p:sp>
+        <p:nvSpPr>
+          <p:cNvPr id="2" name="Slide Image Placeholder 1"/>
+          <p:cNvSpPr>
+            <a:spLocks noGrp="1" noRot="1" noChangeAspect="1"/>
+          </p:cNvSpPr>
+          <p:nvPr>
+            <p:ph type="sldImg"/>
+          </p:nvPr>
+        </p:nvSpPr>
+        <p:spPr/>
+      </p:sp>
+      <p:sp>
+        <p:nvSpPr>
+          <p:cNvPr id="3" name="Notes Placeholder 2"/>
+          <p:cNvSpPr>
+            <a:spLocks noGrp="1"/>
+          </p:cNvSpPr>
+          <p:nvPr>
+            <p:ph type="body" idx="1"/>
+          </p:nvPr>
+        </p:nvSpPr>
+        <p:spPr/>
+        <p:txBody>
+          <a:bodyPr/>
+          <a:lstStyle/>
+          <a:p>
+            <a:endParaRPr lang="en-US" dirty="0"/>
+          </a:p>
+        </p:txBody>
+      </p:sp>
+      <p:sp>
+        <p:nvSpPr>
+          <p:cNvPr id="4" name="Slide Number Placeholder 3"/>
+          <p:cNvSpPr>
+            <a:spLocks noGrp="1"/>
+          </p:cNvSpPr>
+          <p:nvPr>
+            <p:ph type="sldNum" sz="quarter" idx="10"/>
+          </p:nvPr>
+        </p:nvSpPr>
+        <p:spPr/>
+        <p:txBody>
+          <a:bodyPr/>
+          <a:lstStyle/>
+          <a:p>
+            <a:fld id="{F7021451-1387-4CA6-816F-3879F97B5CBC}" type="slidenum">
+              <a:rPr lang="en-US"/>
+              <a:t>13</a:t>
             </a:fld>
             <a:endParaRPr lang="en-US"/>
           </a:p>
@@ -863,10 +713,6 @@
           <a:bodyPr/>
           <a:lstStyle/>
           <a:p>
-            <a:r>
-              <a:rPr lang="en-US" dirty="0"/>
-              <a:t/>
-            </a:r>
             <a:endParaRPr lang="en-US" dirty="0"/>
           </a:p>
         </p:txBody>
@@ -951,10 +797,6 @@
           <a:bodyPr/>
           <a:lstStyle/>
           <a:p>
-            <a:r>
-              <a:rPr lang="en-US" dirty="0"/>
-              <a:t/>
-            </a:r>
             <a:endParaRPr lang="en-US" dirty="0"/>
           </a:p>
         </p:txBody>
@@ -1039,10 +881,6 @@
           <a:bodyPr/>
           <a:lstStyle/>
           <a:p>
-            <a:r>
-              <a:rPr lang="en-US" dirty="0"/>
-              <a:t/>
-            </a:r>
             <a:endParaRPr lang="en-US" dirty="0"/>
           </a:p>
         </p:txBody>
@@ -1127,10 +965,6 @@
           <a:bodyPr/>
           <a:lstStyle/>
           <a:p>
-            <a:r>
-              <a:rPr lang="en-US" dirty="0"/>
-              <a:t/>
-            </a:r>
             <a:endParaRPr lang="en-US" dirty="0"/>
           </a:p>
         </p:txBody>
@@ -1215,10 +1049,6 @@
           <a:bodyPr/>
           <a:lstStyle/>
           <a:p>
-            <a:r>
-              <a:rPr lang="en-US" dirty="0"/>
-              <a:t/>
-            </a:r>
             <a:endParaRPr lang="en-US" dirty="0"/>
           </a:p>
         </p:txBody>
@@ -1303,10 +1133,6 @@
           <a:bodyPr/>
           <a:lstStyle/>
           <a:p>
-            <a:r>
-              <a:rPr lang="en-US" dirty="0"/>
-              <a:t/>
-            </a:r>
             <a:endParaRPr lang="en-US" dirty="0"/>
           </a:p>
         </p:txBody>
@@ -1391,10 +1217,6 @@
           <a:bodyPr/>
           <a:lstStyle/>
           <a:p>
-            <a:r>
-              <a:rPr lang="en-US" dirty="0"/>
-              <a:t/>
-            </a:r>
             <a:endParaRPr lang="en-US" dirty="0"/>
           </a:p>
         </p:txBody>
@@ -1479,10 +1301,6 @@
           <a:bodyPr/>
           <a:lstStyle/>
           <a:p>
-            <a:r>
-              <a:rPr lang="en-US" dirty="0"/>
-              <a:t/>
-            </a:r>
             <a:endParaRPr lang="en-US" dirty="0"/>
           </a:p>
         </p:txBody>
@@ -1556,6 +1374,11 @@
 <file path=ppt/slideMasters/slideMaster1.xml><?xml version="1.0" encoding="utf-8"?>
 <p:sldMaster xmlns:a="http://schemas.openxmlformats.org/drawingml/2006/main" xmlns:r="http://schemas.openxmlformats.org/officeDocument/2006/relationships" xmlns:p="http://schemas.openxmlformats.org/presentationml/2006/main">
   <p:cSld>
+    <p:bg>
+      <p:bgRef idx="1001">
+        <a:schemeClr val="bg1"/>
+      </p:bgRef>
+    </p:bg>
     <p:spTree>
       <p:nvGrpSpPr>
         <p:cNvPr id="1" name=""/>
@@ -1838,6 +1661,7 @@
         <a:solidFill>
           <a:srgbClr val="21295C"/>
         </a:solidFill>
+        <a:effectLst/>
       </p:bgPr>
     </p:bg>
     <p:spTree>
@@ -1939,11 +1763,11 @@
           <a:bodyPr wrap="square" rtlCol="0" anchor="ctr"/>
           <a:lstStyle/>
           <a:p>
-            <a:pPr indent="0" marL="0">
-              <a:buNone/>
-            </a:pPr>
-            <a:r>
-              <a:rPr lang="en-US" sz="1800" b="1" spc="400" kern="0" dirty="0">
+            <a:pPr marL="0" indent="0">
+              <a:buNone/>
+            </a:pPr>
+            <a:r>
+              <a:rPr lang="en-US" sz="1800" b="1" kern="0" spc="400" dirty="0">
                 <a:solidFill>
                   <a:srgbClr val="CADCFC"/>
                 </a:solidFill>
@@ -1978,7 +1802,7 @@
           <a:bodyPr wrap="square" rtlCol="0" anchor="ctr"/>
           <a:lstStyle/>
           <a:p>
-            <a:pPr indent="0" marL="0">
+            <a:pPr marL="0" indent="0">
               <a:buNone/>
             </a:pPr>
             <a:r>
@@ -2017,7 +1841,7 @@
           <a:bodyPr wrap="square" rtlCol="0" anchor="ctr"/>
           <a:lstStyle/>
           <a:p>
-            <a:pPr indent="0" marL="0">
+            <a:pPr marL="0" indent="0">
               <a:buNone/>
             </a:pPr>
             <a:r>
@@ -2056,7 +1880,7 @@
           <a:bodyPr wrap="square" rtlCol="0" anchor="ctr"/>
           <a:lstStyle/>
           <a:p>
-            <a:pPr indent="0" marL="0">
+            <a:pPr marL="0" indent="0">
               <a:buNone/>
             </a:pPr>
             <a:r>
@@ -2088,8 +1912,9 @@
     <p:bg>
       <p:bgPr>
         <a:solidFill>
-          <a:srgbClr val="FFFFFF"/>
+          <a:srgbClr val="21295C"/>
         </a:solidFill>
+        <a:effectLst/>
       </p:bgPr>
     </p:bg>
     <p:spTree>
@@ -2108,355 +1933,171 @@
       </p:grpSpPr>
       <p:sp>
         <p:nvSpPr>
-          <p:cNvPr id="2" name="Text 0"/>
+          <p:cNvPr id="2" name="Shape 0"/>
+          <p:cNvSpPr/>
+          <p:nvPr/>
+        </p:nvSpPr>
+        <p:spPr>
+          <a:xfrm>
+            <a:off x="9692640" y="-2286000"/>
+            <a:ext cx="5029200" cy="5029200"/>
+          </a:xfrm>
+          <a:prstGeom prst="ellipse">
+            <a:avLst/>
+          </a:prstGeom>
+          <a:solidFill>
+            <a:srgbClr val="065A82">
+              <a:alpha val="40000"/>
+            </a:srgbClr>
+          </a:solidFill>
+          <a:ln/>
+        </p:spPr>
+      </p:sp>
+      <p:sp>
+        <p:nvSpPr>
+          <p:cNvPr id="3" name="Shape 1"/>
+          <p:cNvSpPr/>
+          <p:nvPr/>
+        </p:nvSpPr>
+        <p:spPr>
+          <a:xfrm>
+            <a:off x="-2011680" y="5029200"/>
+            <a:ext cx="4572000" cy="4572000"/>
+          </a:xfrm>
+          <a:prstGeom prst="ellipse">
+            <a:avLst/>
+          </a:prstGeom>
+          <a:solidFill>
+            <a:srgbClr val="1C7293">
+              <a:alpha val="40000"/>
+            </a:srgbClr>
+          </a:solidFill>
+          <a:ln/>
+        </p:spPr>
+      </p:sp>
+      <p:sp>
+        <p:nvSpPr>
+          <p:cNvPr id="4" name="Text 2"/>
           <p:cNvSpPr/>
           <p:nvPr/>
         </p:nvSpPr>
         <p:spPr>
           <a:xfrm>
             <a:off x="548640" y="457200"/>
-            <a:ext cx="9144000" cy="640080"/>
-          </a:xfrm>
-          <a:prstGeom prst="rect">
-            <a:avLst/>
-          </a:prstGeom>
-          <a:noFill/>
-          <a:ln/>
-        </p:spPr>
-        <p:txBody>
-          <a:bodyPr wrap="square" rtlCol="0" anchor="ctr"/>
-          <a:lstStyle/>
-          <a:p>
-            <a:pPr indent="0" marL="0">
-              <a:buNone/>
-            </a:pPr>
-            <a:r>
-              <a:rPr lang="en-US" sz="3200" b="1" dirty="0">
-                <a:solidFill>
-                  <a:srgbClr val="21295C"/>
+            <a:ext cx="10058400" cy="640080"/>
+          </a:xfrm>
+          <a:prstGeom prst="rect">
+            <a:avLst/>
+          </a:prstGeom>
+          <a:noFill/>
+          <a:ln/>
+        </p:spPr>
+        <p:txBody>
+          <a:bodyPr wrap="square" rtlCol="0" anchor="ctr"/>
+          <a:lstStyle/>
+          <a:p>
+            <a:pPr marL="0" indent="0">
+              <a:buNone/>
+            </a:pPr>
+            <a:r>
+              <a:rPr lang="en-US" sz="3000" b="1" dirty="0">
+                <a:solidFill>
+                  <a:srgbClr val="FFFFFF"/>
                 </a:solidFill>
                 <a:latin typeface="Cambria" pitchFamily="34" charset="0"/>
                 <a:ea typeface="Cambria" pitchFamily="34" charset="-122"/>
                 <a:cs typeface="Cambria" pitchFamily="34" charset="-120"/>
               </a:rPr>
-              <a:t>Data Quality and Validation</a:t>
-            </a:r>
-            <a:endParaRPr lang="en-US" sz="3200" dirty="0"/>
-          </a:p>
-        </p:txBody>
-      </p:sp>
-      <p:sp>
-        <p:nvSpPr>
-          <p:cNvPr id="3" name="Text 1"/>
-          <p:cNvSpPr/>
-          <p:nvPr/>
-        </p:nvSpPr>
-        <p:spPr>
-          <a:xfrm>
-            <a:off x="548640" y="1097280"/>
-            <a:ext cx="10789920" cy="457200"/>
-          </a:xfrm>
-          <a:prstGeom prst="rect">
-            <a:avLst/>
-          </a:prstGeom>
-          <a:noFill/>
-          <a:ln/>
-        </p:spPr>
-        <p:txBody>
-          <a:bodyPr wrap="square" rtlCol="0" anchor="ctr"/>
-          <a:lstStyle/>
-          <a:p>
-            <a:pPr indent="0" marL="0">
-              <a:buNone/>
-            </a:pPr>
-            <a:r>
-              <a:rPr lang="en-US" sz="1350" dirty="0">
-                <a:solidFill>
-                  <a:srgbClr val="607080"/>
+              <a:t>Reflections From the Project</a:t>
+            </a:r>
+            <a:endParaRPr lang="en-US" sz="3000" dirty="0"/>
+          </a:p>
+        </p:txBody>
+      </p:sp>
+      <p:sp>
+        <p:nvSpPr>
+          <p:cNvPr id="5" name="Shape 3"/>
+          <p:cNvSpPr/>
+          <p:nvPr/>
+        </p:nvSpPr>
+        <p:spPr>
+          <a:xfrm>
+            <a:off x="566928" y="1024128"/>
+            <a:ext cx="502920" cy="64008"/>
+          </a:xfrm>
+          <a:prstGeom prst="rect">
+            <a:avLst/>
+          </a:prstGeom>
+          <a:solidFill>
+            <a:srgbClr val="CADCFC"/>
+          </a:solidFill>
+          <a:ln/>
+        </p:spPr>
+      </p:sp>
+      <p:sp>
+        <p:nvSpPr>
+          <p:cNvPr id="6" name="Text 4"/>
+          <p:cNvSpPr/>
+          <p:nvPr/>
+        </p:nvSpPr>
+        <p:spPr>
+          <a:xfrm>
+            <a:off x="548640" y="1143000"/>
+            <a:ext cx="10058400" cy="365760"/>
+          </a:xfrm>
+          <a:prstGeom prst="rect">
+            <a:avLst/>
+          </a:prstGeom>
+          <a:noFill/>
+          <a:ln/>
+        </p:spPr>
+        <p:txBody>
+          <a:bodyPr wrap="square" rtlCol="0" anchor="ctr"/>
+          <a:lstStyle/>
+          <a:p>
+            <a:pPr marL="0" indent="0">
+              <a:buNone/>
+            </a:pPr>
+            <a:r>
+              <a:rPr lang="en-US" sz="1300" i="1" dirty="0">
+                <a:solidFill>
+                  <a:srgbClr val="CADCFC"/>
                 </a:solidFill>
                 <a:latin typeface="Calibri" pitchFamily="34" charset="0"/>
                 <a:ea typeface="Calibri" pitchFamily="34" charset="-122"/>
                 <a:cs typeface="Calibri" pitchFamily="34" charset="-120"/>
               </a:rPr>
-              <a:t>Every mart column is covered by automated dbt tests to catch broken joins or missing data before it reaches a dashboard</a:t>
-            </a:r>
-            <a:endParaRPr lang="en-US" sz="1350" dirty="0"/>
-          </a:p>
-        </p:txBody>
-      </p:sp>
-      <p:sp>
-        <p:nvSpPr>
-          <p:cNvPr id="4" name="Shape 2"/>
-          <p:cNvSpPr/>
-          <p:nvPr/>
-        </p:nvSpPr>
-        <p:spPr>
-          <a:xfrm>
-            <a:off x="548640" y="1965960"/>
-            <a:ext cx="3520440" cy="1188720"/>
+              <a:t>In our own words, from the project README</a:t>
+            </a:r>
+            <a:endParaRPr lang="en-US" sz="1300" dirty="0"/>
+          </a:p>
+        </p:txBody>
+      </p:sp>
+      <p:sp>
+        <p:nvSpPr>
+          <p:cNvPr id="7" name="Shape 5"/>
+          <p:cNvSpPr/>
+          <p:nvPr/>
+        </p:nvSpPr>
+        <p:spPr>
+          <a:xfrm>
+            <a:off x="548640" y="1874520"/>
+            <a:ext cx="11064240" cy="1298448"/>
           </a:xfrm>
           <a:prstGeom prst="roundRect">
             <a:avLst>
-              <a:gd name="adj" fmla="val 7692"/>
+              <a:gd name="adj" fmla="val 7042"/>
             </a:avLst>
           </a:prstGeom>
           <a:solidFill>
-            <a:srgbClr val="F7FAFC"/>
+            <a:srgbClr val="2A3470"/>
           </a:solidFill>
           <a:ln/>
         </p:spPr>
       </p:sp>
       <p:pic>
         <p:nvPicPr>
-          <p:cNvPr id="5" name="Image 0" descr="icon_check_navy.png">    </p:cNvPr>
-          <p:cNvPicPr>
-            <a:picLocks noChangeAspect="1"/>
-          </p:cNvPicPr>
-          <p:nvPr/>
-        </p:nvPicPr>
-        <p:blipFill>
-          <a:blip r:embed="rId1"/>
-          <a:stretch>
-            <a:fillRect/>
-          </a:stretch>
-        </p:blipFill>
-        <p:spPr>
-          <a:xfrm>
-            <a:off x="777240" y="2240280"/>
-            <a:ext cx="502920" cy="502920"/>
-          </a:xfrm>
-          <a:prstGeom prst="rect">
-            <a:avLst/>
-          </a:prstGeom>
-        </p:spPr>
-      </p:pic>
-      <p:sp>
-        <p:nvSpPr>
-          <p:cNvPr id="6" name="Text 3"/>
-          <p:cNvSpPr/>
-          <p:nvPr/>
-        </p:nvSpPr>
-        <p:spPr>
-          <a:xfrm>
-            <a:off x="1417320" y="2130552"/>
-            <a:ext cx="2468880" cy="365760"/>
-          </a:xfrm>
-          <a:prstGeom prst="rect">
-            <a:avLst/>
-          </a:prstGeom>
-          <a:noFill/>
-          <a:ln/>
-        </p:spPr>
-        <p:txBody>
-          <a:bodyPr wrap="square" rtlCol="0" anchor="ctr"/>
-          <a:lstStyle/>
-          <a:p>
-            <a:pPr indent="0" marL="0">
-              <a:buNone/>
-            </a:pPr>
-            <a:r>
-              <a:rPr lang="en-US" sz="1350" b="1" dirty="0">
-                <a:solidFill>
-                  <a:srgbClr val="263238"/>
-                </a:solidFill>
-                <a:latin typeface="Cambria" pitchFamily="34" charset="0"/>
-                <a:ea typeface="Cambria" pitchFamily="34" charset="-122"/>
-                <a:cs typeface="Cambria" pitchFamily="34" charset="-120"/>
-              </a:rPr>
-              <a:t>order_year</a:t>
-            </a:r>
-            <a:endParaRPr lang="en-US" sz="1350" dirty="0"/>
-          </a:p>
-        </p:txBody>
-      </p:sp>
-      <p:sp>
-        <p:nvSpPr>
-          <p:cNvPr id="7" name="Text 4"/>
-          <p:cNvSpPr/>
-          <p:nvPr/>
-        </p:nvSpPr>
-        <p:spPr>
-          <a:xfrm>
-            <a:off x="1417320" y="2514600"/>
-            <a:ext cx="2468880" cy="365760"/>
-          </a:xfrm>
-          <a:prstGeom prst="rect">
-            <a:avLst/>
-          </a:prstGeom>
-          <a:noFill/>
-          <a:ln/>
-        </p:spPr>
-        <p:txBody>
-          <a:bodyPr wrap="square" rtlCol="0" anchor="ctr"/>
-          <a:lstStyle/>
-          <a:p>
-            <a:pPr indent="0" marL="0">
-              <a:buNone/>
-            </a:pPr>
-            <a:r>
-              <a:rPr lang="en-US" sz="1100" dirty="0">
-                <a:solidFill>
-                  <a:srgbClr val="065A82"/>
-                </a:solidFill>
-                <a:latin typeface="Calibri" pitchFamily="34" charset="0"/>
-                <a:ea typeface="Calibri" pitchFamily="34" charset="-122"/>
-                <a:cs typeface="Calibri" pitchFamily="34" charset="-120"/>
-              </a:rPr>
-              <a:t>not null, verified</a:t>
-            </a:r>
-            <a:endParaRPr lang="en-US" sz="1100" dirty="0"/>
-          </a:p>
-        </p:txBody>
-      </p:sp>
-      <p:sp>
-        <p:nvSpPr>
-          <p:cNvPr id="8" name="Shape 5"/>
-          <p:cNvSpPr/>
-          <p:nvPr/>
-        </p:nvSpPr>
-        <p:spPr>
-          <a:xfrm>
-            <a:off x="4297680" y="1965960"/>
-            <a:ext cx="3520440" cy="1188720"/>
-          </a:xfrm>
-          <a:prstGeom prst="roundRect">
-            <a:avLst>
-              <a:gd name="adj" fmla="val 7692"/>
-            </a:avLst>
-          </a:prstGeom>
-          <a:solidFill>
-            <a:srgbClr val="F7FAFC"/>
-          </a:solidFill>
-          <a:ln/>
-        </p:spPr>
-      </p:sp>
-      <p:pic>
-        <p:nvPicPr>
-          <p:cNvPr id="9" name="Image 1" descr="icon_check_navy.png">    </p:cNvPr>
-          <p:cNvPicPr>
-            <a:picLocks noChangeAspect="1"/>
-          </p:cNvPicPr>
-          <p:nvPr/>
-        </p:nvPicPr>
-        <p:blipFill>
-          <a:blip r:embed="rId2"/>
-          <a:stretch>
-            <a:fillRect/>
-          </a:stretch>
-        </p:blipFill>
-        <p:spPr>
-          <a:xfrm>
-            <a:off x="4526280" y="2240280"/>
-            <a:ext cx="502920" cy="502920"/>
-          </a:xfrm>
-          <a:prstGeom prst="rect">
-            <a:avLst/>
-          </a:prstGeom>
-        </p:spPr>
-      </p:pic>
-      <p:sp>
-        <p:nvSpPr>
-          <p:cNvPr id="10" name="Text 6"/>
-          <p:cNvSpPr/>
-          <p:nvPr/>
-        </p:nvSpPr>
-        <p:spPr>
-          <a:xfrm>
-            <a:off x="5166360" y="2130552"/>
-            <a:ext cx="2468880" cy="365760"/>
-          </a:xfrm>
-          <a:prstGeom prst="rect">
-            <a:avLst/>
-          </a:prstGeom>
-          <a:noFill/>
-          <a:ln/>
-        </p:spPr>
-        <p:txBody>
-          <a:bodyPr wrap="square" rtlCol="0" anchor="ctr"/>
-          <a:lstStyle/>
-          <a:p>
-            <a:pPr indent="0" marL="0">
-              <a:buNone/>
-            </a:pPr>
-            <a:r>
-              <a:rPr lang="en-US" sz="1350" b="1" dirty="0">
-                <a:solidFill>
-                  <a:srgbClr val="263238"/>
-                </a:solidFill>
-                <a:latin typeface="Cambria" pitchFamily="34" charset="0"/>
-                <a:ea typeface="Cambria" pitchFamily="34" charset="-122"/>
-                <a:cs typeface="Cambria" pitchFamily="34" charset="-120"/>
-              </a:rPr>
-              <a:t>order_month</a:t>
-            </a:r>
-            <a:endParaRPr lang="en-US" sz="1350" dirty="0"/>
-          </a:p>
-        </p:txBody>
-      </p:sp>
-      <p:sp>
-        <p:nvSpPr>
-          <p:cNvPr id="11" name="Text 7"/>
-          <p:cNvSpPr/>
-          <p:nvPr/>
-        </p:nvSpPr>
-        <p:spPr>
-          <a:xfrm>
-            <a:off x="5166360" y="2514600"/>
-            <a:ext cx="2468880" cy="365760"/>
-          </a:xfrm>
-          <a:prstGeom prst="rect">
-            <a:avLst/>
-          </a:prstGeom>
-          <a:noFill/>
-          <a:ln/>
-        </p:spPr>
-        <p:txBody>
-          <a:bodyPr wrap="square" rtlCol="0" anchor="ctr"/>
-          <a:lstStyle/>
-          <a:p>
-            <a:pPr indent="0" marL="0">
-              <a:buNone/>
-            </a:pPr>
-            <a:r>
-              <a:rPr lang="en-US" sz="1100" dirty="0">
-                <a:solidFill>
-                  <a:srgbClr val="065A82"/>
-                </a:solidFill>
-                <a:latin typeface="Calibri" pitchFamily="34" charset="0"/>
-                <a:ea typeface="Calibri" pitchFamily="34" charset="-122"/>
-                <a:cs typeface="Calibri" pitchFamily="34" charset="-120"/>
-              </a:rPr>
-              <a:t>not null, verified</a:t>
-            </a:r>
-            <a:endParaRPr lang="en-US" sz="1100" dirty="0"/>
-          </a:p>
-        </p:txBody>
-      </p:sp>
-      <p:sp>
-        <p:nvSpPr>
-          <p:cNvPr id="12" name="Shape 8"/>
-          <p:cNvSpPr/>
-          <p:nvPr/>
-        </p:nvSpPr>
-        <p:spPr>
-          <a:xfrm>
-            <a:off x="8046720" y="1965960"/>
-            <a:ext cx="3520440" cy="1188720"/>
-          </a:xfrm>
-          <a:prstGeom prst="roundRect">
-            <a:avLst>
-              <a:gd name="adj" fmla="val 7692"/>
-            </a:avLst>
-          </a:prstGeom>
-          <a:solidFill>
-            <a:srgbClr val="F7FAFC"/>
-          </a:solidFill>
-          <a:ln/>
-        </p:spPr>
-      </p:sp>
-      <p:pic>
-        <p:nvPicPr>
-          <p:cNvPr id="13" name="Image 2" descr="icon_check_navy.png">    </p:cNvPr>
+          <p:cNvPr id="8" name="Image 0" descr="icon_quote_teal.png"/>
           <p:cNvPicPr>
             <a:picLocks noChangeAspect="1"/>
           </p:cNvPicPr>
@@ -2470,8 +2111,8 @@
         </p:blipFill>
         <p:spPr>
           <a:xfrm>
-            <a:off x="8275320" y="2240280"/>
-            <a:ext cx="502920" cy="502920"/>
+            <a:off x="777240" y="2057400"/>
+            <a:ext cx="384048" cy="384048"/>
           </a:xfrm>
           <a:prstGeom prst="rect">
             <a:avLst/>
@@ -2480,122 +2121,136 @@
       </p:pic>
       <p:sp>
         <p:nvSpPr>
-          <p:cNvPr id="14" name="Text 9"/>
-          <p:cNvSpPr/>
-          <p:nvPr/>
-        </p:nvSpPr>
-        <p:spPr>
-          <a:xfrm>
-            <a:off x="8915400" y="2130552"/>
-            <a:ext cx="2468880" cy="365760"/>
-          </a:xfrm>
-          <a:prstGeom prst="rect">
-            <a:avLst/>
-          </a:prstGeom>
-          <a:noFill/>
-          <a:ln/>
-        </p:spPr>
-        <p:txBody>
-          <a:bodyPr wrap="square" rtlCol="0" anchor="ctr"/>
-          <a:lstStyle/>
-          <a:p>
-            <a:pPr indent="0" marL="0">
-              <a:buNone/>
-            </a:pPr>
-            <a:r>
-              <a:rPr lang="en-US" sz="1350" b="1" dirty="0">
-                <a:solidFill>
-                  <a:srgbClr val="263238"/>
-                </a:solidFill>
-                <a:latin typeface="Cambria" pitchFamily="34" charset="0"/>
-                <a:ea typeface="Cambria" pitchFamily="34" charset="-122"/>
-                <a:cs typeface="Cambria" pitchFamily="34" charset="-120"/>
-              </a:rPr>
-              <a:t>category_name</a:t>
-            </a:r>
-            <a:endParaRPr lang="en-US" sz="1350" dirty="0"/>
-          </a:p>
-        </p:txBody>
-      </p:sp>
-      <p:sp>
-        <p:nvSpPr>
-          <p:cNvPr id="15" name="Text 10"/>
-          <p:cNvSpPr/>
-          <p:nvPr/>
-        </p:nvSpPr>
-        <p:spPr>
-          <a:xfrm>
-            <a:off x="8915400" y="2514600"/>
-            <a:ext cx="2468880" cy="365760"/>
-          </a:xfrm>
-          <a:prstGeom prst="rect">
-            <a:avLst/>
-          </a:prstGeom>
-          <a:noFill/>
-          <a:ln/>
-        </p:spPr>
-        <p:txBody>
-          <a:bodyPr wrap="square" rtlCol="0" anchor="ctr"/>
-          <a:lstStyle/>
-          <a:p>
-            <a:pPr indent="0" marL="0">
-              <a:buNone/>
-            </a:pPr>
-            <a:r>
-              <a:rPr lang="en-US" sz="1100" dirty="0">
-                <a:solidFill>
-                  <a:srgbClr val="065A82"/>
+          <p:cNvPr id="9" name="Text 6"/>
+          <p:cNvSpPr/>
+          <p:nvPr/>
+        </p:nvSpPr>
+        <p:spPr>
+          <a:xfrm>
+            <a:off x="1371600" y="2002536"/>
+            <a:ext cx="9966960" cy="822960"/>
+          </a:xfrm>
+          <a:prstGeom prst="rect">
+            <a:avLst/>
+          </a:prstGeom>
+          <a:noFill/>
+          <a:ln/>
+        </p:spPr>
+        <p:txBody>
+          <a:bodyPr wrap="square" rtlCol="0" anchor="t"/>
+          <a:lstStyle/>
+          <a:p>
+            <a:pPr marL="0" indent="0">
+              <a:lnSpc>
+                <a:spcPct val="115000"/>
+              </a:lnSpc>
+              <a:buNone/>
+            </a:pPr>
+            <a:r>
+              <a:rPr lang="en-US" sz="1300" i="1" dirty="0">
+                <a:solidFill>
+                  <a:srgbClr val="FFFFFF"/>
                 </a:solidFill>
                 <a:latin typeface="Calibri" pitchFamily="34" charset="0"/>
                 <a:ea typeface="Calibri" pitchFamily="34" charset="-122"/>
                 <a:cs typeface="Calibri" pitchFamily="34" charset="-120"/>
               </a:rPr>
-              <a:t>not null, verified</a:t>
-            </a:r>
-            <a:endParaRPr lang="en-US" sz="1100" dirty="0"/>
-          </a:p>
-        </p:txBody>
-      </p:sp>
-      <p:sp>
-        <p:nvSpPr>
-          <p:cNvPr id="16" name="Shape 11"/>
-          <p:cNvSpPr/>
-          <p:nvPr/>
-        </p:nvSpPr>
-        <p:spPr>
-          <a:xfrm>
-            <a:off x="548640" y="3383280"/>
-            <a:ext cx="3520440" cy="1188720"/>
+              <a:t>"</a:t>
+            </a:r>
+            <a:r>
+              <a:rPr lang="en-GB" sz="1300" i="1" dirty="0">
+                <a:solidFill>
+                  <a:srgbClr val="FFFFFF"/>
+                </a:solidFill>
+                <a:latin typeface="Calibri" pitchFamily="34" charset="0"/>
+                <a:ea typeface="Calibri" pitchFamily="34" charset="-122"/>
+                <a:cs typeface="Calibri" pitchFamily="34" charset="-120"/>
+              </a:rPr>
+              <a:t>The sample solution didn't match the real database, so I had to actually check the columns myself, and that's when it really clicked what this job is.”</a:t>
+            </a:r>
+            <a:endParaRPr lang="en-US" sz="1300" dirty="0"/>
+          </a:p>
+        </p:txBody>
+      </p:sp>
+      <p:sp>
+        <p:nvSpPr>
+          <p:cNvPr id="10" name="Text 7"/>
+          <p:cNvSpPr/>
+          <p:nvPr/>
+        </p:nvSpPr>
+        <p:spPr>
+          <a:xfrm>
+            <a:off x="1371600" y="2816352"/>
+            <a:ext cx="9966960" cy="274320"/>
+          </a:xfrm>
+          <a:prstGeom prst="rect">
+            <a:avLst/>
+          </a:prstGeom>
+          <a:noFill/>
+          <a:ln/>
+        </p:spPr>
+        <p:txBody>
+          <a:bodyPr wrap="square" rtlCol="0" anchor="ctr"/>
+          <a:lstStyle/>
+          <a:p>
+            <a:pPr marL="0" indent="0">
+              <a:buNone/>
+            </a:pPr>
+            <a:r>
+              <a:rPr lang="en-US" sz="900" b="1" kern="0" spc="100" dirty="0">
+                <a:solidFill>
+                  <a:srgbClr val="A9C3E8"/>
+                </a:solidFill>
+                <a:latin typeface="Calibri" pitchFamily="34" charset="0"/>
+                <a:ea typeface="Calibri" pitchFamily="34" charset="-122"/>
+                <a:cs typeface="Calibri" pitchFamily="34" charset="-120"/>
+              </a:rPr>
+              <a:t>ON WORKING WITH REAL DATA</a:t>
+            </a:r>
+            <a:endParaRPr lang="en-US" sz="900" dirty="0"/>
+          </a:p>
+        </p:txBody>
+      </p:sp>
+      <p:sp>
+        <p:nvSpPr>
+          <p:cNvPr id="11" name="Shape 8"/>
+          <p:cNvSpPr/>
+          <p:nvPr/>
+        </p:nvSpPr>
+        <p:spPr>
+          <a:xfrm>
+            <a:off x="548640" y="3355848"/>
+            <a:ext cx="11064240" cy="1298448"/>
           </a:xfrm>
           <a:prstGeom prst="roundRect">
             <a:avLst>
-              <a:gd name="adj" fmla="val 7692"/>
+              <a:gd name="adj" fmla="val 7042"/>
             </a:avLst>
           </a:prstGeom>
           <a:solidFill>
-            <a:srgbClr val="F7FAFC"/>
+            <a:srgbClr val="2A3470"/>
           </a:solidFill>
           <a:ln/>
         </p:spPr>
       </p:sp>
       <p:pic>
         <p:nvPicPr>
-          <p:cNvPr id="17" name="Image 3" descr="icon_check_navy.png">    </p:cNvPr>
+          <p:cNvPr id="12" name="Image 1" descr="icon_quote_teal.png"/>
           <p:cNvPicPr>
             <a:picLocks noChangeAspect="1"/>
           </p:cNvPicPr>
           <p:nvPr/>
         </p:nvPicPr>
         <p:blipFill>
-          <a:blip r:embed="rId4"/>
+          <a:blip r:embed="rId3"/>
           <a:stretch>
             <a:fillRect/>
           </a:stretch>
         </p:blipFill>
         <p:spPr>
           <a:xfrm>
-            <a:off x="777240" y="3657600"/>
-            <a:ext cx="502920" cy="502920"/>
+            <a:off x="777240" y="3538728"/>
+            <a:ext cx="384048" cy="384048"/>
           </a:xfrm>
           <a:prstGeom prst="rect">
             <a:avLst/>
@@ -2604,122 +2259,125 @@
       </p:pic>
       <p:sp>
         <p:nvSpPr>
-          <p:cNvPr id="18" name="Text 12"/>
-          <p:cNvSpPr/>
-          <p:nvPr/>
-        </p:nvSpPr>
-        <p:spPr>
-          <a:xfrm>
-            <a:off x="1417320" y="3547872"/>
-            <a:ext cx="2468880" cy="365760"/>
-          </a:xfrm>
-          <a:prstGeom prst="rect">
-            <a:avLst/>
-          </a:prstGeom>
-          <a:noFill/>
-          <a:ln/>
-        </p:spPr>
-        <p:txBody>
-          <a:bodyPr wrap="square" rtlCol="0" anchor="ctr"/>
-          <a:lstStyle/>
-          <a:p>
-            <a:pPr indent="0" marL="0">
-              <a:buNone/>
-            </a:pPr>
-            <a:r>
-              <a:rPr lang="en-US" sz="1350" b="1" dirty="0">
-                <a:solidFill>
-                  <a:srgbClr val="263238"/>
-                </a:solidFill>
-                <a:latin typeface="Cambria" pitchFamily="34" charset="0"/>
-                <a:ea typeface="Cambria" pitchFamily="34" charset="-122"/>
-                <a:cs typeface="Cambria" pitchFamily="34" charset="-120"/>
-              </a:rPr>
-              <a:t>total_revenue</a:t>
-            </a:r>
-            <a:endParaRPr lang="en-US" sz="1350" dirty="0"/>
-          </a:p>
-        </p:txBody>
-      </p:sp>
-      <p:sp>
-        <p:nvSpPr>
-          <p:cNvPr id="19" name="Text 13"/>
-          <p:cNvSpPr/>
-          <p:nvPr/>
-        </p:nvSpPr>
-        <p:spPr>
-          <a:xfrm>
-            <a:off x="1417320" y="3931920"/>
-            <a:ext cx="2468880" cy="365760"/>
-          </a:xfrm>
-          <a:prstGeom prst="rect">
-            <a:avLst/>
-          </a:prstGeom>
-          <a:noFill/>
-          <a:ln/>
-        </p:spPr>
-        <p:txBody>
-          <a:bodyPr wrap="square" rtlCol="0" anchor="ctr"/>
-          <a:lstStyle/>
-          <a:p>
-            <a:pPr indent="0" marL="0">
-              <a:buNone/>
-            </a:pPr>
-            <a:r>
-              <a:rPr lang="en-US" sz="1100" dirty="0">
-                <a:solidFill>
-                  <a:srgbClr val="065A82"/>
+          <p:cNvPr id="13" name="Text 9"/>
+          <p:cNvSpPr/>
+          <p:nvPr/>
+        </p:nvSpPr>
+        <p:spPr>
+          <a:xfrm>
+            <a:off x="1371600" y="3483864"/>
+            <a:ext cx="9966960" cy="822960"/>
+          </a:xfrm>
+          <a:prstGeom prst="rect">
+            <a:avLst/>
+          </a:prstGeom>
+          <a:noFill/>
+          <a:ln/>
+        </p:spPr>
+        <p:txBody>
+          <a:bodyPr wrap="square" rtlCol="0" anchor="t"/>
+          <a:lstStyle/>
+          <a:p>
+            <a:pPr marL="0" indent="0">
+              <a:lnSpc>
+                <a:spcPct val="115000"/>
+              </a:lnSpc>
+              <a:buNone/>
+            </a:pPr>
+            <a:r>
+              <a:rPr lang="en-US" sz="1300" i="1" dirty="0">
+                <a:solidFill>
+                  <a:srgbClr val="FFFFFF"/>
                 </a:solidFill>
                 <a:latin typeface="Calibri" pitchFamily="34" charset="0"/>
                 <a:ea typeface="Calibri" pitchFamily="34" charset="-122"/>
                 <a:cs typeface="Calibri" pitchFamily="34" charset="-120"/>
               </a:rPr>
-              <a:t>not null, verified</a:t>
-            </a:r>
-            <a:endParaRPr lang="en-US" sz="1100" dirty="0"/>
-          </a:p>
-        </p:txBody>
-      </p:sp>
-      <p:sp>
-        <p:nvSpPr>
-          <p:cNvPr id="20" name="Shape 14"/>
-          <p:cNvSpPr/>
-          <p:nvPr/>
-        </p:nvSpPr>
-        <p:spPr>
-          <a:xfrm>
-            <a:off x="4297680" y="3383280"/>
-            <a:ext cx="3520440" cy="1188720"/>
+              <a:t>"Verifying the real schema before writing a single line of SQL is not optional, it is the actual first step of the job."</a:t>
+            </a:r>
+            <a:endParaRPr lang="en-US" sz="1300" dirty="0"/>
+          </a:p>
+        </p:txBody>
+      </p:sp>
+      <p:sp>
+        <p:nvSpPr>
+          <p:cNvPr id="14" name="Text 10"/>
+          <p:cNvSpPr/>
+          <p:nvPr/>
+        </p:nvSpPr>
+        <p:spPr>
+          <a:xfrm>
+            <a:off x="1371600" y="4297680"/>
+            <a:ext cx="9966960" cy="274320"/>
+          </a:xfrm>
+          <a:prstGeom prst="rect">
+            <a:avLst/>
+          </a:prstGeom>
+          <a:noFill/>
+          <a:ln/>
+        </p:spPr>
+        <p:txBody>
+          <a:bodyPr wrap="square" rtlCol="0" anchor="ctr"/>
+          <a:lstStyle/>
+          <a:p>
+            <a:pPr marL="0" indent="0">
+              <a:buNone/>
+            </a:pPr>
+            <a:r>
+              <a:rPr lang="en-US" sz="900" b="1" kern="0" spc="100" dirty="0">
+                <a:solidFill>
+                  <a:srgbClr val="A9C3E8"/>
+                </a:solidFill>
+                <a:latin typeface="Calibri" pitchFamily="34" charset="0"/>
+                <a:ea typeface="Calibri" pitchFamily="34" charset="-122"/>
+                <a:cs typeface="Calibri" pitchFamily="34" charset="-120"/>
+              </a:rPr>
+              <a:t>ON THE BIGGEST LEARNING MOMENT</a:t>
+            </a:r>
+            <a:endParaRPr lang="en-US" sz="900" dirty="0"/>
+          </a:p>
+        </p:txBody>
+      </p:sp>
+      <p:sp>
+        <p:nvSpPr>
+          <p:cNvPr id="15" name="Shape 11"/>
+          <p:cNvSpPr/>
+          <p:nvPr/>
+        </p:nvSpPr>
+        <p:spPr>
+          <a:xfrm>
+            <a:off x="548640" y="4837176"/>
+            <a:ext cx="11064240" cy="1298448"/>
           </a:xfrm>
           <a:prstGeom prst="roundRect">
             <a:avLst>
-              <a:gd name="adj" fmla="val 7692"/>
+              <a:gd name="adj" fmla="val 7042"/>
             </a:avLst>
           </a:prstGeom>
           <a:solidFill>
-            <a:srgbClr val="F7FAFC"/>
+            <a:srgbClr val="2A3470"/>
           </a:solidFill>
           <a:ln/>
         </p:spPr>
       </p:sp>
       <p:pic>
         <p:nvPicPr>
-          <p:cNvPr id="21" name="Image 4" descr="icon_check_navy.png">    </p:cNvPr>
+          <p:cNvPr id="16" name="Image 2" descr="icon_quote_teal.png"/>
           <p:cNvPicPr>
             <a:picLocks noChangeAspect="1"/>
           </p:cNvPicPr>
           <p:nvPr/>
         </p:nvPicPr>
         <p:blipFill>
-          <a:blip r:embed="rId5"/>
+          <a:blip r:embed="rId3"/>
           <a:stretch>
             <a:fillRect/>
           </a:stretch>
         </p:blipFill>
         <p:spPr>
           <a:xfrm>
-            <a:off x="4526280" y="3657600"/>
-            <a:ext cx="502920" cy="502920"/>
+            <a:off x="777240" y="5020056"/>
+            <a:ext cx="384048" cy="384048"/>
           </a:xfrm>
           <a:prstGeom prst="rect">
             <a:avLst/>
@@ -2728,270 +2386,88 @@
       </p:pic>
       <p:sp>
         <p:nvSpPr>
-          <p:cNvPr id="22" name="Text 15"/>
-          <p:cNvSpPr/>
-          <p:nvPr/>
-        </p:nvSpPr>
-        <p:spPr>
-          <a:xfrm>
-            <a:off x="5166360" y="3547872"/>
-            <a:ext cx="2468880" cy="365760"/>
-          </a:xfrm>
-          <a:prstGeom prst="rect">
-            <a:avLst/>
-          </a:prstGeom>
-          <a:noFill/>
-          <a:ln/>
-        </p:spPr>
-        <p:txBody>
-          <a:bodyPr wrap="square" rtlCol="0" anchor="ctr"/>
-          <a:lstStyle/>
-          <a:p>
-            <a:pPr indent="0" marL="0">
-              <a:buNone/>
-            </a:pPr>
-            <a:r>
-              <a:rPr lang="en-US" sz="1350" b="1" dirty="0">
-                <a:solidFill>
-                  <a:srgbClr val="263238"/>
-                </a:solidFill>
-                <a:latin typeface="Cambria" pitchFamily="34" charset="0"/>
-                <a:ea typeface="Cambria" pitchFamily="34" charset="-122"/>
-                <a:cs typeface="Cambria" pitchFamily="34" charset="-120"/>
-              </a:rPr>
-              <a:t>total_orders</a:t>
-            </a:r>
-            <a:endParaRPr lang="en-US" sz="1350" dirty="0"/>
-          </a:p>
-        </p:txBody>
-      </p:sp>
-      <p:sp>
-        <p:nvSpPr>
-          <p:cNvPr id="23" name="Text 16"/>
-          <p:cNvSpPr/>
-          <p:nvPr/>
-        </p:nvSpPr>
-        <p:spPr>
-          <a:xfrm>
-            <a:off x="5166360" y="3931920"/>
-            <a:ext cx="2468880" cy="365760"/>
-          </a:xfrm>
-          <a:prstGeom prst="rect">
-            <a:avLst/>
-          </a:prstGeom>
-          <a:noFill/>
-          <a:ln/>
-        </p:spPr>
-        <p:txBody>
-          <a:bodyPr wrap="square" rtlCol="0" anchor="ctr"/>
-          <a:lstStyle/>
-          <a:p>
-            <a:pPr indent="0" marL="0">
-              <a:buNone/>
-            </a:pPr>
-            <a:r>
-              <a:rPr lang="en-US" sz="1100" dirty="0">
-                <a:solidFill>
-                  <a:srgbClr val="065A82"/>
+          <p:cNvPr id="17" name="Text 12"/>
+          <p:cNvSpPr/>
+          <p:nvPr/>
+        </p:nvSpPr>
+        <p:spPr>
+          <a:xfrm>
+            <a:off x="1371600" y="4965192"/>
+            <a:ext cx="9966960" cy="822960"/>
+          </a:xfrm>
+          <a:prstGeom prst="rect">
+            <a:avLst/>
+          </a:prstGeom>
+          <a:noFill/>
+          <a:ln/>
+        </p:spPr>
+        <p:txBody>
+          <a:bodyPr wrap="square" rtlCol="0" anchor="t"/>
+          <a:lstStyle/>
+          <a:p>
+            <a:pPr marL="0" indent="0">
+              <a:lnSpc>
+                <a:spcPct val="115000"/>
+              </a:lnSpc>
+              <a:buNone/>
+            </a:pPr>
+            <a:r>
+              <a:rPr lang="en-US" sz="1300" i="1" dirty="0">
+                <a:solidFill>
+                  <a:srgbClr val="FFFFFF"/>
                 </a:solidFill>
                 <a:latin typeface="Calibri" pitchFamily="34" charset="0"/>
                 <a:ea typeface="Calibri" pitchFamily="34" charset="-122"/>
                 <a:cs typeface="Calibri" pitchFamily="34" charset="-120"/>
               </a:rPr>
-              <a:t>not null, verified</a:t>
-            </a:r>
-            <a:endParaRPr lang="en-US" sz="1100" dirty="0"/>
-          </a:p>
-        </p:txBody>
-      </p:sp>
-      <p:sp>
-        <p:nvSpPr>
-          <p:cNvPr id="24" name="Shape 17"/>
-          <p:cNvSpPr/>
-          <p:nvPr/>
-        </p:nvSpPr>
-        <p:spPr>
-          <a:xfrm>
-            <a:off x="8046720" y="3383280"/>
-            <a:ext cx="3520440" cy="1188720"/>
-          </a:xfrm>
-          <a:prstGeom prst="roundRect">
-            <a:avLst>
-              <a:gd name="adj" fmla="val 7692"/>
-            </a:avLst>
-          </a:prstGeom>
-          <a:solidFill>
-            <a:srgbClr val="F7FAFC"/>
-          </a:solidFill>
-          <a:ln/>
-        </p:spPr>
-      </p:sp>
-      <p:pic>
-        <p:nvPicPr>
-          <p:cNvPr id="25" name="Image 5" descr="icon_check_navy.png">    </p:cNvPr>
-          <p:cNvPicPr>
-            <a:picLocks noChangeAspect="1"/>
-          </p:cNvPicPr>
-          <p:nvPr/>
-        </p:nvPicPr>
-        <p:blipFill>
-          <a:blip r:embed="rId6"/>
-          <a:stretch>
-            <a:fillRect/>
-          </a:stretch>
-        </p:blipFill>
-        <p:spPr>
-          <a:xfrm>
-            <a:off x="8275320" y="3657600"/>
-            <a:ext cx="502920" cy="502920"/>
-          </a:xfrm>
-          <a:prstGeom prst="rect">
-            <a:avLst/>
-          </a:prstGeom>
-        </p:spPr>
-      </p:pic>
-      <p:sp>
-        <p:nvSpPr>
-          <p:cNvPr id="26" name="Text 18"/>
-          <p:cNvSpPr/>
-          <p:nvPr/>
-        </p:nvSpPr>
-        <p:spPr>
-          <a:xfrm>
-            <a:off x="8915400" y="3547872"/>
-            <a:ext cx="2468880" cy="365760"/>
-          </a:xfrm>
-          <a:prstGeom prst="rect">
-            <a:avLst/>
-          </a:prstGeom>
-          <a:noFill/>
-          <a:ln/>
-        </p:spPr>
-        <p:txBody>
-          <a:bodyPr wrap="square" rtlCol="0" anchor="ctr"/>
-          <a:lstStyle/>
-          <a:p>
-            <a:pPr indent="0" marL="0">
-              <a:buNone/>
-            </a:pPr>
-            <a:r>
-              <a:rPr lang="en-US" sz="1350" b="1" dirty="0">
-                <a:solidFill>
-                  <a:srgbClr val="263238"/>
-                </a:solidFill>
-                <a:latin typeface="Cambria" pitchFamily="34" charset="0"/>
-                <a:ea typeface="Cambria" pitchFamily="34" charset="-122"/>
-                <a:cs typeface="Cambria" pitchFamily="34" charset="-120"/>
-              </a:rPr>
-              <a:t>avg_revenue_per_order</a:t>
-            </a:r>
-            <a:endParaRPr lang="en-US" sz="1350" dirty="0"/>
-          </a:p>
-        </p:txBody>
-      </p:sp>
-      <p:sp>
-        <p:nvSpPr>
-          <p:cNvPr id="27" name="Text 19"/>
-          <p:cNvSpPr/>
-          <p:nvPr/>
-        </p:nvSpPr>
-        <p:spPr>
-          <a:xfrm>
-            <a:off x="8915400" y="3931920"/>
-            <a:ext cx="2468880" cy="365760"/>
-          </a:xfrm>
-          <a:prstGeom prst="rect">
-            <a:avLst/>
-          </a:prstGeom>
-          <a:noFill/>
-          <a:ln/>
-        </p:spPr>
-        <p:txBody>
-          <a:bodyPr wrap="square" rtlCol="0" anchor="ctr"/>
-          <a:lstStyle/>
-          <a:p>
-            <a:pPr indent="0" marL="0">
-              <a:buNone/>
-            </a:pPr>
-            <a:r>
-              <a:rPr lang="en-US" sz="1100" dirty="0">
-                <a:solidFill>
-                  <a:srgbClr val="065A82"/>
+              <a:t>"The cleaning happens once, the definition of revenue is calculated once, and every downstream user works from one trusted table."</a:t>
+            </a:r>
+            <a:endParaRPr lang="en-US" sz="1300" dirty="0"/>
+          </a:p>
+        </p:txBody>
+      </p:sp>
+      <p:sp>
+        <p:nvSpPr>
+          <p:cNvPr id="18" name="Text 13"/>
+          <p:cNvSpPr/>
+          <p:nvPr/>
+        </p:nvSpPr>
+        <p:spPr>
+          <a:xfrm>
+            <a:off x="1371600" y="5779008"/>
+            <a:ext cx="9966960" cy="274320"/>
+          </a:xfrm>
+          <a:prstGeom prst="rect">
+            <a:avLst/>
+          </a:prstGeom>
+          <a:noFill/>
+          <a:ln/>
+        </p:spPr>
+        <p:txBody>
+          <a:bodyPr wrap="square" rtlCol="0" anchor="ctr"/>
+          <a:lstStyle/>
+          <a:p>
+            <a:pPr marL="0" indent="0">
+              <a:buNone/>
+            </a:pPr>
+            <a:r>
+              <a:rPr lang="en-US" sz="900" b="1" kern="0" spc="100" dirty="0">
+                <a:solidFill>
+                  <a:srgbClr val="A9C3E8"/>
                 </a:solidFill>
                 <a:latin typeface="Calibri" pitchFamily="34" charset="0"/>
                 <a:ea typeface="Calibri" pitchFamily="34" charset="-122"/>
                 <a:cs typeface="Calibri" pitchFamily="34" charset="-120"/>
               </a:rPr>
-              <a:t>not null, verified</a:t>
-            </a:r>
-            <a:endParaRPr lang="en-US" sz="1100" dirty="0"/>
-          </a:p>
-        </p:txBody>
-      </p:sp>
-      <p:sp>
-        <p:nvSpPr>
-          <p:cNvPr id="28" name="Shape 20"/>
-          <p:cNvSpPr/>
-          <p:nvPr/>
-        </p:nvSpPr>
-        <p:spPr>
-          <a:xfrm>
-            <a:off x="548640" y="5029200"/>
-            <a:ext cx="11064240" cy="1005840"/>
-          </a:xfrm>
-          <a:prstGeom prst="roundRect">
-            <a:avLst>
-              <a:gd name="adj" fmla="val 9091"/>
-            </a:avLst>
-          </a:prstGeom>
-          <a:solidFill>
-            <a:srgbClr val="065A82"/>
-          </a:solidFill>
-          <a:ln/>
-        </p:spPr>
-      </p:sp>
-      <p:sp>
-        <p:nvSpPr>
-          <p:cNvPr id="29" name="Text 21"/>
-          <p:cNvSpPr/>
-          <p:nvPr/>
-        </p:nvSpPr>
-        <p:spPr>
-          <a:xfrm>
-            <a:off x="822960" y="5029200"/>
-            <a:ext cx="10515600" cy="1005840"/>
-          </a:xfrm>
-          <a:prstGeom prst="rect">
-            <a:avLst/>
-          </a:prstGeom>
-          <a:noFill/>
-          <a:ln/>
-        </p:spPr>
-        <p:txBody>
-          <a:bodyPr wrap="square" rtlCol="0" anchor="ctr"/>
-          <a:lstStyle/>
-          <a:p>
-            <a:pPr indent="0" marL="0">
-              <a:buNone/>
-            </a:pPr>
-            <a:r>
-              <a:rPr lang="en-US" sz="1600" b="1" dirty="0">
-                <a:solidFill>
-                  <a:srgbClr val="FFFFFF"/>
-                </a:solidFill>
-                <a:latin typeface="Cambria" pitchFamily="34" charset="0"/>
-                <a:ea typeface="Cambria" pitchFamily="34" charset="-122"/>
-                <a:cs typeface="Cambria" pitchFamily="34" charset="-120"/>
-              </a:rPr>
-              <a:t>All 6 automated tests passed on the current build</a:t>
-            </a:r>
-            <a:endParaRPr lang="en-US" sz="1600" dirty="0"/>
-          </a:p>
-        </p:txBody>
-      </p:sp>
-      <p:sp>
-        <p:nvSpPr>
-          <p:cNvPr id="30" name="Text 22"/>
+              <a:t>ON WHY THE PIPELINE MATTERS</a:t>
+            </a:r>
+            <a:endParaRPr lang="en-US" sz="900" dirty="0"/>
+          </a:p>
+        </p:txBody>
+      </p:sp>
+      <p:sp>
+        <p:nvSpPr>
+          <p:cNvPr id="19" name="Text 14"/>
           <p:cNvSpPr/>
           <p:nvPr/>
         </p:nvSpPr>
@@ -3010,7 +2486,7 @@
           <a:bodyPr wrap="square" rtlCol="0" anchor="ctr"/>
           <a:lstStyle/>
           <a:p>
-            <a:pPr indent="0" marL="0">
+            <a:pPr marL="0" indent="0">
               <a:buNone/>
             </a:pPr>
             <a:r>
@@ -3030,7 +2506,7 @@
       </p:sp>
       <p:sp>
         <p:nvSpPr>
-          <p:cNvPr id="31" name="Text 23"/>
+          <p:cNvPr id="20" name="Text 15"/>
           <p:cNvSpPr/>
           <p:nvPr/>
         </p:nvSpPr>
@@ -3049,7 +2525,7 @@
           <a:bodyPr wrap="square" rtlCol="0" anchor="ctr"/>
           <a:lstStyle/>
           <a:p>
-            <a:pPr algn="r" indent="0" marL="0">
+            <a:pPr marL="0" indent="0" algn="r">
               <a:buNone/>
             </a:pPr>
             <a:r>
@@ -3081,8 +2557,9 @@
     <p:bg>
       <p:bgPr>
         <a:solidFill>
-          <a:srgbClr val="F7FAFC"/>
+          <a:srgbClr val="FFFFFF"/>
         </a:solidFill>
+        <a:effectLst/>
       </p:bgPr>
     </p:bg>
     <p:spTree>
@@ -3120,7 +2597,7 @@
           <a:bodyPr wrap="square" rtlCol="0" anchor="ctr"/>
           <a:lstStyle/>
           <a:p>
-            <a:pPr indent="0" marL="0">
+            <a:pPr marL="0" indent="0">
               <a:buNone/>
             </a:pPr>
             <a:r>
@@ -3132,7 +2609,7 @@
                 <a:ea typeface="Cambria" pitchFamily="34" charset="-122"/>
                 <a:cs typeface="Cambria" pitchFamily="34" charset="-120"/>
               </a:rPr>
-              <a:t>Recommended Next Steps</a:t>
+              <a:t>Data Quality and Validation</a:t>
             </a:r>
             <a:endParaRPr lang="en-US" sz="3200" dirty="0"/>
           </a:p>
@@ -3146,44 +2623,10 @@
         </p:nvSpPr>
         <p:spPr>
           <a:xfrm>
-            <a:off x="548640" y="1691640"/>
-            <a:ext cx="3520440" cy="3931920"/>
-          </a:xfrm>
-          <a:prstGeom prst="roundRect">
-            <a:avLst>
-              <a:gd name="adj" fmla="val 3117"/>
-            </a:avLst>
-          </a:prstGeom>
-          <a:solidFill>
-            <a:srgbClr val="FFFFFF"/>
-          </a:solidFill>
-          <a:ln w="12700">
-            <a:solidFill>
-              <a:srgbClr val="E0E6EC"/>
-            </a:solidFill>
-            <a:prstDash val="solid"/>
-          </a:ln>
-          <a:effectLst>
-            <a:outerShdw sx="100000" sy="100000" kx="0" ky="0" algn="bl" rotWithShape="0" blurRad="101600" dist="38100" dir="5400000">
-              <a:srgbClr val="000000">
-                <a:alpha val="10000"/>
-              </a:srgbClr>
-            </a:outerShdw>
-          </a:effectLst>
-        </p:spPr>
-      </p:sp>
-      <p:sp>
-        <p:nvSpPr>
-          <p:cNvPr id="4" name="Shape 2"/>
-          <p:cNvSpPr/>
-          <p:nvPr/>
-        </p:nvSpPr>
-        <p:spPr>
-          <a:xfrm>
-            <a:off x="1874520" y="2057400"/>
-            <a:ext cx="914400" cy="914400"/>
-          </a:xfrm>
-          <a:prstGeom prst="ellipse">
+            <a:off x="566928" y="1024128"/>
+            <a:ext cx="502920" cy="64008"/>
+          </a:xfrm>
+          <a:prstGeom prst="rect">
             <a:avLst/>
           </a:prstGeom>
           <a:solidFill>
@@ -3192,95 +2635,32 @@
           <a:ln/>
         </p:spPr>
       </p:sp>
-      <p:pic>
-        <p:nvPicPr>
-          <p:cNvPr id="5" name="Image 0" descr="icon_target_white.png">    </p:cNvPr>
-          <p:cNvPicPr>
-            <a:picLocks noChangeAspect="1"/>
-          </p:cNvPicPr>
-          <p:nvPr/>
-        </p:nvPicPr>
-        <p:blipFill>
-          <a:blip r:embed="rId1"/>
-          <a:stretch>
-            <a:fillRect/>
-          </a:stretch>
-        </p:blipFill>
-        <p:spPr>
-          <a:xfrm>
-            <a:off x="2084832" y="2267712"/>
-            <a:ext cx="493776" cy="493776"/>
-          </a:xfrm>
-          <a:prstGeom prst="rect">
-            <a:avLst/>
-          </a:prstGeom>
-        </p:spPr>
-      </p:pic>
-      <p:sp>
-        <p:nvSpPr>
-          <p:cNvPr id="6" name="Text 3"/>
-          <p:cNvSpPr/>
-          <p:nvPr/>
-        </p:nvSpPr>
-        <p:spPr>
-          <a:xfrm>
-            <a:off x="777240" y="3154680"/>
-            <a:ext cx="3063240" cy="548640"/>
-          </a:xfrm>
-          <a:prstGeom prst="rect">
-            <a:avLst/>
-          </a:prstGeom>
-          <a:noFill/>
-          <a:ln/>
-        </p:spPr>
-        <p:txBody>
-          <a:bodyPr wrap="square" rtlCol="0" anchor="ctr"/>
-          <a:lstStyle/>
-          <a:p>
-            <a:pPr algn="ctr" indent="0" marL="0">
-              <a:buNone/>
-            </a:pPr>
-            <a:r>
-              <a:rPr lang="en-US" sz="1600" b="1" dirty="0">
-                <a:solidFill>
-                  <a:srgbClr val="263238"/>
-                </a:solidFill>
-                <a:latin typeface="Cambria" pitchFamily="34" charset="0"/>
-                <a:ea typeface="Cambria" pitchFamily="34" charset="-122"/>
-                <a:cs typeface="Cambria" pitchFamily="34" charset="-120"/>
-              </a:rPr>
-              <a:t>Connect a BI Tool</a:t>
-            </a:r>
-            <a:endParaRPr lang="en-US" sz="1600" dirty="0"/>
-          </a:p>
-        </p:txBody>
-      </p:sp>
-      <p:sp>
-        <p:nvSpPr>
-          <p:cNvPr id="7" name="Text 4"/>
-          <p:cNvSpPr/>
-          <p:nvPr/>
-        </p:nvSpPr>
-        <p:spPr>
-          <a:xfrm>
-            <a:off x="868680" y="3794760"/>
-            <a:ext cx="2880360" cy="1554480"/>
-          </a:xfrm>
-          <a:prstGeom prst="rect">
-            <a:avLst/>
-          </a:prstGeom>
-          <a:noFill/>
-          <a:ln/>
-        </p:spPr>
-        <p:txBody>
-          <a:bodyPr wrap="square" rtlCol="0" anchor="t"/>
-          <a:lstStyle/>
-          <a:p>
-            <a:pPr algn="ctr" indent="0" marL="0">
-              <a:buNone/>
-            </a:pPr>
-            <a:r>
-              <a:rPr lang="en-US" sz="1200" dirty="0">
+      <p:sp>
+        <p:nvSpPr>
+          <p:cNvPr id="4" name="Text 2"/>
+          <p:cNvSpPr/>
+          <p:nvPr/>
+        </p:nvSpPr>
+        <p:spPr>
+          <a:xfrm>
+            <a:off x="548640" y="1097280"/>
+            <a:ext cx="10789920" cy="457200"/>
+          </a:xfrm>
+          <a:prstGeom prst="rect">
+            <a:avLst/>
+          </a:prstGeom>
+          <a:noFill/>
+          <a:ln/>
+        </p:spPr>
+        <p:txBody>
+          <a:bodyPr wrap="square" rtlCol="0" anchor="ctr"/>
+          <a:lstStyle/>
+          <a:p>
+            <a:pPr marL="0" indent="0">
+              <a:buNone/>
+            </a:pPr>
+            <a:r>
+              <a:rPr lang="en-US" sz="1350" dirty="0">
                 <a:solidFill>
                   <a:srgbClr val="607080"/>
                 </a:solidFill>
@@ -3288,225 +2668,37 @@
                 <a:ea typeface="Calibri" pitchFamily="34" charset="-122"/>
                 <a:cs typeface="Calibri" pitchFamily="34" charset="-120"/>
               </a:rPr>
-              <a:t>Point a dashboard directly at the mart for self serve reporting</a:t>
-            </a:r>
-            <a:endParaRPr lang="en-US" sz="1200" dirty="0"/>
-          </a:p>
-        </p:txBody>
-      </p:sp>
-      <p:sp>
-        <p:nvSpPr>
-          <p:cNvPr id="8" name="Shape 5"/>
-          <p:cNvSpPr/>
-          <p:nvPr/>
-        </p:nvSpPr>
-        <p:spPr>
-          <a:xfrm>
-            <a:off x="4325112" y="1691640"/>
-            <a:ext cx="3520440" cy="3931920"/>
+              <a:t>Every mart column is covered by automated dbt tests to catch broken joins or missing data before it reaches a dashboard</a:t>
+            </a:r>
+            <a:endParaRPr lang="en-US" sz="1350" dirty="0"/>
+          </a:p>
+        </p:txBody>
+      </p:sp>
+      <p:sp>
+        <p:nvSpPr>
+          <p:cNvPr id="5" name="Shape 3"/>
+          <p:cNvSpPr/>
+          <p:nvPr/>
+        </p:nvSpPr>
+        <p:spPr>
+          <a:xfrm>
+            <a:off x="548640" y="1965960"/>
+            <a:ext cx="3520440" cy="1188720"/>
           </a:xfrm>
           <a:prstGeom prst="roundRect">
             <a:avLst>
-              <a:gd name="adj" fmla="val 3117"/>
+              <a:gd name="adj" fmla="val 7692"/>
             </a:avLst>
           </a:prstGeom>
           <a:solidFill>
-            <a:srgbClr val="FFFFFF"/>
-          </a:solidFill>
-          <a:ln w="12700">
-            <a:solidFill>
-              <a:srgbClr val="E0E6EC"/>
-            </a:solidFill>
-            <a:prstDash val="solid"/>
-          </a:ln>
-          <a:effectLst>
-            <a:outerShdw sx="100000" sy="100000" kx="0" ky="0" algn="bl" rotWithShape="0" blurRad="101600" dist="38100" dir="5400000">
-              <a:srgbClr val="000000">
-                <a:alpha val="10000"/>
-              </a:srgbClr>
-            </a:outerShdw>
-          </a:effectLst>
-        </p:spPr>
-      </p:sp>
-      <p:sp>
-        <p:nvSpPr>
-          <p:cNvPr id="9" name="Shape 6"/>
-          <p:cNvSpPr/>
-          <p:nvPr/>
-        </p:nvSpPr>
-        <p:spPr>
-          <a:xfrm>
-            <a:off x="5650992" y="2057400"/>
-            <a:ext cx="914400" cy="914400"/>
-          </a:xfrm>
-          <a:prstGeom prst="ellipse">
-            <a:avLst/>
-          </a:prstGeom>
-          <a:solidFill>
-            <a:srgbClr val="1C7293"/>
+            <a:srgbClr val="F7FAFC"/>
           </a:solidFill>
           <a:ln/>
         </p:spPr>
       </p:sp>
       <p:pic>
         <p:nvPicPr>
-          <p:cNvPr id="10" name="Image 1" descr="icon_clipboard_white.png">    </p:cNvPr>
-          <p:cNvPicPr>
-            <a:picLocks noChangeAspect="1"/>
-          </p:cNvPicPr>
-          <p:nvPr/>
-        </p:nvPicPr>
-        <p:blipFill>
-          <a:blip r:embed="rId2"/>
-          <a:stretch>
-            <a:fillRect/>
-          </a:stretch>
-        </p:blipFill>
-        <p:spPr>
-          <a:xfrm>
-            <a:off x="5861304" y="2267712"/>
-            <a:ext cx="493776" cy="493776"/>
-          </a:xfrm>
-          <a:prstGeom prst="rect">
-            <a:avLst/>
-          </a:prstGeom>
-        </p:spPr>
-      </p:pic>
-      <p:sp>
-        <p:nvSpPr>
-          <p:cNvPr id="11" name="Text 7"/>
-          <p:cNvSpPr/>
-          <p:nvPr/>
-        </p:nvSpPr>
-        <p:spPr>
-          <a:xfrm>
-            <a:off x="4553712" y="3154680"/>
-            <a:ext cx="3063240" cy="548640"/>
-          </a:xfrm>
-          <a:prstGeom prst="rect">
-            <a:avLst/>
-          </a:prstGeom>
-          <a:noFill/>
-          <a:ln/>
-        </p:spPr>
-        <p:txBody>
-          <a:bodyPr wrap="square" rtlCol="0" anchor="ctr"/>
-          <a:lstStyle/>
-          <a:p>
-            <a:pPr algn="ctr" indent="0" marL="0">
-              <a:buNone/>
-            </a:pPr>
-            <a:r>
-              <a:rPr lang="en-US" sz="1600" b="1" dirty="0">
-                <a:solidFill>
-                  <a:srgbClr val="263238"/>
-                </a:solidFill>
-                <a:latin typeface="Cambria" pitchFamily="34" charset="0"/>
-                <a:ea typeface="Cambria" pitchFamily="34" charset="-122"/>
-                <a:cs typeface="Cambria" pitchFamily="34" charset="-120"/>
-              </a:rPr>
-              <a:t>Expand Test Coverage</a:t>
-            </a:r>
-            <a:endParaRPr lang="en-US" sz="1600" dirty="0"/>
-          </a:p>
-        </p:txBody>
-      </p:sp>
-      <p:sp>
-        <p:nvSpPr>
-          <p:cNvPr id="12" name="Text 8"/>
-          <p:cNvSpPr/>
-          <p:nvPr/>
-        </p:nvSpPr>
-        <p:spPr>
-          <a:xfrm>
-            <a:off x="4645152" y="3794760"/>
-            <a:ext cx="2880360" cy="1554480"/>
-          </a:xfrm>
-          <a:prstGeom prst="rect">
-            <a:avLst/>
-          </a:prstGeom>
-          <a:noFill/>
-          <a:ln/>
-        </p:spPr>
-        <p:txBody>
-          <a:bodyPr wrap="square" rtlCol="0" anchor="t"/>
-          <a:lstStyle/>
-          <a:p>
-            <a:pPr algn="ctr" indent="0" marL="0">
-              <a:buNone/>
-            </a:pPr>
-            <a:r>
-              <a:rPr lang="en-US" sz="1200" dirty="0">
-                <a:solidFill>
-                  <a:srgbClr val="607080"/>
-                </a:solidFill>
-                <a:latin typeface="Calibri" pitchFamily="34" charset="0"/>
-                <a:ea typeface="Calibri" pitchFamily="34" charset="-122"/>
-                <a:cs typeface="Calibri" pitchFamily="34" charset="-120"/>
-              </a:rPr>
-              <a:t>Add uniqueness and relationship tests across the staging layer</a:t>
-            </a:r>
-            <a:endParaRPr lang="en-US" sz="1200" dirty="0"/>
-          </a:p>
-        </p:txBody>
-      </p:sp>
-      <p:sp>
-        <p:nvSpPr>
-          <p:cNvPr id="13" name="Shape 9"/>
-          <p:cNvSpPr/>
-          <p:nvPr/>
-        </p:nvSpPr>
-        <p:spPr>
-          <a:xfrm>
-            <a:off x="8101584" y="1691640"/>
-            <a:ext cx="3520440" cy="3931920"/>
-          </a:xfrm>
-          <a:prstGeom prst="roundRect">
-            <a:avLst>
-              <a:gd name="adj" fmla="val 3117"/>
-            </a:avLst>
-          </a:prstGeom>
-          <a:solidFill>
-            <a:srgbClr val="FFFFFF"/>
-          </a:solidFill>
-          <a:ln w="12700">
-            <a:solidFill>
-              <a:srgbClr val="E0E6EC"/>
-            </a:solidFill>
-            <a:prstDash val="solid"/>
-          </a:ln>
-          <a:effectLst>
-            <a:outerShdw sx="100000" sy="100000" kx="0" ky="0" algn="bl" rotWithShape="0" blurRad="101600" dist="38100" dir="5400000">
-              <a:srgbClr val="000000">
-                <a:alpha val="10000"/>
-              </a:srgbClr>
-            </a:outerShdw>
-          </a:effectLst>
-        </p:spPr>
-      </p:sp>
-      <p:sp>
-        <p:nvSpPr>
-          <p:cNvPr id="14" name="Shape 10"/>
-          <p:cNvSpPr/>
-          <p:nvPr/>
-        </p:nvSpPr>
-        <p:spPr>
-          <a:xfrm>
-            <a:off x="9427464" y="2057400"/>
-            <a:ext cx="914400" cy="914400"/>
-          </a:xfrm>
-          <a:prstGeom prst="ellipse">
-            <a:avLst/>
-          </a:prstGeom>
-          <a:solidFill>
-            <a:srgbClr val="1C7293"/>
-          </a:solidFill>
-          <a:ln/>
-        </p:spPr>
-      </p:sp>
-      <p:pic>
-        <p:nvPicPr>
-          <p:cNvPr id="15" name="Image 2" descr="icon_chart_white.png">    </p:cNvPr>
+          <p:cNvPr id="6" name="Image 0" descr="icon_check_navy.png"/>
           <p:cNvPicPr>
             <a:picLocks noChangeAspect="1"/>
           </p:cNvPicPr>
@@ -3520,8 +2712,8 @@
         </p:blipFill>
         <p:spPr>
           <a:xfrm>
-            <a:off x="9637776" y="2267712"/>
-            <a:ext cx="493776" cy="493776"/>
+            <a:off x="777240" y="2240280"/>
+            <a:ext cx="502920" cy="502920"/>
           </a:xfrm>
           <a:prstGeom prst="rect">
             <a:avLst/>
@@ -3530,30 +2722,30 @@
       </p:pic>
       <p:sp>
         <p:nvSpPr>
-          <p:cNvPr id="16" name="Text 11"/>
-          <p:cNvSpPr/>
-          <p:nvPr/>
-        </p:nvSpPr>
-        <p:spPr>
-          <a:xfrm>
-            <a:off x="8330184" y="3154680"/>
-            <a:ext cx="3063240" cy="548640"/>
-          </a:xfrm>
-          <a:prstGeom prst="rect">
-            <a:avLst/>
-          </a:prstGeom>
-          <a:noFill/>
-          <a:ln/>
-        </p:spPr>
-        <p:txBody>
-          <a:bodyPr wrap="square" rtlCol="0" anchor="ctr"/>
-          <a:lstStyle/>
-          <a:p>
-            <a:pPr algn="ctr" indent="0" marL="0">
-              <a:buNone/>
-            </a:pPr>
-            <a:r>
-              <a:rPr lang="en-US" sz="1600" b="1" dirty="0">
+          <p:cNvPr id="7" name="Text 4"/>
+          <p:cNvSpPr/>
+          <p:nvPr/>
+        </p:nvSpPr>
+        <p:spPr>
+          <a:xfrm>
+            <a:off x="1417320" y="2130552"/>
+            <a:ext cx="2468880" cy="365760"/>
+          </a:xfrm>
+          <a:prstGeom prst="rect">
+            <a:avLst/>
+          </a:prstGeom>
+          <a:noFill/>
+          <a:ln/>
+        </p:spPr>
+        <p:txBody>
+          <a:bodyPr wrap="square" rtlCol="0" anchor="ctr"/>
+          <a:lstStyle/>
+          <a:p>
+            <a:pPr marL="0" indent="0">
+              <a:buNone/>
+            </a:pPr>
+            <a:r>
+              <a:rPr lang="en-US" sz="1350" b="1" dirty="0">
                 <a:solidFill>
                   <a:srgbClr val="263238"/>
                 </a:solidFill>
@@ -3561,84 +2753,765 @@
                 <a:ea typeface="Cambria" pitchFamily="34" charset="-122"/>
                 <a:cs typeface="Cambria" pitchFamily="34" charset="-120"/>
               </a:rPr>
-              <a:t>Add Customer Dimension</a:t>
-            </a:r>
-            <a:endParaRPr lang="en-US" sz="1600" dirty="0"/>
-          </a:p>
-        </p:txBody>
-      </p:sp>
-      <p:sp>
-        <p:nvSpPr>
-          <p:cNvPr id="17" name="Text 12"/>
-          <p:cNvSpPr/>
-          <p:nvPr/>
-        </p:nvSpPr>
-        <p:spPr>
-          <a:xfrm>
-            <a:off x="8421624" y="3794760"/>
-            <a:ext cx="2880360" cy="1554480"/>
-          </a:xfrm>
-          <a:prstGeom prst="rect">
-            <a:avLst/>
-          </a:prstGeom>
-          <a:noFill/>
-          <a:ln/>
-        </p:spPr>
-        <p:txBody>
-          <a:bodyPr wrap="square" rtlCol="0" anchor="t"/>
-          <a:lstStyle/>
-          <a:p>
-            <a:pPr algn="ctr" indent="0" marL="0">
-              <a:buNone/>
-            </a:pPr>
-            <a:r>
-              <a:rPr lang="en-US" sz="1200" dirty="0">
-                <a:solidFill>
-                  <a:srgbClr val="607080"/>
+              <a:t>order_year</a:t>
+            </a:r>
+            <a:endParaRPr lang="en-US" sz="1350" dirty="0"/>
+          </a:p>
+        </p:txBody>
+      </p:sp>
+      <p:sp>
+        <p:nvSpPr>
+          <p:cNvPr id="8" name="Text 5"/>
+          <p:cNvSpPr/>
+          <p:nvPr/>
+        </p:nvSpPr>
+        <p:spPr>
+          <a:xfrm>
+            <a:off x="1417320" y="2514600"/>
+            <a:ext cx="2468880" cy="365760"/>
+          </a:xfrm>
+          <a:prstGeom prst="rect">
+            <a:avLst/>
+          </a:prstGeom>
+          <a:noFill/>
+          <a:ln/>
+        </p:spPr>
+        <p:txBody>
+          <a:bodyPr wrap="square" rtlCol="0" anchor="ctr"/>
+          <a:lstStyle/>
+          <a:p>
+            <a:pPr marL="0" indent="0">
+              <a:buNone/>
+            </a:pPr>
+            <a:r>
+              <a:rPr lang="en-US" sz="1100" dirty="0">
+                <a:solidFill>
+                  <a:srgbClr val="065A82"/>
                 </a:solidFill>
                 <a:latin typeface="Calibri" pitchFamily="34" charset="0"/>
                 <a:ea typeface="Calibri" pitchFamily="34" charset="-122"/>
                 <a:cs typeface="Calibri" pitchFamily="34" charset="-120"/>
               </a:rPr>
-              <a:t>Bring in customer data to analyze revenue by region and account</a:t>
-            </a:r>
-            <a:endParaRPr lang="en-US" sz="1200" dirty="0"/>
-          </a:p>
-        </p:txBody>
-      </p:sp>
-      <p:sp>
-        <p:nvSpPr>
-          <p:cNvPr id="18" name="Text 13"/>
-          <p:cNvSpPr/>
-          <p:nvPr/>
-        </p:nvSpPr>
-        <p:spPr>
-          <a:xfrm>
-            <a:off x="457200" y="6537960"/>
-            <a:ext cx="5486400" cy="274320"/>
-          </a:xfrm>
-          <a:prstGeom prst="rect">
-            <a:avLst/>
-          </a:prstGeom>
-          <a:noFill/>
-          <a:ln/>
-        </p:spPr>
-        <p:txBody>
-          <a:bodyPr wrap="square" rtlCol="0" anchor="ctr"/>
-          <a:lstStyle/>
-          <a:p>
-            <a:pPr indent="0" marL="0">
-              <a:buNone/>
-            </a:pPr>
-            <a:r>
-              <a:rPr lang="en-US" sz="900" dirty="0">
-                <a:solidFill>
-                  <a:srgbClr val="607080"/>
+              <a:t>not null, verified</a:t>
+            </a:r>
+            <a:endParaRPr lang="en-US" sz="1100" dirty="0"/>
+          </a:p>
+        </p:txBody>
+      </p:sp>
+      <p:sp>
+        <p:nvSpPr>
+          <p:cNvPr id="9" name="Shape 6"/>
+          <p:cNvSpPr/>
+          <p:nvPr/>
+        </p:nvSpPr>
+        <p:spPr>
+          <a:xfrm>
+            <a:off x="4297680" y="1965960"/>
+            <a:ext cx="3520440" cy="1188720"/>
+          </a:xfrm>
+          <a:prstGeom prst="roundRect">
+            <a:avLst>
+              <a:gd name="adj" fmla="val 7692"/>
+            </a:avLst>
+          </a:prstGeom>
+          <a:solidFill>
+            <a:srgbClr val="F7FAFC"/>
+          </a:solidFill>
+          <a:ln/>
+        </p:spPr>
+      </p:sp>
+      <p:pic>
+        <p:nvPicPr>
+          <p:cNvPr id="10" name="Image 1" descr="icon_check_navy.png"/>
+          <p:cNvPicPr>
+            <a:picLocks noChangeAspect="1"/>
+          </p:cNvPicPr>
+          <p:nvPr/>
+        </p:nvPicPr>
+        <p:blipFill>
+          <a:blip r:embed="rId3"/>
+          <a:stretch>
+            <a:fillRect/>
+          </a:stretch>
+        </p:blipFill>
+        <p:spPr>
+          <a:xfrm>
+            <a:off x="4526280" y="2240280"/>
+            <a:ext cx="502920" cy="502920"/>
+          </a:xfrm>
+          <a:prstGeom prst="rect">
+            <a:avLst/>
+          </a:prstGeom>
+        </p:spPr>
+      </p:pic>
+      <p:sp>
+        <p:nvSpPr>
+          <p:cNvPr id="11" name="Text 7"/>
+          <p:cNvSpPr/>
+          <p:nvPr/>
+        </p:nvSpPr>
+        <p:spPr>
+          <a:xfrm>
+            <a:off x="5166360" y="2130552"/>
+            <a:ext cx="2468880" cy="365760"/>
+          </a:xfrm>
+          <a:prstGeom prst="rect">
+            <a:avLst/>
+          </a:prstGeom>
+          <a:noFill/>
+          <a:ln/>
+        </p:spPr>
+        <p:txBody>
+          <a:bodyPr wrap="square" rtlCol="0" anchor="ctr"/>
+          <a:lstStyle/>
+          <a:p>
+            <a:pPr marL="0" indent="0">
+              <a:buNone/>
+            </a:pPr>
+            <a:r>
+              <a:rPr lang="en-US" sz="1350" b="1" dirty="0">
+                <a:solidFill>
+                  <a:srgbClr val="263238"/>
+                </a:solidFill>
+                <a:latin typeface="Cambria" pitchFamily="34" charset="0"/>
+                <a:ea typeface="Cambria" pitchFamily="34" charset="-122"/>
+                <a:cs typeface="Cambria" pitchFamily="34" charset="-120"/>
+              </a:rPr>
+              <a:t>order_month</a:t>
+            </a:r>
+            <a:endParaRPr lang="en-US" sz="1350" dirty="0"/>
+          </a:p>
+        </p:txBody>
+      </p:sp>
+      <p:sp>
+        <p:nvSpPr>
+          <p:cNvPr id="12" name="Text 8"/>
+          <p:cNvSpPr/>
+          <p:nvPr/>
+        </p:nvSpPr>
+        <p:spPr>
+          <a:xfrm>
+            <a:off x="5166360" y="2514600"/>
+            <a:ext cx="2468880" cy="365760"/>
+          </a:xfrm>
+          <a:prstGeom prst="rect">
+            <a:avLst/>
+          </a:prstGeom>
+          <a:noFill/>
+          <a:ln/>
+        </p:spPr>
+        <p:txBody>
+          <a:bodyPr wrap="square" rtlCol="0" anchor="ctr"/>
+          <a:lstStyle/>
+          <a:p>
+            <a:pPr marL="0" indent="0">
+              <a:buNone/>
+            </a:pPr>
+            <a:r>
+              <a:rPr lang="en-US" sz="1100" dirty="0">
+                <a:solidFill>
+                  <a:srgbClr val="065A82"/>
                 </a:solidFill>
                 <a:latin typeface="Calibri" pitchFamily="34" charset="0"/>
                 <a:ea typeface="Calibri" pitchFamily="34" charset="-122"/>
                 <a:cs typeface="Calibri" pitchFamily="34" charset="-120"/>
               </a:rPr>
+              <a:t>not null, verified</a:t>
+            </a:r>
+            <a:endParaRPr lang="en-US" sz="1100" dirty="0"/>
+          </a:p>
+        </p:txBody>
+      </p:sp>
+      <p:sp>
+        <p:nvSpPr>
+          <p:cNvPr id="13" name="Shape 9"/>
+          <p:cNvSpPr/>
+          <p:nvPr/>
+        </p:nvSpPr>
+        <p:spPr>
+          <a:xfrm>
+            <a:off x="8046720" y="1965960"/>
+            <a:ext cx="3520440" cy="1188720"/>
+          </a:xfrm>
+          <a:prstGeom prst="roundRect">
+            <a:avLst>
+              <a:gd name="adj" fmla="val 7692"/>
+            </a:avLst>
+          </a:prstGeom>
+          <a:solidFill>
+            <a:srgbClr val="F7FAFC"/>
+          </a:solidFill>
+          <a:ln/>
+        </p:spPr>
+      </p:sp>
+      <p:pic>
+        <p:nvPicPr>
+          <p:cNvPr id="14" name="Image 2" descr="icon_check_navy.png"/>
+          <p:cNvPicPr>
+            <a:picLocks noChangeAspect="1"/>
+          </p:cNvPicPr>
+          <p:nvPr/>
+        </p:nvPicPr>
+        <p:blipFill>
+          <a:blip r:embed="rId3"/>
+          <a:stretch>
+            <a:fillRect/>
+          </a:stretch>
+        </p:blipFill>
+        <p:spPr>
+          <a:xfrm>
+            <a:off x="8275320" y="2240280"/>
+            <a:ext cx="502920" cy="502920"/>
+          </a:xfrm>
+          <a:prstGeom prst="rect">
+            <a:avLst/>
+          </a:prstGeom>
+        </p:spPr>
+      </p:pic>
+      <p:sp>
+        <p:nvSpPr>
+          <p:cNvPr id="15" name="Text 10"/>
+          <p:cNvSpPr/>
+          <p:nvPr/>
+        </p:nvSpPr>
+        <p:spPr>
+          <a:xfrm>
+            <a:off x="8915400" y="2130552"/>
+            <a:ext cx="2468880" cy="365760"/>
+          </a:xfrm>
+          <a:prstGeom prst="rect">
+            <a:avLst/>
+          </a:prstGeom>
+          <a:noFill/>
+          <a:ln/>
+        </p:spPr>
+        <p:txBody>
+          <a:bodyPr wrap="square" rtlCol="0" anchor="ctr"/>
+          <a:lstStyle/>
+          <a:p>
+            <a:pPr marL="0" indent="0">
+              <a:buNone/>
+            </a:pPr>
+            <a:r>
+              <a:rPr lang="en-US" sz="1350" b="1" dirty="0">
+                <a:solidFill>
+                  <a:srgbClr val="263238"/>
+                </a:solidFill>
+                <a:latin typeface="Cambria" pitchFamily="34" charset="0"/>
+                <a:ea typeface="Cambria" pitchFamily="34" charset="-122"/>
+                <a:cs typeface="Cambria" pitchFamily="34" charset="-120"/>
+              </a:rPr>
+              <a:t>category_name</a:t>
+            </a:r>
+            <a:endParaRPr lang="en-US" sz="1350" dirty="0"/>
+          </a:p>
+        </p:txBody>
+      </p:sp>
+      <p:sp>
+        <p:nvSpPr>
+          <p:cNvPr id="16" name="Text 11"/>
+          <p:cNvSpPr/>
+          <p:nvPr/>
+        </p:nvSpPr>
+        <p:spPr>
+          <a:xfrm>
+            <a:off x="8915400" y="2514600"/>
+            <a:ext cx="2468880" cy="365760"/>
+          </a:xfrm>
+          <a:prstGeom prst="rect">
+            <a:avLst/>
+          </a:prstGeom>
+          <a:noFill/>
+          <a:ln/>
+        </p:spPr>
+        <p:txBody>
+          <a:bodyPr wrap="square" rtlCol="0" anchor="ctr"/>
+          <a:lstStyle/>
+          <a:p>
+            <a:pPr marL="0" indent="0">
+              <a:buNone/>
+            </a:pPr>
+            <a:r>
+              <a:rPr lang="en-US" sz="1100" dirty="0">
+                <a:solidFill>
+                  <a:srgbClr val="065A82"/>
+                </a:solidFill>
+                <a:latin typeface="Calibri" pitchFamily="34" charset="0"/>
+                <a:ea typeface="Calibri" pitchFamily="34" charset="-122"/>
+                <a:cs typeface="Calibri" pitchFamily="34" charset="-120"/>
+              </a:rPr>
+              <a:t>not null, verified</a:t>
+            </a:r>
+            <a:endParaRPr lang="en-US" sz="1100" dirty="0"/>
+          </a:p>
+        </p:txBody>
+      </p:sp>
+      <p:sp>
+        <p:nvSpPr>
+          <p:cNvPr id="17" name="Shape 12"/>
+          <p:cNvSpPr/>
+          <p:nvPr/>
+        </p:nvSpPr>
+        <p:spPr>
+          <a:xfrm>
+            <a:off x="548640" y="3383280"/>
+            <a:ext cx="3520440" cy="1188720"/>
+          </a:xfrm>
+          <a:prstGeom prst="roundRect">
+            <a:avLst>
+              <a:gd name="adj" fmla="val 7692"/>
+            </a:avLst>
+          </a:prstGeom>
+          <a:solidFill>
+            <a:srgbClr val="F7FAFC"/>
+          </a:solidFill>
+          <a:ln/>
+        </p:spPr>
+      </p:sp>
+      <p:pic>
+        <p:nvPicPr>
+          <p:cNvPr id="18" name="Image 3" descr="icon_check_navy.png"/>
+          <p:cNvPicPr>
+            <a:picLocks noChangeAspect="1"/>
+          </p:cNvPicPr>
+          <p:nvPr/>
+        </p:nvPicPr>
+        <p:blipFill>
+          <a:blip r:embed="rId3"/>
+          <a:stretch>
+            <a:fillRect/>
+          </a:stretch>
+        </p:blipFill>
+        <p:spPr>
+          <a:xfrm>
+            <a:off x="777240" y="3657600"/>
+            <a:ext cx="502920" cy="502920"/>
+          </a:xfrm>
+          <a:prstGeom prst="rect">
+            <a:avLst/>
+          </a:prstGeom>
+        </p:spPr>
+      </p:pic>
+      <p:sp>
+        <p:nvSpPr>
+          <p:cNvPr id="19" name="Text 13"/>
+          <p:cNvSpPr/>
+          <p:nvPr/>
+        </p:nvSpPr>
+        <p:spPr>
+          <a:xfrm>
+            <a:off x="1417320" y="3547872"/>
+            <a:ext cx="2468880" cy="365760"/>
+          </a:xfrm>
+          <a:prstGeom prst="rect">
+            <a:avLst/>
+          </a:prstGeom>
+          <a:noFill/>
+          <a:ln/>
+        </p:spPr>
+        <p:txBody>
+          <a:bodyPr wrap="square" rtlCol="0" anchor="ctr"/>
+          <a:lstStyle/>
+          <a:p>
+            <a:pPr marL="0" indent="0">
+              <a:buNone/>
+            </a:pPr>
+            <a:r>
+              <a:rPr lang="en-US" sz="1350" b="1" dirty="0">
+                <a:solidFill>
+                  <a:srgbClr val="263238"/>
+                </a:solidFill>
+                <a:latin typeface="Cambria" pitchFamily="34" charset="0"/>
+                <a:ea typeface="Cambria" pitchFamily="34" charset="-122"/>
+                <a:cs typeface="Cambria" pitchFamily="34" charset="-120"/>
+              </a:rPr>
+              <a:t>total_revenue</a:t>
+            </a:r>
+            <a:endParaRPr lang="en-US" sz="1350" dirty="0"/>
+          </a:p>
+        </p:txBody>
+      </p:sp>
+      <p:sp>
+        <p:nvSpPr>
+          <p:cNvPr id="20" name="Text 14"/>
+          <p:cNvSpPr/>
+          <p:nvPr/>
+        </p:nvSpPr>
+        <p:spPr>
+          <a:xfrm>
+            <a:off x="1417320" y="3931920"/>
+            <a:ext cx="2468880" cy="365760"/>
+          </a:xfrm>
+          <a:prstGeom prst="rect">
+            <a:avLst/>
+          </a:prstGeom>
+          <a:noFill/>
+          <a:ln/>
+        </p:spPr>
+        <p:txBody>
+          <a:bodyPr wrap="square" rtlCol="0" anchor="ctr"/>
+          <a:lstStyle/>
+          <a:p>
+            <a:pPr marL="0" indent="0">
+              <a:buNone/>
+            </a:pPr>
+            <a:r>
+              <a:rPr lang="en-US" sz="1100" dirty="0">
+                <a:solidFill>
+                  <a:srgbClr val="065A82"/>
+                </a:solidFill>
+                <a:latin typeface="Calibri" pitchFamily="34" charset="0"/>
+                <a:ea typeface="Calibri" pitchFamily="34" charset="-122"/>
+                <a:cs typeface="Calibri" pitchFamily="34" charset="-120"/>
+              </a:rPr>
+              <a:t>not null, verified</a:t>
+            </a:r>
+            <a:endParaRPr lang="en-US" sz="1100" dirty="0"/>
+          </a:p>
+        </p:txBody>
+      </p:sp>
+      <p:sp>
+        <p:nvSpPr>
+          <p:cNvPr id="21" name="Shape 15"/>
+          <p:cNvSpPr/>
+          <p:nvPr/>
+        </p:nvSpPr>
+        <p:spPr>
+          <a:xfrm>
+            <a:off x="4297680" y="3383280"/>
+            <a:ext cx="3520440" cy="1188720"/>
+          </a:xfrm>
+          <a:prstGeom prst="roundRect">
+            <a:avLst>
+              <a:gd name="adj" fmla="val 7692"/>
+            </a:avLst>
+          </a:prstGeom>
+          <a:solidFill>
+            <a:srgbClr val="F7FAFC"/>
+          </a:solidFill>
+          <a:ln/>
+        </p:spPr>
+      </p:sp>
+      <p:pic>
+        <p:nvPicPr>
+          <p:cNvPr id="22" name="Image 4" descr="icon_check_navy.png"/>
+          <p:cNvPicPr>
+            <a:picLocks noChangeAspect="1"/>
+          </p:cNvPicPr>
+          <p:nvPr/>
+        </p:nvPicPr>
+        <p:blipFill>
+          <a:blip r:embed="rId3"/>
+          <a:stretch>
+            <a:fillRect/>
+          </a:stretch>
+        </p:blipFill>
+        <p:spPr>
+          <a:xfrm>
+            <a:off x="4526280" y="3657600"/>
+            <a:ext cx="502920" cy="502920"/>
+          </a:xfrm>
+          <a:prstGeom prst="rect">
+            <a:avLst/>
+          </a:prstGeom>
+        </p:spPr>
+      </p:pic>
+      <p:sp>
+        <p:nvSpPr>
+          <p:cNvPr id="23" name="Text 16"/>
+          <p:cNvSpPr/>
+          <p:nvPr/>
+        </p:nvSpPr>
+        <p:spPr>
+          <a:xfrm>
+            <a:off x="5166360" y="3547872"/>
+            <a:ext cx="2468880" cy="365760"/>
+          </a:xfrm>
+          <a:prstGeom prst="rect">
+            <a:avLst/>
+          </a:prstGeom>
+          <a:noFill/>
+          <a:ln/>
+        </p:spPr>
+        <p:txBody>
+          <a:bodyPr wrap="square" rtlCol="0" anchor="ctr"/>
+          <a:lstStyle/>
+          <a:p>
+            <a:pPr marL="0" indent="0">
+              <a:buNone/>
+            </a:pPr>
+            <a:r>
+              <a:rPr lang="en-US" sz="1350" b="1" dirty="0">
+                <a:solidFill>
+                  <a:srgbClr val="263238"/>
+                </a:solidFill>
+                <a:latin typeface="Cambria" pitchFamily="34" charset="0"/>
+                <a:ea typeface="Cambria" pitchFamily="34" charset="-122"/>
+                <a:cs typeface="Cambria" pitchFamily="34" charset="-120"/>
+              </a:rPr>
+              <a:t>total_orders</a:t>
+            </a:r>
+            <a:endParaRPr lang="en-US" sz="1350" dirty="0"/>
+          </a:p>
+        </p:txBody>
+      </p:sp>
+      <p:sp>
+        <p:nvSpPr>
+          <p:cNvPr id="24" name="Text 17"/>
+          <p:cNvSpPr/>
+          <p:nvPr/>
+        </p:nvSpPr>
+        <p:spPr>
+          <a:xfrm>
+            <a:off x="5166360" y="3931920"/>
+            <a:ext cx="2468880" cy="365760"/>
+          </a:xfrm>
+          <a:prstGeom prst="rect">
+            <a:avLst/>
+          </a:prstGeom>
+          <a:noFill/>
+          <a:ln/>
+        </p:spPr>
+        <p:txBody>
+          <a:bodyPr wrap="square" rtlCol="0" anchor="ctr"/>
+          <a:lstStyle/>
+          <a:p>
+            <a:pPr marL="0" indent="0">
+              <a:buNone/>
+            </a:pPr>
+            <a:r>
+              <a:rPr lang="en-US" sz="1100" dirty="0">
+                <a:solidFill>
+                  <a:srgbClr val="065A82"/>
+                </a:solidFill>
+                <a:latin typeface="Calibri" pitchFamily="34" charset="0"/>
+                <a:ea typeface="Calibri" pitchFamily="34" charset="-122"/>
+                <a:cs typeface="Calibri" pitchFamily="34" charset="-120"/>
+              </a:rPr>
+              <a:t>not null, verified</a:t>
+            </a:r>
+            <a:endParaRPr lang="en-US" sz="1100" dirty="0"/>
+          </a:p>
+        </p:txBody>
+      </p:sp>
+      <p:sp>
+        <p:nvSpPr>
+          <p:cNvPr id="25" name="Shape 18"/>
+          <p:cNvSpPr/>
+          <p:nvPr/>
+        </p:nvSpPr>
+        <p:spPr>
+          <a:xfrm>
+            <a:off x="8046720" y="3383280"/>
+            <a:ext cx="3520440" cy="1188720"/>
+          </a:xfrm>
+          <a:prstGeom prst="roundRect">
+            <a:avLst>
+              <a:gd name="adj" fmla="val 7692"/>
+            </a:avLst>
+          </a:prstGeom>
+          <a:solidFill>
+            <a:srgbClr val="F7FAFC"/>
+          </a:solidFill>
+          <a:ln/>
+        </p:spPr>
+      </p:sp>
+      <p:pic>
+        <p:nvPicPr>
+          <p:cNvPr id="26" name="Image 5" descr="icon_check_navy.png"/>
+          <p:cNvPicPr>
+            <a:picLocks noChangeAspect="1"/>
+          </p:cNvPicPr>
+          <p:nvPr/>
+        </p:nvPicPr>
+        <p:blipFill>
+          <a:blip r:embed="rId3"/>
+          <a:stretch>
+            <a:fillRect/>
+          </a:stretch>
+        </p:blipFill>
+        <p:spPr>
+          <a:xfrm>
+            <a:off x="8275320" y="3657600"/>
+            <a:ext cx="502920" cy="502920"/>
+          </a:xfrm>
+          <a:prstGeom prst="rect">
+            <a:avLst/>
+          </a:prstGeom>
+        </p:spPr>
+      </p:pic>
+      <p:sp>
+        <p:nvSpPr>
+          <p:cNvPr id="27" name="Text 19"/>
+          <p:cNvSpPr/>
+          <p:nvPr/>
+        </p:nvSpPr>
+        <p:spPr>
+          <a:xfrm>
+            <a:off x="8915400" y="3547872"/>
+            <a:ext cx="2468880" cy="365760"/>
+          </a:xfrm>
+          <a:prstGeom prst="rect">
+            <a:avLst/>
+          </a:prstGeom>
+          <a:noFill/>
+          <a:ln/>
+        </p:spPr>
+        <p:txBody>
+          <a:bodyPr wrap="square" rtlCol="0" anchor="ctr"/>
+          <a:lstStyle/>
+          <a:p>
+            <a:pPr marL="0" indent="0">
+              <a:buNone/>
+            </a:pPr>
+            <a:r>
+              <a:rPr lang="en-US" sz="1350" b="1" dirty="0">
+                <a:solidFill>
+                  <a:srgbClr val="263238"/>
+                </a:solidFill>
+                <a:latin typeface="Cambria" pitchFamily="34" charset="0"/>
+                <a:ea typeface="Cambria" pitchFamily="34" charset="-122"/>
+                <a:cs typeface="Cambria" pitchFamily="34" charset="-120"/>
+              </a:rPr>
+              <a:t>avg_revenue_per_order</a:t>
+            </a:r>
+            <a:endParaRPr lang="en-US" sz="1350" dirty="0"/>
+          </a:p>
+        </p:txBody>
+      </p:sp>
+      <p:sp>
+        <p:nvSpPr>
+          <p:cNvPr id="28" name="Text 20"/>
+          <p:cNvSpPr/>
+          <p:nvPr/>
+        </p:nvSpPr>
+        <p:spPr>
+          <a:xfrm>
+            <a:off x="8915400" y="3931920"/>
+            <a:ext cx="2468880" cy="365760"/>
+          </a:xfrm>
+          <a:prstGeom prst="rect">
+            <a:avLst/>
+          </a:prstGeom>
+          <a:noFill/>
+          <a:ln/>
+        </p:spPr>
+        <p:txBody>
+          <a:bodyPr wrap="square" rtlCol="0" anchor="ctr"/>
+          <a:lstStyle/>
+          <a:p>
+            <a:pPr marL="0" indent="0">
+              <a:buNone/>
+            </a:pPr>
+            <a:r>
+              <a:rPr lang="en-US" sz="1100" dirty="0">
+                <a:solidFill>
+                  <a:srgbClr val="065A82"/>
+                </a:solidFill>
+                <a:latin typeface="Calibri" pitchFamily="34" charset="0"/>
+                <a:ea typeface="Calibri" pitchFamily="34" charset="-122"/>
+                <a:cs typeface="Calibri" pitchFamily="34" charset="-120"/>
+              </a:rPr>
+              <a:t>not null, verified</a:t>
+            </a:r>
+            <a:endParaRPr lang="en-US" sz="1100" dirty="0"/>
+          </a:p>
+        </p:txBody>
+      </p:sp>
+      <p:sp>
+        <p:nvSpPr>
+          <p:cNvPr id="29" name="Shape 21"/>
+          <p:cNvSpPr/>
+          <p:nvPr/>
+        </p:nvSpPr>
+        <p:spPr>
+          <a:xfrm>
+            <a:off x="548640" y="5029200"/>
+            <a:ext cx="11064240" cy="1005840"/>
+          </a:xfrm>
+          <a:prstGeom prst="roundRect">
+            <a:avLst>
+              <a:gd name="adj" fmla="val 9091"/>
+            </a:avLst>
+          </a:prstGeom>
+          <a:solidFill>
+            <a:srgbClr val="065A82"/>
+          </a:solidFill>
+          <a:ln/>
+        </p:spPr>
+      </p:sp>
+      <p:sp>
+        <p:nvSpPr>
+          <p:cNvPr id="30" name="Text 22"/>
+          <p:cNvSpPr/>
+          <p:nvPr/>
+        </p:nvSpPr>
+        <p:spPr>
+          <a:xfrm>
+            <a:off x="822960" y="5029200"/>
+            <a:ext cx="10515600" cy="1005840"/>
+          </a:xfrm>
+          <a:prstGeom prst="rect">
+            <a:avLst/>
+          </a:prstGeom>
+          <a:noFill/>
+          <a:ln/>
+        </p:spPr>
+        <p:txBody>
+          <a:bodyPr wrap="square" rtlCol="0" anchor="ctr"/>
+          <a:lstStyle/>
+          <a:p>
+            <a:pPr marL="0" indent="0">
+              <a:buNone/>
+            </a:pPr>
+            <a:r>
+              <a:rPr lang="en-US" sz="1600" b="1" dirty="0">
+                <a:solidFill>
+                  <a:srgbClr val="FFFFFF"/>
+                </a:solidFill>
+                <a:latin typeface="Cambria" pitchFamily="34" charset="0"/>
+                <a:ea typeface="Cambria" pitchFamily="34" charset="-122"/>
+                <a:cs typeface="Cambria" pitchFamily="34" charset="-120"/>
+              </a:rPr>
+              <a:t>All 6 automated tests passed on the current build</a:t>
+            </a:r>
+            <a:endParaRPr lang="en-US" sz="1600" dirty="0"/>
+          </a:p>
+        </p:txBody>
+      </p:sp>
+      <p:sp>
+        <p:nvSpPr>
+          <p:cNvPr id="31" name="Text 23"/>
+          <p:cNvSpPr/>
+          <p:nvPr/>
+        </p:nvSpPr>
+        <p:spPr>
+          <a:xfrm>
+            <a:off x="457200" y="6537960"/>
+            <a:ext cx="5486400" cy="274320"/>
+          </a:xfrm>
+          <a:prstGeom prst="rect">
+            <a:avLst/>
+          </a:prstGeom>
+          <a:noFill/>
+          <a:ln/>
+        </p:spPr>
+        <p:txBody>
+          <a:bodyPr wrap="square" rtlCol="0" anchor="ctr"/>
+          <a:lstStyle/>
+          <a:p>
+            <a:pPr marL="0" indent="0">
+              <a:buNone/>
+            </a:pPr>
+            <a:r>
+              <a:rPr lang="en-US" sz="900" dirty="0">
+                <a:solidFill>
+                  <a:srgbClr val="607080"/>
+                </a:solidFill>
+                <a:latin typeface="Calibri" pitchFamily="34" charset="0"/>
+                <a:ea typeface="Calibri" pitchFamily="34" charset="-122"/>
+                <a:cs typeface="Calibri" pitchFamily="34" charset="-120"/>
+              </a:rPr>
               <a:t>Northwind Sales Insights</a:t>
             </a:r>
             <a:endParaRPr lang="en-US" sz="900" dirty="0"/>
@@ -3647,7 +3520,7 @@
       </p:sp>
       <p:sp>
         <p:nvSpPr>
-          <p:cNvPr id="19" name="Text 14"/>
+          <p:cNvPr id="32" name="Text 24"/>
           <p:cNvSpPr/>
           <p:nvPr/>
         </p:nvSpPr>
@@ -3666,7 +3539,7 @@
           <a:bodyPr wrap="square" rtlCol="0" anchor="ctr"/>
           <a:lstStyle/>
           <a:p>
-            <a:pPr algn="r" indent="0" marL="0">
+            <a:pPr marL="0" indent="0" algn="r">
               <a:buNone/>
             </a:pPr>
             <a:r>
@@ -3698,8 +3571,9 @@
     <p:bg>
       <p:bgPr>
         <a:solidFill>
-          <a:srgbClr val="21295C"/>
+          <a:srgbClr val="F7FAFC"/>
         </a:solidFill>
+        <a:effectLst/>
       </p:bgPr>
     </p:bg>
     <p:spTree>
@@ -3718,6 +3592,644 @@
       </p:grpSpPr>
       <p:sp>
         <p:nvSpPr>
+          <p:cNvPr id="2" name="Text 0"/>
+          <p:cNvSpPr/>
+          <p:nvPr/>
+        </p:nvSpPr>
+        <p:spPr>
+          <a:xfrm>
+            <a:off x="548640" y="457200"/>
+            <a:ext cx="9144000" cy="640080"/>
+          </a:xfrm>
+          <a:prstGeom prst="rect">
+            <a:avLst/>
+          </a:prstGeom>
+          <a:noFill/>
+          <a:ln/>
+        </p:spPr>
+        <p:txBody>
+          <a:bodyPr wrap="square" rtlCol="0" anchor="ctr"/>
+          <a:lstStyle/>
+          <a:p>
+            <a:pPr marL="0" indent="0">
+              <a:buNone/>
+            </a:pPr>
+            <a:r>
+              <a:rPr lang="en-US" sz="3200" b="1" dirty="0">
+                <a:solidFill>
+                  <a:srgbClr val="21295C"/>
+                </a:solidFill>
+                <a:latin typeface="Cambria" pitchFamily="34" charset="0"/>
+                <a:ea typeface="Cambria" pitchFamily="34" charset="-122"/>
+                <a:cs typeface="Cambria" pitchFamily="34" charset="-120"/>
+              </a:rPr>
+              <a:t>Recommended Next Steps</a:t>
+            </a:r>
+            <a:endParaRPr lang="en-US" sz="3200" dirty="0"/>
+          </a:p>
+        </p:txBody>
+      </p:sp>
+      <p:sp>
+        <p:nvSpPr>
+          <p:cNvPr id="3" name="Shape 1"/>
+          <p:cNvSpPr/>
+          <p:nvPr/>
+        </p:nvSpPr>
+        <p:spPr>
+          <a:xfrm>
+            <a:off x="566928" y="1024128"/>
+            <a:ext cx="502920" cy="64008"/>
+          </a:xfrm>
+          <a:prstGeom prst="rect">
+            <a:avLst/>
+          </a:prstGeom>
+          <a:solidFill>
+            <a:srgbClr val="1C7293"/>
+          </a:solidFill>
+          <a:ln/>
+        </p:spPr>
+      </p:sp>
+      <p:sp>
+        <p:nvSpPr>
+          <p:cNvPr id="4" name="Shape 2"/>
+          <p:cNvSpPr/>
+          <p:nvPr/>
+        </p:nvSpPr>
+        <p:spPr>
+          <a:xfrm>
+            <a:off x="548640" y="1691640"/>
+            <a:ext cx="3520440" cy="3931920"/>
+          </a:xfrm>
+          <a:prstGeom prst="roundRect">
+            <a:avLst>
+              <a:gd name="adj" fmla="val 3117"/>
+            </a:avLst>
+          </a:prstGeom>
+          <a:solidFill>
+            <a:srgbClr val="FFFFFF"/>
+          </a:solidFill>
+          <a:ln w="12700">
+            <a:solidFill>
+              <a:srgbClr val="E0E6EC"/>
+            </a:solidFill>
+            <a:prstDash val="solid"/>
+          </a:ln>
+          <a:effectLst>
+            <a:outerShdw blurRad="101600" dist="38100" dir="5400000" algn="bl" rotWithShape="0">
+              <a:srgbClr val="000000">
+                <a:alpha val="10000"/>
+              </a:srgbClr>
+            </a:outerShdw>
+          </a:effectLst>
+        </p:spPr>
+      </p:sp>
+      <p:sp>
+        <p:nvSpPr>
+          <p:cNvPr id="5" name="Shape 3"/>
+          <p:cNvSpPr/>
+          <p:nvPr/>
+        </p:nvSpPr>
+        <p:spPr>
+          <a:xfrm>
+            <a:off x="1874520" y="2057400"/>
+            <a:ext cx="914400" cy="914400"/>
+          </a:xfrm>
+          <a:prstGeom prst="ellipse">
+            <a:avLst/>
+          </a:prstGeom>
+          <a:solidFill>
+            <a:srgbClr val="1C7293"/>
+          </a:solidFill>
+          <a:ln/>
+        </p:spPr>
+      </p:sp>
+      <p:pic>
+        <p:nvPicPr>
+          <p:cNvPr id="6" name="Image 0" descr="icon_target_white.png"/>
+          <p:cNvPicPr>
+            <a:picLocks noChangeAspect="1"/>
+          </p:cNvPicPr>
+          <p:nvPr/>
+        </p:nvPicPr>
+        <p:blipFill>
+          <a:blip r:embed="rId3"/>
+          <a:stretch>
+            <a:fillRect/>
+          </a:stretch>
+        </p:blipFill>
+        <p:spPr>
+          <a:xfrm>
+            <a:off x="2084832" y="2267712"/>
+            <a:ext cx="493776" cy="493776"/>
+          </a:xfrm>
+          <a:prstGeom prst="rect">
+            <a:avLst/>
+          </a:prstGeom>
+        </p:spPr>
+      </p:pic>
+      <p:sp>
+        <p:nvSpPr>
+          <p:cNvPr id="7" name="Text 4"/>
+          <p:cNvSpPr/>
+          <p:nvPr/>
+        </p:nvSpPr>
+        <p:spPr>
+          <a:xfrm>
+            <a:off x="777240" y="3154680"/>
+            <a:ext cx="3063240" cy="548640"/>
+          </a:xfrm>
+          <a:prstGeom prst="rect">
+            <a:avLst/>
+          </a:prstGeom>
+          <a:noFill/>
+          <a:ln/>
+        </p:spPr>
+        <p:txBody>
+          <a:bodyPr wrap="square" rtlCol="0" anchor="ctr"/>
+          <a:lstStyle/>
+          <a:p>
+            <a:pPr marL="0" indent="0" algn="ctr">
+              <a:buNone/>
+            </a:pPr>
+            <a:r>
+              <a:rPr lang="en-US" sz="1600" b="1" dirty="0">
+                <a:solidFill>
+                  <a:srgbClr val="263238"/>
+                </a:solidFill>
+                <a:latin typeface="Cambria" pitchFamily="34" charset="0"/>
+                <a:ea typeface="Cambria" pitchFamily="34" charset="-122"/>
+                <a:cs typeface="Cambria" pitchFamily="34" charset="-120"/>
+              </a:rPr>
+              <a:t>Connect a BI Tool</a:t>
+            </a:r>
+            <a:endParaRPr lang="en-US" sz="1600" dirty="0"/>
+          </a:p>
+        </p:txBody>
+      </p:sp>
+      <p:sp>
+        <p:nvSpPr>
+          <p:cNvPr id="8" name="Text 5"/>
+          <p:cNvSpPr/>
+          <p:nvPr/>
+        </p:nvSpPr>
+        <p:spPr>
+          <a:xfrm>
+            <a:off x="868680" y="3794760"/>
+            <a:ext cx="2880360" cy="1554480"/>
+          </a:xfrm>
+          <a:prstGeom prst="rect">
+            <a:avLst/>
+          </a:prstGeom>
+          <a:noFill/>
+          <a:ln/>
+        </p:spPr>
+        <p:txBody>
+          <a:bodyPr wrap="square" rtlCol="0" anchor="t"/>
+          <a:lstStyle/>
+          <a:p>
+            <a:pPr marL="0" indent="0" algn="ctr">
+              <a:buNone/>
+            </a:pPr>
+            <a:r>
+              <a:rPr lang="en-US" sz="1200" dirty="0">
+                <a:solidFill>
+                  <a:srgbClr val="607080"/>
+                </a:solidFill>
+                <a:latin typeface="Calibri" pitchFamily="34" charset="0"/>
+                <a:ea typeface="Calibri" pitchFamily="34" charset="-122"/>
+                <a:cs typeface="Calibri" pitchFamily="34" charset="-120"/>
+              </a:rPr>
+              <a:t>Point a dashboard directly at the mart for self serve reporting</a:t>
+            </a:r>
+            <a:endParaRPr lang="en-US" sz="1200" dirty="0"/>
+          </a:p>
+        </p:txBody>
+      </p:sp>
+      <p:sp>
+        <p:nvSpPr>
+          <p:cNvPr id="9" name="Shape 6"/>
+          <p:cNvSpPr/>
+          <p:nvPr/>
+        </p:nvSpPr>
+        <p:spPr>
+          <a:xfrm>
+            <a:off x="4325112" y="1691640"/>
+            <a:ext cx="3520440" cy="3931920"/>
+          </a:xfrm>
+          <a:prstGeom prst="roundRect">
+            <a:avLst>
+              <a:gd name="adj" fmla="val 3117"/>
+            </a:avLst>
+          </a:prstGeom>
+          <a:solidFill>
+            <a:srgbClr val="FFFFFF"/>
+          </a:solidFill>
+          <a:ln w="12700">
+            <a:solidFill>
+              <a:srgbClr val="E0E6EC"/>
+            </a:solidFill>
+            <a:prstDash val="solid"/>
+          </a:ln>
+          <a:effectLst>
+            <a:outerShdw blurRad="101600" dist="38100" dir="5400000" algn="bl" rotWithShape="0">
+              <a:srgbClr val="000000">
+                <a:alpha val="10000"/>
+              </a:srgbClr>
+            </a:outerShdw>
+          </a:effectLst>
+        </p:spPr>
+      </p:sp>
+      <p:sp>
+        <p:nvSpPr>
+          <p:cNvPr id="10" name="Shape 7"/>
+          <p:cNvSpPr/>
+          <p:nvPr/>
+        </p:nvSpPr>
+        <p:spPr>
+          <a:xfrm>
+            <a:off x="5650992" y="2057400"/>
+            <a:ext cx="914400" cy="914400"/>
+          </a:xfrm>
+          <a:prstGeom prst="ellipse">
+            <a:avLst/>
+          </a:prstGeom>
+          <a:solidFill>
+            <a:srgbClr val="1C7293"/>
+          </a:solidFill>
+          <a:ln/>
+        </p:spPr>
+      </p:sp>
+      <p:pic>
+        <p:nvPicPr>
+          <p:cNvPr id="11" name="Image 1" descr="icon_clipboard_white.png"/>
+          <p:cNvPicPr>
+            <a:picLocks noChangeAspect="1"/>
+          </p:cNvPicPr>
+          <p:nvPr/>
+        </p:nvPicPr>
+        <p:blipFill>
+          <a:blip r:embed="rId4"/>
+          <a:stretch>
+            <a:fillRect/>
+          </a:stretch>
+        </p:blipFill>
+        <p:spPr>
+          <a:xfrm>
+            <a:off x="5861304" y="2267712"/>
+            <a:ext cx="493776" cy="493776"/>
+          </a:xfrm>
+          <a:prstGeom prst="rect">
+            <a:avLst/>
+          </a:prstGeom>
+        </p:spPr>
+      </p:pic>
+      <p:sp>
+        <p:nvSpPr>
+          <p:cNvPr id="12" name="Text 8"/>
+          <p:cNvSpPr/>
+          <p:nvPr/>
+        </p:nvSpPr>
+        <p:spPr>
+          <a:xfrm>
+            <a:off x="4553712" y="3154680"/>
+            <a:ext cx="3063240" cy="548640"/>
+          </a:xfrm>
+          <a:prstGeom prst="rect">
+            <a:avLst/>
+          </a:prstGeom>
+          <a:noFill/>
+          <a:ln/>
+        </p:spPr>
+        <p:txBody>
+          <a:bodyPr wrap="square" rtlCol="0" anchor="ctr"/>
+          <a:lstStyle/>
+          <a:p>
+            <a:pPr marL="0" indent="0" algn="ctr">
+              <a:buNone/>
+            </a:pPr>
+            <a:r>
+              <a:rPr lang="en-US" sz="1600" b="1" dirty="0">
+                <a:solidFill>
+                  <a:srgbClr val="263238"/>
+                </a:solidFill>
+                <a:latin typeface="Cambria" pitchFamily="34" charset="0"/>
+                <a:ea typeface="Cambria" pitchFamily="34" charset="-122"/>
+                <a:cs typeface="Cambria" pitchFamily="34" charset="-120"/>
+              </a:rPr>
+              <a:t>Expand Test Coverage</a:t>
+            </a:r>
+            <a:endParaRPr lang="en-US" sz="1600" dirty="0"/>
+          </a:p>
+        </p:txBody>
+      </p:sp>
+      <p:sp>
+        <p:nvSpPr>
+          <p:cNvPr id="13" name="Text 9"/>
+          <p:cNvSpPr/>
+          <p:nvPr/>
+        </p:nvSpPr>
+        <p:spPr>
+          <a:xfrm>
+            <a:off x="4645152" y="3794760"/>
+            <a:ext cx="2880360" cy="1554480"/>
+          </a:xfrm>
+          <a:prstGeom prst="rect">
+            <a:avLst/>
+          </a:prstGeom>
+          <a:noFill/>
+          <a:ln/>
+        </p:spPr>
+        <p:txBody>
+          <a:bodyPr wrap="square" rtlCol="0" anchor="t"/>
+          <a:lstStyle/>
+          <a:p>
+            <a:pPr marL="0" indent="0" algn="ctr">
+              <a:buNone/>
+            </a:pPr>
+            <a:r>
+              <a:rPr lang="en-US" sz="1200" dirty="0">
+                <a:solidFill>
+                  <a:srgbClr val="607080"/>
+                </a:solidFill>
+                <a:latin typeface="Calibri" pitchFamily="34" charset="0"/>
+                <a:ea typeface="Calibri" pitchFamily="34" charset="-122"/>
+                <a:cs typeface="Calibri" pitchFamily="34" charset="-120"/>
+              </a:rPr>
+              <a:t>Add uniqueness and relationship tests across the staging layer</a:t>
+            </a:r>
+            <a:endParaRPr lang="en-US" sz="1200" dirty="0"/>
+          </a:p>
+        </p:txBody>
+      </p:sp>
+      <p:sp>
+        <p:nvSpPr>
+          <p:cNvPr id="14" name="Shape 10"/>
+          <p:cNvSpPr/>
+          <p:nvPr/>
+        </p:nvSpPr>
+        <p:spPr>
+          <a:xfrm>
+            <a:off x="8101584" y="1691640"/>
+            <a:ext cx="3520440" cy="3931920"/>
+          </a:xfrm>
+          <a:prstGeom prst="roundRect">
+            <a:avLst>
+              <a:gd name="adj" fmla="val 3117"/>
+            </a:avLst>
+          </a:prstGeom>
+          <a:solidFill>
+            <a:srgbClr val="FFFFFF"/>
+          </a:solidFill>
+          <a:ln w="12700">
+            <a:solidFill>
+              <a:srgbClr val="E0E6EC"/>
+            </a:solidFill>
+            <a:prstDash val="solid"/>
+          </a:ln>
+          <a:effectLst>
+            <a:outerShdw blurRad="101600" dist="38100" dir="5400000" algn="bl" rotWithShape="0">
+              <a:srgbClr val="000000">
+                <a:alpha val="10000"/>
+              </a:srgbClr>
+            </a:outerShdw>
+          </a:effectLst>
+        </p:spPr>
+      </p:sp>
+      <p:sp>
+        <p:nvSpPr>
+          <p:cNvPr id="15" name="Shape 11"/>
+          <p:cNvSpPr/>
+          <p:nvPr/>
+        </p:nvSpPr>
+        <p:spPr>
+          <a:xfrm>
+            <a:off x="9427464" y="2057400"/>
+            <a:ext cx="914400" cy="914400"/>
+          </a:xfrm>
+          <a:prstGeom prst="ellipse">
+            <a:avLst/>
+          </a:prstGeom>
+          <a:solidFill>
+            <a:srgbClr val="1C7293"/>
+          </a:solidFill>
+          <a:ln/>
+        </p:spPr>
+      </p:sp>
+      <p:pic>
+        <p:nvPicPr>
+          <p:cNvPr id="16" name="Image 2" descr="icon_chart_white.png"/>
+          <p:cNvPicPr>
+            <a:picLocks noChangeAspect="1"/>
+          </p:cNvPicPr>
+          <p:nvPr/>
+        </p:nvPicPr>
+        <p:blipFill>
+          <a:blip r:embed="rId5"/>
+          <a:stretch>
+            <a:fillRect/>
+          </a:stretch>
+        </p:blipFill>
+        <p:spPr>
+          <a:xfrm>
+            <a:off x="9637776" y="2267712"/>
+            <a:ext cx="493776" cy="493776"/>
+          </a:xfrm>
+          <a:prstGeom prst="rect">
+            <a:avLst/>
+          </a:prstGeom>
+        </p:spPr>
+      </p:pic>
+      <p:sp>
+        <p:nvSpPr>
+          <p:cNvPr id="17" name="Text 12"/>
+          <p:cNvSpPr/>
+          <p:nvPr/>
+        </p:nvSpPr>
+        <p:spPr>
+          <a:xfrm>
+            <a:off x="8330184" y="3154680"/>
+            <a:ext cx="3063240" cy="548640"/>
+          </a:xfrm>
+          <a:prstGeom prst="rect">
+            <a:avLst/>
+          </a:prstGeom>
+          <a:noFill/>
+          <a:ln/>
+        </p:spPr>
+        <p:txBody>
+          <a:bodyPr wrap="square" rtlCol="0" anchor="ctr"/>
+          <a:lstStyle/>
+          <a:p>
+            <a:pPr marL="0" indent="0" algn="ctr">
+              <a:buNone/>
+            </a:pPr>
+            <a:r>
+              <a:rPr lang="en-US" sz="1600" b="1" dirty="0">
+                <a:solidFill>
+                  <a:srgbClr val="263238"/>
+                </a:solidFill>
+                <a:latin typeface="Cambria" pitchFamily="34" charset="0"/>
+                <a:ea typeface="Cambria" pitchFamily="34" charset="-122"/>
+                <a:cs typeface="Cambria" pitchFamily="34" charset="-120"/>
+              </a:rPr>
+              <a:t>Add Customer Dimension</a:t>
+            </a:r>
+            <a:endParaRPr lang="en-US" sz="1600" dirty="0"/>
+          </a:p>
+        </p:txBody>
+      </p:sp>
+      <p:sp>
+        <p:nvSpPr>
+          <p:cNvPr id="18" name="Text 13"/>
+          <p:cNvSpPr/>
+          <p:nvPr/>
+        </p:nvSpPr>
+        <p:spPr>
+          <a:xfrm>
+            <a:off x="8421624" y="3794760"/>
+            <a:ext cx="2880360" cy="1554480"/>
+          </a:xfrm>
+          <a:prstGeom prst="rect">
+            <a:avLst/>
+          </a:prstGeom>
+          <a:noFill/>
+          <a:ln/>
+        </p:spPr>
+        <p:txBody>
+          <a:bodyPr wrap="square" rtlCol="0" anchor="t"/>
+          <a:lstStyle/>
+          <a:p>
+            <a:pPr marL="0" indent="0" algn="ctr">
+              <a:buNone/>
+            </a:pPr>
+            <a:r>
+              <a:rPr lang="en-US" sz="1200" dirty="0">
+                <a:solidFill>
+                  <a:srgbClr val="607080"/>
+                </a:solidFill>
+                <a:latin typeface="Calibri" pitchFamily="34" charset="0"/>
+                <a:ea typeface="Calibri" pitchFamily="34" charset="-122"/>
+                <a:cs typeface="Calibri" pitchFamily="34" charset="-120"/>
+              </a:rPr>
+              <a:t>Bring in customer data to analyze revenue by region and account</a:t>
+            </a:r>
+            <a:endParaRPr lang="en-US" sz="1200" dirty="0"/>
+          </a:p>
+        </p:txBody>
+      </p:sp>
+      <p:sp>
+        <p:nvSpPr>
+          <p:cNvPr id="19" name="Text 14"/>
+          <p:cNvSpPr/>
+          <p:nvPr/>
+        </p:nvSpPr>
+        <p:spPr>
+          <a:xfrm>
+            <a:off x="457200" y="6537960"/>
+            <a:ext cx="5486400" cy="274320"/>
+          </a:xfrm>
+          <a:prstGeom prst="rect">
+            <a:avLst/>
+          </a:prstGeom>
+          <a:noFill/>
+          <a:ln/>
+        </p:spPr>
+        <p:txBody>
+          <a:bodyPr wrap="square" rtlCol="0" anchor="ctr"/>
+          <a:lstStyle/>
+          <a:p>
+            <a:pPr marL="0" indent="0">
+              <a:buNone/>
+            </a:pPr>
+            <a:r>
+              <a:rPr lang="en-US" sz="900" dirty="0">
+                <a:solidFill>
+                  <a:srgbClr val="607080"/>
+                </a:solidFill>
+                <a:latin typeface="Calibri" pitchFamily="34" charset="0"/>
+                <a:ea typeface="Calibri" pitchFamily="34" charset="-122"/>
+                <a:cs typeface="Calibri" pitchFamily="34" charset="-120"/>
+              </a:rPr>
+              <a:t>Northwind Sales Insights</a:t>
+            </a:r>
+            <a:endParaRPr lang="en-US" sz="900" dirty="0"/>
+          </a:p>
+        </p:txBody>
+      </p:sp>
+      <p:sp>
+        <p:nvSpPr>
+          <p:cNvPr id="20" name="Text 15"/>
+          <p:cNvSpPr/>
+          <p:nvPr/>
+        </p:nvSpPr>
+        <p:spPr>
+          <a:xfrm>
+            <a:off x="11430000" y="6537960"/>
+            <a:ext cx="365760" cy="274320"/>
+          </a:xfrm>
+          <a:prstGeom prst="rect">
+            <a:avLst/>
+          </a:prstGeom>
+          <a:noFill/>
+          <a:ln/>
+        </p:spPr>
+        <p:txBody>
+          <a:bodyPr wrap="square" rtlCol="0" anchor="ctr"/>
+          <a:lstStyle/>
+          <a:p>
+            <a:pPr marL="0" indent="0" algn="r">
+              <a:buNone/>
+            </a:pPr>
+            <a:r>
+              <a:rPr lang="en-US" sz="900" dirty="0">
+                <a:solidFill>
+                  <a:srgbClr val="607080"/>
+                </a:solidFill>
+                <a:latin typeface="Calibri" pitchFamily="34" charset="0"/>
+                <a:ea typeface="Calibri" pitchFamily="34" charset="-122"/>
+                <a:cs typeface="Calibri" pitchFamily="34" charset="-120"/>
+              </a:rPr>
+              <a:t>12</a:t>
+            </a:r>
+            <a:endParaRPr lang="en-US" sz="900" dirty="0"/>
+          </a:p>
+        </p:txBody>
+      </p:sp>
+    </p:spTree>
+  </p:cSld>
+  <p:clrMapOvr>
+    <a:masterClrMapping/>
+  </p:clrMapOvr>
+</p:sld>
+</file>
+
+<file path=ppt/slides/slide13.xml><?xml version="1.0" encoding="utf-8"?>
+<p:sld xmlns:a="http://schemas.openxmlformats.org/drawingml/2006/main" xmlns:r="http://schemas.openxmlformats.org/officeDocument/2006/relationships" xmlns:p="http://schemas.openxmlformats.org/presentationml/2006/main">
+  <p:cSld name="Slide 13">
+    <p:bg>
+      <p:bgPr>
+        <a:solidFill>
+          <a:srgbClr val="21295C"/>
+        </a:solidFill>
+        <a:effectLst/>
+      </p:bgPr>
+    </p:bg>
+    <p:spTree>
+      <p:nvGrpSpPr>
+        <p:cNvPr id="1" name=""/>
+        <p:cNvGrpSpPr/>
+        <p:nvPr/>
+      </p:nvGrpSpPr>
+      <p:grpSpPr>
+        <a:xfrm>
+          <a:off x="0" y="0"/>
+          <a:ext cx="0" cy="0"/>
+          <a:chOff x="0" y="0"/>
+          <a:chExt cx="0" cy="0"/>
+        </a:xfrm>
+      </p:grpSpPr>
+      <p:sp>
+        <p:nvSpPr>
           <p:cNvPr id="2" name="Shape 0"/>
           <p:cNvSpPr/>
           <p:nvPr/>
@@ -3781,7 +4293,7 @@
           <a:bodyPr wrap="square" rtlCol="0" anchor="ctr"/>
           <a:lstStyle/>
           <a:p>
-            <a:pPr indent="0" marL="0">
+            <a:pPr marL="0" indent="0">
               <a:buNone/>
             </a:pPr>
             <a:r>
@@ -3820,7 +4332,7 @@
           <a:bodyPr wrap="square" rtlCol="0" anchor="ctr"/>
           <a:lstStyle/>
           <a:p>
-            <a:pPr indent="0" marL="0">
+            <a:pPr marL="0" indent="0">
               <a:buNone/>
             </a:pPr>
             <a:r>
@@ -3859,7 +4371,7 @@
           <a:bodyPr wrap="square" rtlCol="0" anchor="ctr"/>
           <a:lstStyle/>
           <a:p>
-            <a:pPr indent="0" marL="0">
+            <a:pPr marL="0" indent="0">
               <a:buNone/>
             </a:pPr>
             <a:r>
@@ -3893,6 +4405,7 @@
         <a:solidFill>
           <a:srgbClr val="FFFFFF"/>
         </a:solidFill>
+        <a:effectLst/>
       </p:bgPr>
     </p:bg>
     <p:spTree>
@@ -3930,7 +4443,7 @@
           <a:bodyPr wrap="square" rtlCol="0" anchor="ctr"/>
           <a:lstStyle/>
           <a:p>
-            <a:pPr indent="0" marL="0">
+            <a:pPr marL="0" indent="0">
               <a:buNone/>
             </a:pPr>
             <a:r>
@@ -3956,6 +4469,26 @@
         </p:nvSpPr>
         <p:spPr>
           <a:xfrm>
+            <a:off x="566928" y="1024128"/>
+            <a:ext cx="502920" cy="64008"/>
+          </a:xfrm>
+          <a:prstGeom prst="rect">
+            <a:avLst/>
+          </a:prstGeom>
+          <a:solidFill>
+            <a:srgbClr val="1C7293"/>
+          </a:solidFill>
+          <a:ln/>
+        </p:spPr>
+      </p:sp>
+      <p:sp>
+        <p:nvSpPr>
+          <p:cNvPr id="4" name="Shape 2"/>
+          <p:cNvSpPr/>
+          <p:nvPr/>
+        </p:nvSpPr>
+        <p:spPr>
+          <a:xfrm>
             <a:off x="640080" y="1554480"/>
             <a:ext cx="685800" cy="685800"/>
           </a:xfrm>
@@ -3970,251 +4503,7 @@
       </p:sp>
       <p:pic>
         <p:nvPicPr>
-          <p:cNvPr id="4" name="Image 0" descr="icon_target_white.png">    </p:cNvPr>
-          <p:cNvPicPr>
-            <a:picLocks noChangeAspect="1"/>
-          </p:cNvPicPr>
-          <p:nvPr/>
-        </p:nvPicPr>
-        <p:blipFill>
-          <a:blip r:embed="rId1"/>
-          <a:stretch>
-            <a:fillRect/>
-          </a:stretch>
-        </p:blipFill>
-        <p:spPr>
-          <a:xfrm>
-            <a:off x="809244" y="1723644"/>
-            <a:ext cx="347472" cy="347472"/>
-          </a:xfrm>
-          <a:prstGeom prst="rect">
-            <a:avLst/>
-          </a:prstGeom>
-        </p:spPr>
-      </p:pic>
-      <p:sp>
-        <p:nvSpPr>
-          <p:cNvPr id="5" name="Text 2"/>
-          <p:cNvSpPr/>
-          <p:nvPr/>
-        </p:nvSpPr>
-        <p:spPr>
-          <a:xfrm>
-            <a:off x="1645920" y="1527048"/>
-            <a:ext cx="5486400" cy="365760"/>
-          </a:xfrm>
-          <a:prstGeom prst="rect">
-            <a:avLst/>
-          </a:prstGeom>
-          <a:noFill/>
-          <a:ln/>
-        </p:spPr>
-        <p:txBody>
-          <a:bodyPr wrap="square" rtlCol="0" anchor="ctr"/>
-          <a:lstStyle/>
-          <a:p>
-            <a:pPr indent="0" marL="0">
-              <a:buNone/>
-            </a:pPr>
-            <a:r>
-              <a:rPr lang="en-US" sz="1800" b="1" dirty="0">
-                <a:solidFill>
-                  <a:srgbClr val="263238"/>
-                </a:solidFill>
-                <a:latin typeface="Cambria" pitchFamily="34" charset="0"/>
-                <a:ea typeface="Cambria" pitchFamily="34" charset="-122"/>
-                <a:cs typeface="Cambria" pitchFamily="34" charset="-120"/>
-              </a:rPr>
-              <a:t>The Business Problem</a:t>
-            </a:r>
-            <a:endParaRPr lang="en-US" sz="1800" dirty="0"/>
-          </a:p>
-        </p:txBody>
-      </p:sp>
-      <p:sp>
-        <p:nvSpPr>
-          <p:cNvPr id="6" name="Text 3"/>
-          <p:cNvSpPr/>
-          <p:nvPr/>
-        </p:nvSpPr>
-        <p:spPr>
-          <a:xfrm>
-            <a:off x="1645920" y="1874520"/>
-            <a:ext cx="7315200" cy="365760"/>
-          </a:xfrm>
-          <a:prstGeom prst="rect">
-            <a:avLst/>
-          </a:prstGeom>
-          <a:noFill/>
-          <a:ln/>
-        </p:spPr>
-        <p:txBody>
-          <a:bodyPr wrap="square" rtlCol="0" anchor="ctr"/>
-          <a:lstStyle/>
-          <a:p>
-            <a:pPr indent="0" marL="0">
-              <a:buNone/>
-            </a:pPr>
-            <a:r>
-              <a:rPr lang="en-US" sz="1250" dirty="0">
-                <a:solidFill>
-                  <a:srgbClr val="607080"/>
-                </a:solidFill>
-                <a:latin typeface="Calibri" pitchFamily="34" charset="0"/>
-                <a:ea typeface="Calibri" pitchFamily="34" charset="-122"/>
-                <a:cs typeface="Calibri" pitchFamily="34" charset="-120"/>
-              </a:rPr>
-              <a:t>Why raw order data was hard to trust and reuse</a:t>
-            </a:r>
-            <a:endParaRPr lang="en-US" sz="1250" dirty="0"/>
-          </a:p>
-        </p:txBody>
-      </p:sp>
-      <p:sp>
-        <p:nvSpPr>
-          <p:cNvPr id="7" name="Shape 4"/>
-          <p:cNvSpPr/>
-          <p:nvPr/>
-        </p:nvSpPr>
-        <p:spPr>
-          <a:xfrm>
-            <a:off x="640080" y="2697480"/>
-            <a:ext cx="685800" cy="685800"/>
-          </a:xfrm>
-          <a:prstGeom prst="ellipse">
-            <a:avLst/>
-          </a:prstGeom>
-          <a:solidFill>
-            <a:srgbClr val="065A82"/>
-          </a:solidFill>
-          <a:ln/>
-        </p:spPr>
-      </p:sp>
-      <p:pic>
-        <p:nvPicPr>
-          <p:cNvPr id="8" name="Image 1" descr="icon_diagram_white.png">    </p:cNvPr>
-          <p:cNvPicPr>
-            <a:picLocks noChangeAspect="1"/>
-          </p:cNvPicPr>
-          <p:nvPr/>
-        </p:nvPicPr>
-        <p:blipFill>
-          <a:blip r:embed="rId2"/>
-          <a:stretch>
-            <a:fillRect/>
-          </a:stretch>
-        </p:blipFill>
-        <p:spPr>
-          <a:xfrm>
-            <a:off x="809244" y="2866644"/>
-            <a:ext cx="347472" cy="347472"/>
-          </a:xfrm>
-          <a:prstGeom prst="rect">
-            <a:avLst/>
-          </a:prstGeom>
-        </p:spPr>
-      </p:pic>
-      <p:sp>
-        <p:nvSpPr>
-          <p:cNvPr id="9" name="Text 5"/>
-          <p:cNvSpPr/>
-          <p:nvPr/>
-        </p:nvSpPr>
-        <p:spPr>
-          <a:xfrm>
-            <a:off x="1645920" y="2670048"/>
-            <a:ext cx="5486400" cy="365760"/>
-          </a:xfrm>
-          <a:prstGeom prst="rect">
-            <a:avLst/>
-          </a:prstGeom>
-          <a:noFill/>
-          <a:ln/>
-        </p:spPr>
-        <p:txBody>
-          <a:bodyPr wrap="square" rtlCol="0" anchor="ctr"/>
-          <a:lstStyle/>
-          <a:p>
-            <a:pPr indent="0" marL="0">
-              <a:buNone/>
-            </a:pPr>
-            <a:r>
-              <a:rPr lang="en-US" sz="1800" b="1" dirty="0">
-                <a:solidFill>
-                  <a:srgbClr val="263238"/>
-                </a:solidFill>
-                <a:latin typeface="Cambria" pitchFamily="34" charset="0"/>
-                <a:ea typeface="Cambria" pitchFamily="34" charset="-122"/>
-                <a:cs typeface="Cambria" pitchFamily="34" charset="-120"/>
-              </a:rPr>
-              <a:t>The Pipeline We Built</a:t>
-            </a:r>
-            <a:endParaRPr lang="en-US" sz="1800" dirty="0"/>
-          </a:p>
-        </p:txBody>
-      </p:sp>
-      <p:sp>
-        <p:nvSpPr>
-          <p:cNvPr id="10" name="Text 6"/>
-          <p:cNvSpPr/>
-          <p:nvPr/>
-        </p:nvSpPr>
-        <p:spPr>
-          <a:xfrm>
-            <a:off x="1645920" y="3017520"/>
-            <a:ext cx="7315200" cy="365760"/>
-          </a:xfrm>
-          <a:prstGeom prst="rect">
-            <a:avLst/>
-          </a:prstGeom>
-          <a:noFill/>
-          <a:ln/>
-        </p:spPr>
-        <p:txBody>
-          <a:bodyPr wrap="square" rtlCol="0" anchor="ctr"/>
-          <a:lstStyle/>
-          <a:p>
-            <a:pPr indent="0" marL="0">
-              <a:buNone/>
-            </a:pPr>
-            <a:r>
-              <a:rPr lang="en-US" sz="1250" dirty="0">
-                <a:solidFill>
-                  <a:srgbClr val="607080"/>
-                </a:solidFill>
-                <a:latin typeface="Calibri" pitchFamily="34" charset="0"/>
-                <a:ea typeface="Calibri" pitchFamily="34" charset="-122"/>
-                <a:cs typeface="Calibri" pitchFamily="34" charset="-120"/>
-              </a:rPr>
-              <a:t>Staging, prep, and mart layers in dbt</a:t>
-            </a:r>
-            <a:endParaRPr lang="en-US" sz="1250" dirty="0"/>
-          </a:p>
-        </p:txBody>
-      </p:sp>
-      <p:sp>
-        <p:nvSpPr>
-          <p:cNvPr id="11" name="Shape 7"/>
-          <p:cNvSpPr/>
-          <p:nvPr/>
-        </p:nvSpPr>
-        <p:spPr>
-          <a:xfrm>
-            <a:off x="640080" y="3840480"/>
-            <a:ext cx="685800" cy="685800"/>
-          </a:xfrm>
-          <a:prstGeom prst="ellipse">
-            <a:avLst/>
-          </a:prstGeom>
-          <a:solidFill>
-            <a:srgbClr val="065A82"/>
-          </a:solidFill>
-          <a:ln/>
-        </p:spPr>
-      </p:sp>
-      <p:pic>
-        <p:nvPicPr>
-          <p:cNvPr id="12" name="Image 2" descr="icon_chart_white.png">    </p:cNvPr>
+          <p:cNvPr id="5" name="Image 0" descr="icon_target_white.png"/>
           <p:cNvPicPr>
             <a:picLocks noChangeAspect="1"/>
           </p:cNvPicPr>
@@ -4228,7 +4517,7 @@
         </p:blipFill>
         <p:spPr>
           <a:xfrm>
-            <a:off x="809244" y="4009644"/>
+            <a:off x="809244" y="1723644"/>
             <a:ext cx="347472" cy="347472"/>
           </a:xfrm>
           <a:prstGeom prst="rect">
@@ -4238,13 +4527,13 @@
       </p:pic>
       <p:sp>
         <p:nvSpPr>
-          <p:cNvPr id="13" name="Text 8"/>
-          <p:cNvSpPr/>
-          <p:nvPr/>
-        </p:nvSpPr>
-        <p:spPr>
-          <a:xfrm>
-            <a:off x="1645920" y="3813048"/>
+          <p:cNvPr id="6" name="Text 3"/>
+          <p:cNvSpPr/>
+          <p:nvPr/>
+        </p:nvSpPr>
+        <p:spPr>
+          <a:xfrm>
+            <a:off x="1645920" y="1527048"/>
             <a:ext cx="5486400" cy="365760"/>
           </a:xfrm>
           <a:prstGeom prst="rect">
@@ -4257,7 +4546,7 @@
           <a:bodyPr wrap="square" rtlCol="0" anchor="ctr"/>
           <a:lstStyle/>
           <a:p>
-            <a:pPr indent="0" marL="0">
+            <a:pPr marL="0" indent="0">
               <a:buNone/>
             </a:pPr>
             <a:r>
@@ -4269,7 +4558,7 @@
                 <a:ea typeface="Cambria" pitchFamily="34" charset="-122"/>
                 <a:cs typeface="Cambria" pitchFamily="34" charset="-120"/>
               </a:rPr>
-              <a:t>What the Data Shows</a:t>
+              <a:t>The Business Problem</a:t>
             </a:r>
             <a:endParaRPr lang="en-US" sz="1800" dirty="0"/>
           </a:p>
@@ -4277,13 +4566,13 @@
       </p:sp>
       <p:sp>
         <p:nvSpPr>
-          <p:cNvPr id="14" name="Text 9"/>
-          <p:cNvSpPr/>
-          <p:nvPr/>
-        </p:nvSpPr>
-        <p:spPr>
-          <a:xfrm>
-            <a:off x="1645920" y="4160520"/>
+          <p:cNvPr id="7" name="Text 4"/>
+          <p:cNvSpPr/>
+          <p:nvPr/>
+        </p:nvSpPr>
+        <p:spPr>
+          <a:xfrm>
+            <a:off x="1645920" y="1874520"/>
             <a:ext cx="7315200" cy="365760"/>
           </a:xfrm>
           <a:prstGeom prst="rect">
@@ -4296,7 +4585,7 @@
           <a:bodyPr wrap="square" rtlCol="0" anchor="ctr"/>
           <a:lstStyle/>
           <a:p>
-            <a:pPr indent="0" marL="0">
+            <a:pPr marL="0" indent="0">
               <a:buNone/>
             </a:pPr>
             <a:r>
@@ -4308,7 +4597,7 @@
                 <a:ea typeface="Calibri" pitchFamily="34" charset="-122"/>
                 <a:cs typeface="Calibri" pitchFamily="34" charset="-120"/>
               </a:rPr>
-              <a:t>Revenue, order volume, and category performance</a:t>
+              <a:t>Why raw order data was hard to trust and reuse</a:t>
             </a:r>
             <a:endParaRPr lang="en-US" sz="1250" dirty="0"/>
           </a:p>
@@ -4316,13 +4605,13 @@
       </p:sp>
       <p:sp>
         <p:nvSpPr>
-          <p:cNvPr id="15" name="Shape 10"/>
-          <p:cNvSpPr/>
-          <p:nvPr/>
-        </p:nvSpPr>
-        <p:spPr>
-          <a:xfrm>
-            <a:off x="640080" y="4983480"/>
+          <p:cNvPr id="8" name="Shape 5"/>
+          <p:cNvSpPr/>
+          <p:nvPr/>
+        </p:nvSpPr>
+        <p:spPr>
+          <a:xfrm>
+            <a:off x="640080" y="2697480"/>
             <a:ext cx="685800" cy="685800"/>
           </a:xfrm>
           <a:prstGeom prst="ellipse">
@@ -4336,7 +4625,7 @@
       </p:sp>
       <p:pic>
         <p:nvPicPr>
-          <p:cNvPr id="16" name="Image 3" descr="icon_check_white.png">    </p:cNvPr>
+          <p:cNvPr id="9" name="Image 1" descr="icon_diagram_white.png"/>
           <p:cNvPicPr>
             <a:picLocks noChangeAspect="1"/>
           </p:cNvPicPr>
@@ -4350,7 +4639,7 @@
         </p:blipFill>
         <p:spPr>
           <a:xfrm>
-            <a:off x="809244" y="5152644"/>
+            <a:off x="809244" y="2866644"/>
             <a:ext cx="347472" cy="347472"/>
           </a:xfrm>
           <a:prstGeom prst="rect">
@@ -4360,13 +4649,13 @@
       </p:pic>
       <p:sp>
         <p:nvSpPr>
-          <p:cNvPr id="17" name="Text 11"/>
-          <p:cNvSpPr/>
-          <p:nvPr/>
-        </p:nvSpPr>
-        <p:spPr>
-          <a:xfrm>
-            <a:off x="1645920" y="4956048"/>
+          <p:cNvPr id="10" name="Text 6"/>
+          <p:cNvSpPr/>
+          <p:nvPr/>
+        </p:nvSpPr>
+        <p:spPr>
+          <a:xfrm>
+            <a:off x="1645920" y="2670048"/>
             <a:ext cx="5486400" cy="365760"/>
           </a:xfrm>
           <a:prstGeom prst="rect">
@@ -4379,7 +4668,7 @@
           <a:bodyPr wrap="square" rtlCol="0" anchor="ctr"/>
           <a:lstStyle/>
           <a:p>
-            <a:pPr indent="0" marL="0">
+            <a:pPr marL="0" indent="0">
               <a:buNone/>
             </a:pPr>
             <a:r>
@@ -4391,7 +4680,7 @@
                 <a:ea typeface="Cambria" pitchFamily="34" charset="-122"/>
                 <a:cs typeface="Cambria" pitchFamily="34" charset="-120"/>
               </a:rPr>
-              <a:t>Quality and Next Steps</a:t>
+              <a:t>The Pipeline We Built</a:t>
             </a:r>
             <a:endParaRPr lang="en-US" sz="1800" dirty="0"/>
           </a:p>
@@ -4399,13 +4688,13 @@
       </p:sp>
       <p:sp>
         <p:nvSpPr>
-          <p:cNvPr id="18" name="Text 12"/>
-          <p:cNvSpPr/>
-          <p:nvPr/>
-        </p:nvSpPr>
-        <p:spPr>
-          <a:xfrm>
-            <a:off x="1645920" y="5303520"/>
+          <p:cNvPr id="11" name="Text 7"/>
+          <p:cNvSpPr/>
+          <p:nvPr/>
+        </p:nvSpPr>
+        <p:spPr>
+          <a:xfrm>
+            <a:off x="1645920" y="3017520"/>
             <a:ext cx="7315200" cy="365760"/>
           </a:xfrm>
           <a:prstGeom prst="rect">
@@ -4418,7 +4707,7 @@
           <a:bodyPr wrap="square" rtlCol="0" anchor="ctr"/>
           <a:lstStyle/>
           <a:p>
-            <a:pPr indent="0" marL="0">
+            <a:pPr marL="0" indent="0">
               <a:buNone/>
             </a:pPr>
             <a:r>
@@ -4430,7 +4719,7 @@
                 <a:ea typeface="Calibri" pitchFamily="34" charset="-122"/>
                 <a:cs typeface="Calibri" pitchFamily="34" charset="-120"/>
               </a:rPr>
-              <a:t>How we validated results and what comes next</a:t>
+              <a:t>Staging, prep, and mart layers in dbt</a:t>
             </a:r>
             <a:endParaRPr lang="en-US" sz="1250" dirty="0"/>
           </a:p>
@@ -4438,30 +4727,113 @@
       </p:sp>
       <p:sp>
         <p:nvSpPr>
-          <p:cNvPr id="19" name="Text 13"/>
-          <p:cNvSpPr/>
-          <p:nvPr/>
-        </p:nvSpPr>
-        <p:spPr>
-          <a:xfrm>
-            <a:off x="457200" y="6537960"/>
-            <a:ext cx="5486400" cy="274320"/>
-          </a:xfrm>
-          <a:prstGeom prst="rect">
-            <a:avLst/>
-          </a:prstGeom>
-          <a:noFill/>
-          <a:ln/>
-        </p:spPr>
-        <p:txBody>
-          <a:bodyPr wrap="square" rtlCol="0" anchor="ctr"/>
-          <a:lstStyle/>
-          <a:p>
-            <a:pPr indent="0" marL="0">
-              <a:buNone/>
-            </a:pPr>
-            <a:r>
-              <a:rPr lang="en-US" sz="900" dirty="0">
+          <p:cNvPr id="12" name="Shape 8"/>
+          <p:cNvSpPr/>
+          <p:nvPr/>
+        </p:nvSpPr>
+        <p:spPr>
+          <a:xfrm>
+            <a:off x="640080" y="3840480"/>
+            <a:ext cx="685800" cy="685800"/>
+          </a:xfrm>
+          <a:prstGeom prst="ellipse">
+            <a:avLst/>
+          </a:prstGeom>
+          <a:solidFill>
+            <a:srgbClr val="065A82"/>
+          </a:solidFill>
+          <a:ln/>
+        </p:spPr>
+      </p:sp>
+      <p:pic>
+        <p:nvPicPr>
+          <p:cNvPr id="13" name="Image 2" descr="icon_chart_white.png"/>
+          <p:cNvPicPr>
+            <a:picLocks noChangeAspect="1"/>
+          </p:cNvPicPr>
+          <p:nvPr/>
+        </p:nvPicPr>
+        <p:blipFill>
+          <a:blip r:embed="rId5"/>
+          <a:stretch>
+            <a:fillRect/>
+          </a:stretch>
+        </p:blipFill>
+        <p:spPr>
+          <a:xfrm>
+            <a:off x="809244" y="4009644"/>
+            <a:ext cx="347472" cy="347472"/>
+          </a:xfrm>
+          <a:prstGeom prst="rect">
+            <a:avLst/>
+          </a:prstGeom>
+        </p:spPr>
+      </p:pic>
+      <p:sp>
+        <p:nvSpPr>
+          <p:cNvPr id="14" name="Text 9"/>
+          <p:cNvSpPr/>
+          <p:nvPr/>
+        </p:nvSpPr>
+        <p:spPr>
+          <a:xfrm>
+            <a:off x="1645920" y="3813048"/>
+            <a:ext cx="5486400" cy="365760"/>
+          </a:xfrm>
+          <a:prstGeom prst="rect">
+            <a:avLst/>
+          </a:prstGeom>
+          <a:noFill/>
+          <a:ln/>
+        </p:spPr>
+        <p:txBody>
+          <a:bodyPr wrap="square" rtlCol="0" anchor="ctr"/>
+          <a:lstStyle/>
+          <a:p>
+            <a:pPr marL="0" indent="0">
+              <a:buNone/>
+            </a:pPr>
+            <a:r>
+              <a:rPr lang="en-US" sz="1800" b="1" dirty="0">
+                <a:solidFill>
+                  <a:srgbClr val="263238"/>
+                </a:solidFill>
+                <a:latin typeface="Cambria" pitchFamily="34" charset="0"/>
+                <a:ea typeface="Cambria" pitchFamily="34" charset="-122"/>
+                <a:cs typeface="Cambria" pitchFamily="34" charset="-120"/>
+              </a:rPr>
+              <a:t>What the Data Shows</a:t>
+            </a:r>
+            <a:endParaRPr lang="en-US" sz="1800" dirty="0"/>
+          </a:p>
+        </p:txBody>
+      </p:sp>
+      <p:sp>
+        <p:nvSpPr>
+          <p:cNvPr id="15" name="Text 10"/>
+          <p:cNvSpPr/>
+          <p:nvPr/>
+        </p:nvSpPr>
+        <p:spPr>
+          <a:xfrm>
+            <a:off x="1645920" y="4160520"/>
+            <a:ext cx="7315200" cy="365760"/>
+          </a:xfrm>
+          <a:prstGeom prst="rect">
+            <a:avLst/>
+          </a:prstGeom>
+          <a:noFill/>
+          <a:ln/>
+        </p:spPr>
+        <p:txBody>
+          <a:bodyPr wrap="square" rtlCol="0" anchor="ctr"/>
+          <a:lstStyle/>
+          <a:p>
+            <a:pPr marL="0" indent="0">
+              <a:buNone/>
+            </a:pPr>
+            <a:r>
+              <a:rPr lang="en-US" sz="1250" dirty="0">
                 <a:solidFill>
                   <a:srgbClr val="607080"/>
                 </a:solidFill>
@@ -4469,6 +4841,167 @@
                 <a:ea typeface="Calibri" pitchFamily="34" charset="-122"/>
                 <a:cs typeface="Calibri" pitchFamily="34" charset="-120"/>
               </a:rPr>
+              <a:t>Revenue, order volume, and category performance</a:t>
+            </a:r>
+            <a:endParaRPr lang="en-US" sz="1250" dirty="0"/>
+          </a:p>
+        </p:txBody>
+      </p:sp>
+      <p:sp>
+        <p:nvSpPr>
+          <p:cNvPr id="16" name="Shape 11"/>
+          <p:cNvSpPr/>
+          <p:nvPr/>
+        </p:nvSpPr>
+        <p:spPr>
+          <a:xfrm>
+            <a:off x="640080" y="4983480"/>
+            <a:ext cx="685800" cy="685800"/>
+          </a:xfrm>
+          <a:prstGeom prst="ellipse">
+            <a:avLst/>
+          </a:prstGeom>
+          <a:solidFill>
+            <a:srgbClr val="065A82"/>
+          </a:solidFill>
+          <a:ln/>
+        </p:spPr>
+      </p:sp>
+      <p:pic>
+        <p:nvPicPr>
+          <p:cNvPr id="17" name="Image 3" descr="icon_check_white.png"/>
+          <p:cNvPicPr>
+            <a:picLocks noChangeAspect="1"/>
+          </p:cNvPicPr>
+          <p:nvPr/>
+        </p:nvPicPr>
+        <p:blipFill>
+          <a:blip r:embed="rId6"/>
+          <a:stretch>
+            <a:fillRect/>
+          </a:stretch>
+        </p:blipFill>
+        <p:spPr>
+          <a:xfrm>
+            <a:off x="809244" y="5152644"/>
+            <a:ext cx="347472" cy="347472"/>
+          </a:xfrm>
+          <a:prstGeom prst="rect">
+            <a:avLst/>
+          </a:prstGeom>
+        </p:spPr>
+      </p:pic>
+      <p:sp>
+        <p:nvSpPr>
+          <p:cNvPr id="18" name="Text 12"/>
+          <p:cNvSpPr/>
+          <p:nvPr/>
+        </p:nvSpPr>
+        <p:spPr>
+          <a:xfrm>
+            <a:off x="1645920" y="4956048"/>
+            <a:ext cx="5486400" cy="365760"/>
+          </a:xfrm>
+          <a:prstGeom prst="rect">
+            <a:avLst/>
+          </a:prstGeom>
+          <a:noFill/>
+          <a:ln/>
+        </p:spPr>
+        <p:txBody>
+          <a:bodyPr wrap="square" rtlCol="0" anchor="ctr"/>
+          <a:lstStyle/>
+          <a:p>
+            <a:pPr marL="0" indent="0">
+              <a:buNone/>
+            </a:pPr>
+            <a:r>
+              <a:rPr lang="en-US" sz="1800" b="1" dirty="0">
+                <a:solidFill>
+                  <a:srgbClr val="263238"/>
+                </a:solidFill>
+                <a:latin typeface="Cambria" pitchFamily="34" charset="0"/>
+                <a:ea typeface="Cambria" pitchFamily="34" charset="-122"/>
+                <a:cs typeface="Cambria" pitchFamily="34" charset="-120"/>
+              </a:rPr>
+              <a:t>Quality and Next Steps</a:t>
+            </a:r>
+            <a:endParaRPr lang="en-US" sz="1800" dirty="0"/>
+          </a:p>
+        </p:txBody>
+      </p:sp>
+      <p:sp>
+        <p:nvSpPr>
+          <p:cNvPr id="19" name="Text 13"/>
+          <p:cNvSpPr/>
+          <p:nvPr/>
+        </p:nvSpPr>
+        <p:spPr>
+          <a:xfrm>
+            <a:off x="1645920" y="5303520"/>
+            <a:ext cx="7315200" cy="365760"/>
+          </a:xfrm>
+          <a:prstGeom prst="rect">
+            <a:avLst/>
+          </a:prstGeom>
+          <a:noFill/>
+          <a:ln/>
+        </p:spPr>
+        <p:txBody>
+          <a:bodyPr wrap="square" rtlCol="0" anchor="ctr"/>
+          <a:lstStyle/>
+          <a:p>
+            <a:pPr marL="0" indent="0">
+              <a:buNone/>
+            </a:pPr>
+            <a:r>
+              <a:rPr lang="en-US" sz="1250" dirty="0">
+                <a:solidFill>
+                  <a:srgbClr val="607080"/>
+                </a:solidFill>
+                <a:latin typeface="Calibri" pitchFamily="34" charset="0"/>
+                <a:ea typeface="Calibri" pitchFamily="34" charset="-122"/>
+                <a:cs typeface="Calibri" pitchFamily="34" charset="-120"/>
+              </a:rPr>
+              <a:t>How we validated results and what comes next</a:t>
+            </a:r>
+            <a:endParaRPr lang="en-US" sz="1250" dirty="0"/>
+          </a:p>
+        </p:txBody>
+      </p:sp>
+      <p:sp>
+        <p:nvSpPr>
+          <p:cNvPr id="20" name="Text 14"/>
+          <p:cNvSpPr/>
+          <p:nvPr/>
+        </p:nvSpPr>
+        <p:spPr>
+          <a:xfrm>
+            <a:off x="457200" y="6537960"/>
+            <a:ext cx="5486400" cy="274320"/>
+          </a:xfrm>
+          <a:prstGeom prst="rect">
+            <a:avLst/>
+          </a:prstGeom>
+          <a:noFill/>
+          <a:ln/>
+        </p:spPr>
+        <p:txBody>
+          <a:bodyPr wrap="square" rtlCol="0" anchor="ctr"/>
+          <a:lstStyle/>
+          <a:p>
+            <a:pPr marL="0" indent="0">
+              <a:buNone/>
+            </a:pPr>
+            <a:r>
+              <a:rPr lang="en-US" sz="900" dirty="0">
+                <a:solidFill>
+                  <a:srgbClr val="607080"/>
+                </a:solidFill>
+                <a:latin typeface="Calibri" pitchFamily="34" charset="0"/>
+                <a:ea typeface="Calibri" pitchFamily="34" charset="-122"/>
+                <a:cs typeface="Calibri" pitchFamily="34" charset="-120"/>
+              </a:rPr>
               <a:t>Northwind Sales Insights</a:t>
             </a:r>
             <a:endParaRPr lang="en-US" sz="900" dirty="0"/>
@@ -4477,7 +5010,7 @@
       </p:sp>
       <p:sp>
         <p:nvSpPr>
-          <p:cNvPr id="20" name="Text 14"/>
+          <p:cNvPr id="21" name="Text 15"/>
           <p:cNvSpPr/>
           <p:nvPr/>
         </p:nvSpPr>
@@ -4496,7 +5029,7 @@
           <a:bodyPr wrap="square" rtlCol="0" anchor="ctr"/>
           <a:lstStyle/>
           <a:p>
-            <a:pPr algn="r" indent="0" marL="0">
+            <a:pPr marL="0" indent="0" algn="r">
               <a:buNone/>
             </a:pPr>
             <a:r>
@@ -4530,6 +5063,7 @@
         <a:solidFill>
           <a:srgbClr val="F7FAFC"/>
         </a:solidFill>
+        <a:effectLst/>
       </p:bgPr>
     </p:bg>
     <p:spTree>
@@ -4567,7 +5101,7 @@
           <a:bodyPr wrap="square" rtlCol="0" anchor="ctr"/>
           <a:lstStyle/>
           <a:p>
-            <a:pPr indent="0" marL="0">
+            <a:pPr marL="0" indent="0">
               <a:buNone/>
             </a:pPr>
             <a:r>
@@ -4587,7 +5121,27 @@
       </p:sp>
       <p:sp>
         <p:nvSpPr>
-          <p:cNvPr id="3" name="Text 1"/>
+          <p:cNvPr id="3" name="Shape 1"/>
+          <p:cNvSpPr/>
+          <p:nvPr/>
+        </p:nvSpPr>
+        <p:spPr>
+          <a:xfrm>
+            <a:off x="566928" y="1024128"/>
+            <a:ext cx="502920" cy="64008"/>
+          </a:xfrm>
+          <a:prstGeom prst="rect">
+            <a:avLst/>
+          </a:prstGeom>
+          <a:solidFill>
+            <a:srgbClr val="1C7293"/>
+          </a:solidFill>
+          <a:ln/>
+        </p:spPr>
+      </p:sp>
+      <p:sp>
+        <p:nvSpPr>
+          <p:cNvPr id="4" name="Text 2"/>
           <p:cNvSpPr/>
           <p:nvPr/>
         </p:nvSpPr>
@@ -4606,7 +5160,7 @@
           <a:bodyPr wrap="square" rtlCol="0" anchor="ctr"/>
           <a:lstStyle/>
           <a:p>
-            <a:pPr indent="0" marL="0">
+            <a:pPr marL="0" indent="0">
               <a:buNone/>
             </a:pPr>
             <a:r>
@@ -4626,7 +5180,7 @@
       </p:sp>
       <p:sp>
         <p:nvSpPr>
-          <p:cNvPr id="4" name="Shape 2"/>
+          <p:cNvPr id="5" name="Shape 3"/>
           <p:cNvSpPr/>
           <p:nvPr/>
         </p:nvSpPr>
@@ -4650,7 +5204,7 @@
             <a:prstDash val="solid"/>
           </a:ln>
           <a:effectLst>
-            <a:outerShdw sx="100000" sy="100000" kx="0" ky="0" algn="bl" rotWithShape="0" blurRad="101600" dist="38100" dir="5400000">
+            <a:outerShdw blurRad="101600" dist="38100" dir="5400000" algn="bl" rotWithShape="0">
               <a:srgbClr val="000000">
                 <a:alpha val="12000"/>
               </a:srgbClr>
@@ -4660,7 +5214,7 @@
       </p:sp>
       <p:sp>
         <p:nvSpPr>
-          <p:cNvPr id="5" name="Shape 3"/>
+          <p:cNvPr id="6" name="Shape 4"/>
           <p:cNvSpPr/>
           <p:nvPr/>
         </p:nvSpPr>
@@ -4680,14 +5234,14 @@
       </p:sp>
       <p:pic>
         <p:nvPicPr>
-          <p:cNvPr id="6" name="Image 0" descr="icon_boxes_white.png">    </p:cNvPr>
+          <p:cNvPr id="7" name="Image 0" descr="icon_boxes_white.png"/>
           <p:cNvPicPr>
             <a:picLocks noChangeAspect="1"/>
           </p:cNvPicPr>
           <p:nvPr/>
         </p:nvPicPr>
         <p:blipFill>
-          <a:blip r:embed="rId1"/>
+          <a:blip r:embed="rId3"/>
           <a:stretch>
             <a:fillRect/>
           </a:stretch>
@@ -4704,7 +5258,7 @@
       </p:pic>
       <p:sp>
         <p:nvSpPr>
-          <p:cNvPr id="7" name="Text 4"/>
+          <p:cNvPr id="8" name="Text 5"/>
           <p:cNvSpPr/>
           <p:nvPr/>
         </p:nvSpPr>
@@ -4723,7 +5277,7 @@
           <a:bodyPr wrap="square" rtlCol="0" anchor="ctr"/>
           <a:lstStyle/>
           <a:p>
-            <a:pPr indent="0" marL="0">
+            <a:pPr marL="0" indent="0">
               <a:buNone/>
             </a:pPr>
             <a:r>
@@ -4743,7 +5297,7 @@
       </p:sp>
       <p:sp>
         <p:nvSpPr>
-          <p:cNvPr id="8" name="Text 5"/>
+          <p:cNvPr id="9" name="Text 6"/>
           <p:cNvSpPr/>
           <p:nvPr/>
         </p:nvSpPr>
@@ -4762,7 +5316,7 @@
           <a:bodyPr wrap="square" rtlCol="0" anchor="t"/>
           <a:lstStyle/>
           <a:p>
-            <a:pPr indent="0" marL="0">
+            <a:pPr marL="0" indent="0">
               <a:buNone/>
             </a:pPr>
             <a:r>
@@ -4782,7 +5336,7 @@
       </p:sp>
       <p:sp>
         <p:nvSpPr>
-          <p:cNvPr id="9" name="Shape 6"/>
+          <p:cNvPr id="10" name="Shape 7"/>
           <p:cNvSpPr/>
           <p:nvPr/>
         </p:nvSpPr>
@@ -4806,7 +5360,7 @@
             <a:prstDash val="solid"/>
           </a:ln>
           <a:effectLst>
-            <a:outerShdw sx="100000" sy="100000" kx="0" ky="0" algn="bl" rotWithShape="0" blurRad="101600" dist="38100" dir="5400000">
+            <a:outerShdw blurRad="101600" dist="38100" dir="5400000" algn="bl" rotWithShape="0">
               <a:srgbClr val="000000">
                 <a:alpha val="12000"/>
               </a:srgbClr>
@@ -4816,7 +5370,7 @@
       </p:sp>
       <p:sp>
         <p:nvSpPr>
-          <p:cNvPr id="10" name="Shape 7"/>
+          <p:cNvPr id="11" name="Shape 8"/>
           <p:cNvSpPr/>
           <p:nvPr/>
         </p:nvSpPr>
@@ -4836,14 +5390,14 @@
       </p:sp>
       <p:pic>
         <p:nvPicPr>
-          <p:cNvPr id="11" name="Image 1" descr="icon_layers_white.png">    </p:cNvPr>
+          <p:cNvPr id="12" name="Image 1" descr="icon_layers_white.png"/>
           <p:cNvPicPr>
             <a:picLocks noChangeAspect="1"/>
           </p:cNvPicPr>
           <p:nvPr/>
         </p:nvPicPr>
         <p:blipFill>
-          <a:blip r:embed="rId2"/>
+          <a:blip r:embed="rId4"/>
           <a:stretch>
             <a:fillRect/>
           </a:stretch>
@@ -4860,7 +5414,7 @@
       </p:pic>
       <p:sp>
         <p:nvSpPr>
-          <p:cNvPr id="12" name="Text 8"/>
+          <p:cNvPr id="13" name="Text 9"/>
           <p:cNvSpPr/>
           <p:nvPr/>
         </p:nvSpPr>
@@ -4879,7 +5433,7 @@
           <a:bodyPr wrap="square" rtlCol="0" anchor="ctr"/>
           <a:lstStyle/>
           <a:p>
-            <a:pPr indent="0" marL="0">
+            <a:pPr marL="0" indent="0">
               <a:buNone/>
             </a:pPr>
             <a:r>
@@ -4899,7 +5453,7 @@
       </p:sp>
       <p:sp>
         <p:nvSpPr>
-          <p:cNvPr id="13" name="Text 9"/>
+          <p:cNvPr id="14" name="Text 10"/>
           <p:cNvSpPr/>
           <p:nvPr/>
         </p:nvSpPr>
@@ -4918,7 +5472,7 @@
           <a:bodyPr wrap="square" rtlCol="0" anchor="t"/>
           <a:lstStyle/>
           <a:p>
-            <a:pPr indent="0" marL="0">
+            <a:pPr marL="0" indent="0">
               <a:buNone/>
             </a:pPr>
             <a:r>
@@ -4938,7 +5492,7 @@
       </p:sp>
       <p:sp>
         <p:nvSpPr>
-          <p:cNvPr id="14" name="Shape 10"/>
+          <p:cNvPr id="15" name="Shape 11"/>
           <p:cNvSpPr/>
           <p:nvPr/>
         </p:nvSpPr>
@@ -4962,7 +5516,7 @@
             <a:prstDash val="solid"/>
           </a:ln>
           <a:effectLst>
-            <a:outerShdw sx="100000" sy="100000" kx="0" ky="0" algn="bl" rotWithShape="0" blurRad="101600" dist="38100" dir="5400000">
+            <a:outerShdw blurRad="101600" dist="38100" dir="5400000" algn="bl" rotWithShape="0">
               <a:srgbClr val="000000">
                 <a:alpha val="12000"/>
               </a:srgbClr>
@@ -4972,7 +5526,7 @@
       </p:sp>
       <p:sp>
         <p:nvSpPr>
-          <p:cNvPr id="15" name="Shape 11"/>
+          <p:cNvPr id="16" name="Shape 12"/>
           <p:cNvSpPr/>
           <p:nvPr/>
         </p:nvSpPr>
@@ -4992,14 +5546,14 @@
       </p:sp>
       <p:pic>
         <p:nvPicPr>
-          <p:cNvPr id="16" name="Image 2" descr="icon_diagram_white.png">    </p:cNvPr>
+          <p:cNvPr id="17" name="Image 2" descr="icon_diagram_white.png"/>
           <p:cNvPicPr>
             <a:picLocks noChangeAspect="1"/>
           </p:cNvPicPr>
           <p:nvPr/>
         </p:nvPicPr>
         <p:blipFill>
-          <a:blip r:embed="rId3"/>
+          <a:blip r:embed="rId5"/>
           <a:stretch>
             <a:fillRect/>
           </a:stretch>
@@ -5016,7 +5570,7 @@
       </p:pic>
       <p:sp>
         <p:nvSpPr>
-          <p:cNvPr id="17" name="Text 12"/>
+          <p:cNvPr id="18" name="Text 13"/>
           <p:cNvSpPr/>
           <p:nvPr/>
         </p:nvSpPr>
@@ -5035,7 +5589,7 @@
           <a:bodyPr wrap="square" rtlCol="0" anchor="ctr"/>
           <a:lstStyle/>
           <a:p>
-            <a:pPr indent="0" marL="0">
+            <a:pPr marL="0" indent="0">
               <a:buNone/>
             </a:pPr>
             <a:r>
@@ -5055,7 +5609,7 @@
       </p:sp>
       <p:sp>
         <p:nvSpPr>
-          <p:cNvPr id="18" name="Text 13"/>
+          <p:cNvPr id="19" name="Text 14"/>
           <p:cNvSpPr/>
           <p:nvPr/>
         </p:nvSpPr>
@@ -5074,7 +5628,7 @@
           <a:bodyPr wrap="square" rtlCol="0" anchor="t"/>
           <a:lstStyle/>
           <a:p>
-            <a:pPr indent="0" marL="0">
+            <a:pPr marL="0" indent="0">
               <a:buNone/>
             </a:pPr>
             <a:r>
@@ -5094,7 +5648,7 @@
       </p:sp>
       <p:sp>
         <p:nvSpPr>
-          <p:cNvPr id="19" name="Text 14"/>
+          <p:cNvPr id="20" name="Text 15"/>
           <p:cNvSpPr/>
           <p:nvPr/>
         </p:nvSpPr>
@@ -5113,7 +5667,7 @@
           <a:bodyPr wrap="square" rtlCol="0" anchor="ctr"/>
           <a:lstStyle/>
           <a:p>
-            <a:pPr indent="0" marL="0">
+            <a:pPr marL="0" indent="0">
               <a:buNone/>
             </a:pPr>
             <a:r>
@@ -5133,7 +5687,7 @@
       </p:sp>
       <p:sp>
         <p:nvSpPr>
-          <p:cNvPr id="20" name="Text 15"/>
+          <p:cNvPr id="21" name="Text 16"/>
           <p:cNvSpPr/>
           <p:nvPr/>
         </p:nvSpPr>
@@ -5152,7 +5706,7 @@
           <a:bodyPr wrap="square" rtlCol="0" anchor="ctr"/>
           <a:lstStyle/>
           <a:p>
-            <a:pPr algn="r" indent="0" marL="0">
+            <a:pPr marL="0" indent="0" algn="r">
               <a:buNone/>
             </a:pPr>
             <a:r>
@@ -5186,6 +5740,7 @@
         <a:solidFill>
           <a:srgbClr val="FFFFFF"/>
         </a:solidFill>
+        <a:effectLst/>
       </p:bgPr>
     </p:bg>
     <p:spTree>
@@ -5223,7 +5778,7 @@
           <a:bodyPr wrap="square" rtlCol="0" anchor="ctr"/>
           <a:lstStyle/>
           <a:p>
-            <a:pPr indent="0" marL="0">
+            <a:pPr marL="0" indent="0">
               <a:buNone/>
             </a:pPr>
             <a:r>
@@ -5243,7 +5798,27 @@
       </p:sp>
       <p:sp>
         <p:nvSpPr>
-          <p:cNvPr id="3" name="Text 1"/>
+          <p:cNvPr id="3" name="Shape 1"/>
+          <p:cNvSpPr/>
+          <p:nvPr/>
+        </p:nvSpPr>
+        <p:spPr>
+          <a:xfrm>
+            <a:off x="566928" y="1024128"/>
+            <a:ext cx="502920" cy="64008"/>
+          </a:xfrm>
+          <a:prstGeom prst="rect">
+            <a:avLst/>
+          </a:prstGeom>
+          <a:solidFill>
+            <a:srgbClr val="1C7293"/>
+          </a:solidFill>
+          <a:ln/>
+        </p:spPr>
+      </p:sp>
+      <p:sp>
+        <p:nvSpPr>
+          <p:cNvPr id="4" name="Text 2"/>
           <p:cNvSpPr/>
           <p:nvPr/>
         </p:nvSpPr>
@@ -5262,7 +5837,7 @@
           <a:bodyPr wrap="square" rtlCol="0" anchor="ctr"/>
           <a:lstStyle/>
           <a:p>
-            <a:pPr indent="0" marL="0">
+            <a:pPr marL="0" indent="0">
               <a:buNone/>
             </a:pPr>
             <a:r>
@@ -5282,7 +5857,7 @@
       </p:sp>
       <p:sp>
         <p:nvSpPr>
-          <p:cNvPr id="4" name="Shape 2"/>
+          <p:cNvPr id="5" name="Shape 3"/>
           <p:cNvSpPr/>
           <p:nvPr/>
         </p:nvSpPr>
@@ -5304,7 +5879,7 @@
       </p:sp>
       <p:sp>
         <p:nvSpPr>
-          <p:cNvPr id="5" name="Shape 3"/>
+          <p:cNvPr id="6" name="Shape 4"/>
           <p:cNvSpPr/>
           <p:nvPr/>
         </p:nvSpPr>
@@ -5324,445 +5899,7 @@
       </p:sp>
       <p:pic>
         <p:nvPicPr>
-          <p:cNvPr id="6" name="Image 0" descr="icon_database_white.png">    </p:cNvPr>
-          <p:cNvPicPr>
-            <a:picLocks noChangeAspect="1"/>
-          </p:cNvPicPr>
-          <p:nvPr/>
-        </p:nvPicPr>
-        <p:blipFill>
-          <a:blip r:embed="rId1"/>
-          <a:stretch>
-            <a:fillRect/>
-          </a:stretch>
-        </p:blipFill>
-        <p:spPr>
-          <a:xfrm>
-            <a:off x="2084832" y="2359152"/>
-            <a:ext cx="493776" cy="493776"/>
-          </a:xfrm>
-          <a:prstGeom prst="rect">
-            <a:avLst/>
-          </a:prstGeom>
-        </p:spPr>
-      </p:pic>
-      <p:sp>
-        <p:nvSpPr>
-          <p:cNvPr id="7" name="Text 4"/>
-          <p:cNvSpPr/>
-          <p:nvPr/>
-        </p:nvSpPr>
-        <p:spPr>
-          <a:xfrm>
-            <a:off x="548640" y="3200400"/>
-            <a:ext cx="3520440" cy="457200"/>
-          </a:xfrm>
-          <a:prstGeom prst="rect">
-            <a:avLst/>
-          </a:prstGeom>
-          <a:noFill/>
-          <a:ln/>
-        </p:spPr>
-        <p:txBody>
-          <a:bodyPr wrap="square" rtlCol="0" anchor="ctr"/>
-          <a:lstStyle/>
-          <a:p>
-            <a:pPr algn="ctr" indent="0" marL="0">
-              <a:buNone/>
-            </a:pPr>
-            <a:r>
-              <a:rPr lang="en-US" sz="2000" b="1" dirty="0">
-                <a:solidFill>
-                  <a:srgbClr val="263238"/>
-                </a:solidFill>
-                <a:latin typeface="Cambria" pitchFamily="34" charset="0"/>
-                <a:ea typeface="Cambria" pitchFamily="34" charset="-122"/>
-                <a:cs typeface="Cambria" pitchFamily="34" charset="-120"/>
-              </a:rPr>
-              <a:t>Staging</a:t>
-            </a:r>
-            <a:endParaRPr lang="en-US" sz="2000" dirty="0"/>
-          </a:p>
-        </p:txBody>
-      </p:sp>
-      <p:sp>
-        <p:nvSpPr>
-          <p:cNvPr id="8" name="Text 5"/>
-          <p:cNvSpPr/>
-          <p:nvPr/>
-        </p:nvSpPr>
-        <p:spPr>
-          <a:xfrm>
-            <a:off x="548640" y="3611880"/>
-            <a:ext cx="3520440" cy="320040"/>
-          </a:xfrm>
-          <a:prstGeom prst="rect">
-            <a:avLst/>
-          </a:prstGeom>
-          <a:noFill/>
-          <a:ln/>
-        </p:spPr>
-        <p:txBody>
-          <a:bodyPr wrap="square" rtlCol="0" anchor="ctr"/>
-          <a:lstStyle/>
-          <a:p>
-            <a:pPr algn="ctr" indent="0" marL="0">
-              <a:buNone/>
-            </a:pPr>
-            <a:r>
-              <a:rPr lang="en-US" sz="1150" b="1" dirty="0">
-                <a:solidFill>
-                  <a:srgbClr val="065A82"/>
-                </a:solidFill>
-                <a:latin typeface="Calibri" pitchFamily="34" charset="0"/>
-                <a:ea typeface="Calibri" pitchFamily="34" charset="-122"/>
-                <a:cs typeface="Calibri" pitchFamily="34" charset="-120"/>
-              </a:rPr>
-              <a:t>4 models</a:t>
-            </a:r>
-            <a:endParaRPr lang="en-US" sz="1150" dirty="0"/>
-          </a:p>
-        </p:txBody>
-      </p:sp>
-      <p:sp>
-        <p:nvSpPr>
-          <p:cNvPr id="9" name="Text 6"/>
-          <p:cNvSpPr/>
-          <p:nvPr/>
-        </p:nvSpPr>
-        <p:spPr>
-          <a:xfrm>
-            <a:off x="822960" y="4069080"/>
-            <a:ext cx="2971800" cy="1554480"/>
-          </a:xfrm>
-          <a:prstGeom prst="rect">
-            <a:avLst/>
-          </a:prstGeom>
-          <a:noFill/>
-          <a:ln/>
-        </p:spPr>
-        <p:txBody>
-          <a:bodyPr wrap="square" rtlCol="0" anchor="t"/>
-          <a:lstStyle/>
-          <a:p>
-            <a:pPr algn="ctr" indent="0" marL="0">
-              <a:buNone/>
-            </a:pPr>
-            <a:r>
-              <a:rPr lang="en-US" sz="1150" dirty="0">
-                <a:solidFill>
-                  <a:srgbClr val="607080"/>
-                </a:solidFill>
-                <a:latin typeface="Calibri" pitchFamily="34" charset="0"/>
-                <a:ea typeface="Calibri" pitchFamily="34" charset="-122"/>
-                <a:cs typeface="Calibri" pitchFamily="34" charset="-120"/>
-              </a:rPr>
-              <a:t>Clean column names, cast dates and numbers, drop unused fields from orders, order details, products, and categories</a:t>
-            </a:r>
-            <a:endParaRPr lang="en-US" sz="1150" dirty="0"/>
-          </a:p>
-        </p:txBody>
-      </p:sp>
-      <p:sp>
-        <p:nvSpPr>
-          <p:cNvPr id="10" name="Text 7"/>
-          <p:cNvSpPr/>
-          <p:nvPr/>
-        </p:nvSpPr>
-        <p:spPr>
-          <a:xfrm>
-            <a:off x="3931920" y="2331720"/>
-            <a:ext cx="548640" cy="548640"/>
-          </a:xfrm>
-          <a:prstGeom prst="rect">
-            <a:avLst/>
-          </a:prstGeom>
-          <a:noFill/>
-          <a:ln/>
-        </p:spPr>
-        <p:txBody>
-          <a:bodyPr wrap="square" rtlCol="0" anchor="ctr"/>
-          <a:lstStyle/>
-          <a:p>
-            <a:pPr algn="ctr" indent="0" marL="0">
-              <a:buNone/>
-            </a:pPr>
-            <a:r>
-              <a:rPr lang="en-US" sz="2600" dirty="0">
-                <a:solidFill>
-                  <a:srgbClr val="607080"/>
-                </a:solidFill>
-              </a:rPr>
-              <a:t>→</a:t>
-            </a:r>
-            <a:endParaRPr lang="en-US" sz="2600" dirty="0"/>
-          </a:p>
-        </p:txBody>
-      </p:sp>
-      <p:sp>
-        <p:nvSpPr>
-          <p:cNvPr id="11" name="Shape 8"/>
-          <p:cNvSpPr/>
-          <p:nvPr/>
-        </p:nvSpPr>
-        <p:spPr>
-          <a:xfrm>
-            <a:off x="4325112" y="1828800"/>
-            <a:ext cx="3520440" cy="3931920"/>
-          </a:xfrm>
-          <a:prstGeom prst="roundRect">
-            <a:avLst>
-              <a:gd name="adj" fmla="val 3117"/>
-            </a:avLst>
-          </a:prstGeom>
-          <a:solidFill>
-            <a:srgbClr val="F7FAFC"/>
-          </a:solidFill>
-          <a:ln/>
-        </p:spPr>
-      </p:sp>
-      <p:sp>
-        <p:nvSpPr>
-          <p:cNvPr id="12" name="Shape 9"/>
-          <p:cNvSpPr/>
-          <p:nvPr/>
-        </p:nvSpPr>
-        <p:spPr>
-          <a:xfrm>
-            <a:off x="5650992" y="2148840"/>
-            <a:ext cx="914400" cy="914400"/>
-          </a:xfrm>
-          <a:prstGeom prst="ellipse">
-            <a:avLst/>
-          </a:prstGeom>
-          <a:solidFill>
-            <a:srgbClr val="1C7293"/>
-          </a:solidFill>
-          <a:ln/>
-        </p:spPr>
-      </p:sp>
-      <p:pic>
-        <p:nvPicPr>
-          <p:cNvPr id="13" name="Image 1" descr="icon_filter_white.png">    </p:cNvPr>
-          <p:cNvPicPr>
-            <a:picLocks noChangeAspect="1"/>
-          </p:cNvPicPr>
-          <p:nvPr/>
-        </p:nvPicPr>
-        <p:blipFill>
-          <a:blip r:embed="rId2"/>
-          <a:stretch>
-            <a:fillRect/>
-          </a:stretch>
-        </p:blipFill>
-        <p:spPr>
-          <a:xfrm>
-            <a:off x="5861304" y="2359152"/>
-            <a:ext cx="493776" cy="493776"/>
-          </a:xfrm>
-          <a:prstGeom prst="rect">
-            <a:avLst/>
-          </a:prstGeom>
-        </p:spPr>
-      </p:pic>
-      <p:sp>
-        <p:nvSpPr>
-          <p:cNvPr id="14" name="Text 10"/>
-          <p:cNvSpPr/>
-          <p:nvPr/>
-        </p:nvSpPr>
-        <p:spPr>
-          <a:xfrm>
-            <a:off x="4325112" y="3200400"/>
-            <a:ext cx="3520440" cy="457200"/>
-          </a:xfrm>
-          <a:prstGeom prst="rect">
-            <a:avLst/>
-          </a:prstGeom>
-          <a:noFill/>
-          <a:ln/>
-        </p:spPr>
-        <p:txBody>
-          <a:bodyPr wrap="square" rtlCol="0" anchor="ctr"/>
-          <a:lstStyle/>
-          <a:p>
-            <a:pPr algn="ctr" indent="0" marL="0">
-              <a:buNone/>
-            </a:pPr>
-            <a:r>
-              <a:rPr lang="en-US" sz="2000" b="1" dirty="0">
-                <a:solidFill>
-                  <a:srgbClr val="263238"/>
-                </a:solidFill>
-                <a:latin typeface="Cambria" pitchFamily="34" charset="0"/>
-                <a:ea typeface="Cambria" pitchFamily="34" charset="-122"/>
-                <a:cs typeface="Cambria" pitchFamily="34" charset="-120"/>
-              </a:rPr>
-              <a:t>Prep</a:t>
-            </a:r>
-            <a:endParaRPr lang="en-US" sz="2000" dirty="0"/>
-          </a:p>
-        </p:txBody>
-      </p:sp>
-      <p:sp>
-        <p:nvSpPr>
-          <p:cNvPr id="15" name="Text 11"/>
-          <p:cNvSpPr/>
-          <p:nvPr/>
-        </p:nvSpPr>
-        <p:spPr>
-          <a:xfrm>
-            <a:off x="4325112" y="3611880"/>
-            <a:ext cx="3520440" cy="320040"/>
-          </a:xfrm>
-          <a:prstGeom prst="rect">
-            <a:avLst/>
-          </a:prstGeom>
-          <a:noFill/>
-          <a:ln/>
-        </p:spPr>
-        <p:txBody>
-          <a:bodyPr wrap="square" rtlCol="0" anchor="ctr"/>
-          <a:lstStyle/>
-          <a:p>
-            <a:pPr algn="ctr" indent="0" marL="0">
-              <a:buNone/>
-            </a:pPr>
-            <a:r>
-              <a:rPr lang="en-US" sz="1150" b="1" dirty="0">
-                <a:solidFill>
-                  <a:srgbClr val="1C7293"/>
-                </a:solidFill>
-                <a:latin typeface="Calibri" pitchFamily="34" charset="0"/>
-                <a:ea typeface="Calibri" pitchFamily="34" charset="-122"/>
-                <a:cs typeface="Calibri" pitchFamily="34" charset="-120"/>
-              </a:rPr>
-              <a:t>1 model</a:t>
-            </a:r>
-            <a:endParaRPr lang="en-US" sz="1150" dirty="0"/>
-          </a:p>
-        </p:txBody>
-      </p:sp>
-      <p:sp>
-        <p:nvSpPr>
-          <p:cNvPr id="16" name="Text 12"/>
-          <p:cNvSpPr/>
-          <p:nvPr/>
-        </p:nvSpPr>
-        <p:spPr>
-          <a:xfrm>
-            <a:off x="4599432" y="4069080"/>
-            <a:ext cx="2971800" cy="1554480"/>
-          </a:xfrm>
-          <a:prstGeom prst="rect">
-            <a:avLst/>
-          </a:prstGeom>
-          <a:noFill/>
-          <a:ln/>
-        </p:spPr>
-        <p:txBody>
-          <a:bodyPr wrap="square" rtlCol="0" anchor="t"/>
-          <a:lstStyle/>
-          <a:p>
-            <a:pPr algn="ctr" indent="0" marL="0">
-              <a:buNone/>
-            </a:pPr>
-            <a:r>
-              <a:rPr lang="en-US" sz="1150" dirty="0">
-                <a:solidFill>
-                  <a:srgbClr val="607080"/>
-                </a:solidFill>
-                <a:latin typeface="Calibri" pitchFamily="34" charset="0"/>
-                <a:ea typeface="Calibri" pitchFamily="34" charset="-122"/>
-                <a:cs typeface="Calibri" pitchFamily="34" charset="-120"/>
-              </a:rPr>
-              <a:t>Join staging tables and calculate revenue as unit price times quantity times one minus discount, plus order year and month</a:t>
-            </a:r>
-            <a:endParaRPr lang="en-US" sz="1150" dirty="0"/>
-          </a:p>
-        </p:txBody>
-      </p:sp>
-      <p:sp>
-        <p:nvSpPr>
-          <p:cNvPr id="17" name="Text 13"/>
-          <p:cNvSpPr/>
-          <p:nvPr/>
-        </p:nvSpPr>
-        <p:spPr>
-          <a:xfrm>
-            <a:off x="7708392" y="2331720"/>
-            <a:ext cx="548640" cy="548640"/>
-          </a:xfrm>
-          <a:prstGeom prst="rect">
-            <a:avLst/>
-          </a:prstGeom>
-          <a:noFill/>
-          <a:ln/>
-        </p:spPr>
-        <p:txBody>
-          <a:bodyPr wrap="square" rtlCol="0" anchor="ctr"/>
-          <a:lstStyle/>
-          <a:p>
-            <a:pPr algn="ctr" indent="0" marL="0">
-              <a:buNone/>
-            </a:pPr>
-            <a:r>
-              <a:rPr lang="en-US" sz="2600" dirty="0">
-                <a:solidFill>
-                  <a:srgbClr val="607080"/>
-                </a:solidFill>
-              </a:rPr>
-              <a:t>→</a:t>
-            </a:r>
-            <a:endParaRPr lang="en-US" sz="2600" dirty="0"/>
-          </a:p>
-        </p:txBody>
-      </p:sp>
-      <p:sp>
-        <p:nvSpPr>
-          <p:cNvPr id="18" name="Shape 14"/>
-          <p:cNvSpPr/>
-          <p:nvPr/>
-        </p:nvSpPr>
-        <p:spPr>
-          <a:xfrm>
-            <a:off x="8101584" y="1828800"/>
-            <a:ext cx="3520440" cy="3931920"/>
-          </a:xfrm>
-          <a:prstGeom prst="roundRect">
-            <a:avLst>
-              <a:gd name="adj" fmla="val 3117"/>
-            </a:avLst>
-          </a:prstGeom>
-          <a:solidFill>
-            <a:srgbClr val="F7FAFC"/>
-          </a:solidFill>
-          <a:ln/>
-        </p:spPr>
-      </p:sp>
-      <p:sp>
-        <p:nvSpPr>
-          <p:cNvPr id="19" name="Shape 15"/>
-          <p:cNvSpPr/>
-          <p:nvPr/>
-        </p:nvSpPr>
-        <p:spPr>
-          <a:xfrm>
-            <a:off x="9427464" y="2148840"/>
-            <a:ext cx="914400" cy="914400"/>
-          </a:xfrm>
-          <a:prstGeom prst="ellipse">
-            <a:avLst/>
-          </a:prstGeom>
-          <a:solidFill>
-            <a:srgbClr val="21295C"/>
-          </a:solidFill>
-          <a:ln/>
-        </p:spPr>
-      </p:sp>
-      <p:pic>
-        <p:nvPicPr>
-          <p:cNvPr id="20" name="Image 2" descr="icon_table_white.png">    </p:cNvPr>
+          <p:cNvPr id="7" name="Image 0" descr="icon_database_white.png"/>
           <p:cNvPicPr>
             <a:picLocks noChangeAspect="1"/>
           </p:cNvPicPr>
@@ -5776,7 +5913,7 @@
         </p:blipFill>
         <p:spPr>
           <a:xfrm>
-            <a:off x="9637776" y="2359152"/>
+            <a:off x="2084832" y="2359152"/>
             <a:ext cx="493776" cy="493776"/>
           </a:xfrm>
           <a:prstGeom prst="rect">
@@ -5786,13 +5923,13 @@
       </p:pic>
       <p:sp>
         <p:nvSpPr>
-          <p:cNvPr id="21" name="Text 16"/>
-          <p:cNvSpPr/>
-          <p:nvPr/>
-        </p:nvSpPr>
-        <p:spPr>
-          <a:xfrm>
-            <a:off x="8101584" y="3200400"/>
+          <p:cNvPr id="8" name="Text 5"/>
+          <p:cNvSpPr/>
+          <p:nvPr/>
+        </p:nvSpPr>
+        <p:spPr>
+          <a:xfrm>
+            <a:off x="548640" y="3200400"/>
             <a:ext cx="3520440" cy="457200"/>
           </a:xfrm>
           <a:prstGeom prst="rect">
@@ -5805,7 +5942,7 @@
           <a:bodyPr wrap="square" rtlCol="0" anchor="ctr"/>
           <a:lstStyle/>
           <a:p>
-            <a:pPr algn="ctr" indent="0" marL="0">
+            <a:pPr marL="0" indent="0" algn="ctr">
               <a:buNone/>
             </a:pPr>
             <a:r>
@@ -5817,7 +5954,7 @@
                 <a:ea typeface="Cambria" pitchFamily="34" charset="-122"/>
                 <a:cs typeface="Cambria" pitchFamily="34" charset="-120"/>
               </a:rPr>
-              <a:t>Mart</a:t>
+              <a:t>Staging</a:t>
             </a:r>
             <a:endParaRPr lang="en-US" sz="2000" dirty="0"/>
           </a:p>
@@ -5825,13 +5962,13 @@
       </p:sp>
       <p:sp>
         <p:nvSpPr>
-          <p:cNvPr id="22" name="Text 17"/>
-          <p:cNvSpPr/>
-          <p:nvPr/>
-        </p:nvSpPr>
-        <p:spPr>
-          <a:xfrm>
-            <a:off x="8101584" y="3611880"/>
+          <p:cNvPr id="9" name="Text 6"/>
+          <p:cNvSpPr/>
+          <p:nvPr/>
+        </p:nvSpPr>
+        <p:spPr>
+          <a:xfrm>
+            <a:off x="548640" y="3611880"/>
             <a:ext cx="3520440" cy="320040"/>
           </a:xfrm>
           <a:prstGeom prst="rect">
@@ -5844,19 +5981,19 @@
           <a:bodyPr wrap="square" rtlCol="0" anchor="ctr"/>
           <a:lstStyle/>
           <a:p>
-            <a:pPr algn="ctr" indent="0" marL="0">
+            <a:pPr marL="0" indent="0" algn="ctr">
               <a:buNone/>
             </a:pPr>
             <a:r>
               <a:rPr lang="en-US" sz="1150" b="1" dirty="0">
                 <a:solidFill>
-                  <a:srgbClr val="21295C"/>
+                  <a:srgbClr val="065A82"/>
                 </a:solidFill>
                 <a:latin typeface="Calibri" pitchFamily="34" charset="0"/>
                 <a:ea typeface="Calibri" pitchFamily="34" charset="-122"/>
                 <a:cs typeface="Calibri" pitchFamily="34" charset="-120"/>
               </a:rPr>
-              <a:t>1 model</a:t>
+              <a:t>4 models</a:t>
             </a:r>
             <a:endParaRPr lang="en-US" sz="1150" dirty="0"/>
           </a:p>
@@ -5864,13 +6001,13 @@
       </p:sp>
       <p:sp>
         <p:nvSpPr>
-          <p:cNvPr id="23" name="Text 18"/>
-          <p:cNvSpPr/>
-          <p:nvPr/>
-        </p:nvSpPr>
-        <p:spPr>
-          <a:xfrm>
-            <a:off x="8375904" y="4069080"/>
+          <p:cNvPr id="10" name="Text 7"/>
+          <p:cNvSpPr/>
+          <p:nvPr/>
+        </p:nvSpPr>
+        <p:spPr>
+          <a:xfrm>
+            <a:off x="822960" y="4069080"/>
             <a:ext cx="2971800" cy="1554480"/>
           </a:xfrm>
           <a:prstGeom prst="rect">
@@ -5883,7 +6020,7 @@
           <a:bodyPr wrap="square" rtlCol="0" anchor="t"/>
           <a:lstStyle/>
           <a:p>
-            <a:pPr algn="ctr" indent="0" marL="0">
+            <a:pPr marL="0" indent="0" algn="ctr">
               <a:buNone/>
             </a:pPr>
             <a:r>
@@ -5895,7 +6032,7 @@
                 <a:ea typeface="Calibri" pitchFamily="34" charset="-122"/>
                 <a:cs typeface="Calibri" pitchFamily="34" charset="-120"/>
               </a:rPr>
-              <a:t>Aggregate revenue, order counts, and average order value by year, month, and category for reporting</a:t>
+              <a:t>Clean column names, cast dates and numbers, drop unused fields from orders, order details, products, and categories</a:t>
             </a:r>
             <a:endParaRPr lang="en-US" sz="1150" dirty="0"/>
           </a:p>
@@ -5903,69 +6040,210 @@
       </p:sp>
       <p:sp>
         <p:nvSpPr>
-          <p:cNvPr id="24" name="Text 19"/>
-          <p:cNvSpPr/>
-          <p:nvPr/>
-        </p:nvSpPr>
-        <p:spPr>
-          <a:xfrm>
-            <a:off x="548640" y="5989320"/>
-            <a:ext cx="10515600" cy="365760"/>
-          </a:xfrm>
-          <a:prstGeom prst="rect">
-            <a:avLst/>
-          </a:prstGeom>
-          <a:noFill/>
-          <a:ln/>
-        </p:spPr>
-        <p:txBody>
-          <a:bodyPr wrap="square" rtlCol="0" anchor="ctr"/>
-          <a:lstStyle/>
-          <a:p>
-            <a:pPr indent="0" marL="0">
-              <a:buNone/>
-            </a:pPr>
-            <a:r>
-              <a:rPr lang="en-US" sz="1200" i="1" dirty="0">
+          <p:cNvPr id="11" name="Text 8"/>
+          <p:cNvSpPr/>
+          <p:nvPr/>
+        </p:nvSpPr>
+        <p:spPr>
+          <a:xfrm>
+            <a:off x="3931920" y="2331720"/>
+            <a:ext cx="548640" cy="548640"/>
+          </a:xfrm>
+          <a:prstGeom prst="rect">
+            <a:avLst/>
+          </a:prstGeom>
+          <a:noFill/>
+          <a:ln/>
+        </p:spPr>
+        <p:txBody>
+          <a:bodyPr wrap="square" rtlCol="0" anchor="ctr"/>
+          <a:lstStyle/>
+          <a:p>
+            <a:pPr marL="0" indent="0" algn="ctr">
+              <a:buNone/>
+            </a:pPr>
+            <a:r>
+              <a:rPr lang="en-US" sz="2600" dirty="0">
                 <a:solidFill>
                   <a:srgbClr val="607080"/>
+                </a:solidFill>
+              </a:rPr>
+              <a:t>→</a:t>
+            </a:r>
+            <a:endParaRPr lang="en-US" sz="2600" dirty="0"/>
+          </a:p>
+        </p:txBody>
+      </p:sp>
+      <p:sp>
+        <p:nvSpPr>
+          <p:cNvPr id="12" name="Shape 9"/>
+          <p:cNvSpPr/>
+          <p:nvPr/>
+        </p:nvSpPr>
+        <p:spPr>
+          <a:xfrm>
+            <a:off x="4325112" y="1828800"/>
+            <a:ext cx="3520440" cy="3931920"/>
+          </a:xfrm>
+          <a:prstGeom prst="roundRect">
+            <a:avLst>
+              <a:gd name="adj" fmla="val 3117"/>
+            </a:avLst>
+          </a:prstGeom>
+          <a:solidFill>
+            <a:srgbClr val="F7FAFC"/>
+          </a:solidFill>
+          <a:ln/>
+        </p:spPr>
+      </p:sp>
+      <p:sp>
+        <p:nvSpPr>
+          <p:cNvPr id="13" name="Shape 10"/>
+          <p:cNvSpPr/>
+          <p:nvPr/>
+        </p:nvSpPr>
+        <p:spPr>
+          <a:xfrm>
+            <a:off x="5650992" y="2148840"/>
+            <a:ext cx="914400" cy="914400"/>
+          </a:xfrm>
+          <a:prstGeom prst="ellipse">
+            <a:avLst/>
+          </a:prstGeom>
+          <a:solidFill>
+            <a:srgbClr val="1C7293"/>
+          </a:solidFill>
+          <a:ln/>
+        </p:spPr>
+      </p:sp>
+      <p:pic>
+        <p:nvPicPr>
+          <p:cNvPr id="14" name="Image 1" descr="icon_filter_white.png"/>
+          <p:cNvPicPr>
+            <a:picLocks noChangeAspect="1"/>
+          </p:cNvPicPr>
+          <p:nvPr/>
+        </p:nvPicPr>
+        <p:blipFill>
+          <a:blip r:embed="rId4"/>
+          <a:stretch>
+            <a:fillRect/>
+          </a:stretch>
+        </p:blipFill>
+        <p:spPr>
+          <a:xfrm>
+            <a:off x="5861304" y="2359152"/>
+            <a:ext cx="493776" cy="493776"/>
+          </a:xfrm>
+          <a:prstGeom prst="rect">
+            <a:avLst/>
+          </a:prstGeom>
+        </p:spPr>
+      </p:pic>
+      <p:sp>
+        <p:nvSpPr>
+          <p:cNvPr id="15" name="Text 11"/>
+          <p:cNvSpPr/>
+          <p:nvPr/>
+        </p:nvSpPr>
+        <p:spPr>
+          <a:xfrm>
+            <a:off x="4325112" y="3200400"/>
+            <a:ext cx="3520440" cy="457200"/>
+          </a:xfrm>
+          <a:prstGeom prst="rect">
+            <a:avLst/>
+          </a:prstGeom>
+          <a:noFill/>
+          <a:ln/>
+        </p:spPr>
+        <p:txBody>
+          <a:bodyPr wrap="square" rtlCol="0" anchor="ctr"/>
+          <a:lstStyle/>
+          <a:p>
+            <a:pPr marL="0" indent="0" algn="ctr">
+              <a:buNone/>
+            </a:pPr>
+            <a:r>
+              <a:rPr lang="en-US" sz="2000" b="1" dirty="0">
+                <a:solidFill>
+                  <a:srgbClr val="263238"/>
+                </a:solidFill>
+                <a:latin typeface="Cambria" pitchFamily="34" charset="0"/>
+                <a:ea typeface="Cambria" pitchFamily="34" charset="-122"/>
+                <a:cs typeface="Cambria" pitchFamily="34" charset="-120"/>
+              </a:rPr>
+              <a:t>Prep</a:t>
+            </a:r>
+            <a:endParaRPr lang="en-US" sz="2000" dirty="0"/>
+          </a:p>
+        </p:txBody>
+      </p:sp>
+      <p:sp>
+        <p:nvSpPr>
+          <p:cNvPr id="16" name="Text 12"/>
+          <p:cNvSpPr/>
+          <p:nvPr/>
+        </p:nvSpPr>
+        <p:spPr>
+          <a:xfrm>
+            <a:off x="4325112" y="3611880"/>
+            <a:ext cx="3520440" cy="320040"/>
+          </a:xfrm>
+          <a:prstGeom prst="rect">
+            <a:avLst/>
+          </a:prstGeom>
+          <a:noFill/>
+          <a:ln/>
+        </p:spPr>
+        <p:txBody>
+          <a:bodyPr wrap="square" rtlCol="0" anchor="ctr"/>
+          <a:lstStyle/>
+          <a:p>
+            <a:pPr marL="0" indent="0" algn="ctr">
+              <a:buNone/>
+            </a:pPr>
+            <a:r>
+              <a:rPr lang="en-US" sz="1150" b="1" dirty="0">
+                <a:solidFill>
+                  <a:srgbClr val="1C7293"/>
                 </a:solidFill>
                 <a:latin typeface="Calibri" pitchFamily="34" charset="0"/>
                 <a:ea typeface="Calibri" pitchFamily="34" charset="-122"/>
                 <a:cs typeface="Calibri" pitchFamily="34" charset="-120"/>
               </a:rPr>
-              <a:t>Validated with automated data tests confirming no missing values in the final mart</a:t>
-            </a:r>
-            <a:endParaRPr lang="en-US" sz="1200" dirty="0"/>
-          </a:p>
-        </p:txBody>
-      </p:sp>
-      <p:sp>
-        <p:nvSpPr>
-          <p:cNvPr id="25" name="Text 20"/>
-          <p:cNvSpPr/>
-          <p:nvPr/>
-        </p:nvSpPr>
-        <p:spPr>
-          <a:xfrm>
-            <a:off x="457200" y="6537960"/>
-            <a:ext cx="5486400" cy="274320"/>
-          </a:xfrm>
-          <a:prstGeom prst="rect">
-            <a:avLst/>
-          </a:prstGeom>
-          <a:noFill/>
-          <a:ln/>
-        </p:spPr>
-        <p:txBody>
-          <a:bodyPr wrap="square" rtlCol="0" anchor="ctr"/>
-          <a:lstStyle/>
-          <a:p>
-            <a:pPr indent="0" marL="0">
-              <a:buNone/>
-            </a:pPr>
-            <a:r>
-              <a:rPr lang="en-US" sz="900" dirty="0">
+              <a:t>1 model</a:t>
+            </a:r>
+            <a:endParaRPr lang="en-US" sz="1150" dirty="0"/>
+          </a:p>
+        </p:txBody>
+      </p:sp>
+      <p:sp>
+        <p:nvSpPr>
+          <p:cNvPr id="17" name="Text 13"/>
+          <p:cNvSpPr/>
+          <p:nvPr/>
+        </p:nvSpPr>
+        <p:spPr>
+          <a:xfrm>
+            <a:off x="4599432" y="4069080"/>
+            <a:ext cx="2971800" cy="1554480"/>
+          </a:xfrm>
+          <a:prstGeom prst="rect">
+            <a:avLst/>
+          </a:prstGeom>
+          <a:noFill/>
+          <a:ln/>
+        </p:spPr>
+        <p:txBody>
+          <a:bodyPr wrap="square" rtlCol="0" anchor="t"/>
+          <a:lstStyle/>
+          <a:p>
+            <a:pPr marL="0" indent="0" algn="ctr">
+              <a:buNone/>
+            </a:pPr>
+            <a:r>
+              <a:rPr lang="en-US" sz="1150" dirty="0">
                 <a:solidFill>
                   <a:srgbClr val="607080"/>
                 </a:solidFill>
@@ -5973,6 +6251,303 @@
                 <a:ea typeface="Calibri" pitchFamily="34" charset="-122"/>
                 <a:cs typeface="Calibri" pitchFamily="34" charset="-120"/>
               </a:rPr>
+              <a:t>Join staging tables and calculate revenue as unit price times quantity times one minus discount, plus order year and month</a:t>
+            </a:r>
+            <a:endParaRPr lang="en-US" sz="1150" dirty="0"/>
+          </a:p>
+        </p:txBody>
+      </p:sp>
+      <p:sp>
+        <p:nvSpPr>
+          <p:cNvPr id="18" name="Text 14"/>
+          <p:cNvSpPr/>
+          <p:nvPr/>
+        </p:nvSpPr>
+        <p:spPr>
+          <a:xfrm>
+            <a:off x="7708392" y="2331720"/>
+            <a:ext cx="548640" cy="548640"/>
+          </a:xfrm>
+          <a:prstGeom prst="rect">
+            <a:avLst/>
+          </a:prstGeom>
+          <a:noFill/>
+          <a:ln/>
+        </p:spPr>
+        <p:txBody>
+          <a:bodyPr wrap="square" rtlCol="0" anchor="ctr"/>
+          <a:lstStyle/>
+          <a:p>
+            <a:pPr marL="0" indent="0" algn="ctr">
+              <a:buNone/>
+            </a:pPr>
+            <a:r>
+              <a:rPr lang="en-US" sz="2600" dirty="0">
+                <a:solidFill>
+                  <a:srgbClr val="607080"/>
+                </a:solidFill>
+              </a:rPr>
+              <a:t>→</a:t>
+            </a:r>
+            <a:endParaRPr lang="en-US" sz="2600" dirty="0"/>
+          </a:p>
+        </p:txBody>
+      </p:sp>
+      <p:sp>
+        <p:nvSpPr>
+          <p:cNvPr id="19" name="Shape 15"/>
+          <p:cNvSpPr/>
+          <p:nvPr/>
+        </p:nvSpPr>
+        <p:spPr>
+          <a:xfrm>
+            <a:off x="8101584" y="1828800"/>
+            <a:ext cx="3520440" cy="3931920"/>
+          </a:xfrm>
+          <a:prstGeom prst="roundRect">
+            <a:avLst>
+              <a:gd name="adj" fmla="val 3117"/>
+            </a:avLst>
+          </a:prstGeom>
+          <a:solidFill>
+            <a:srgbClr val="F7FAFC"/>
+          </a:solidFill>
+          <a:ln/>
+        </p:spPr>
+      </p:sp>
+      <p:sp>
+        <p:nvSpPr>
+          <p:cNvPr id="20" name="Shape 16"/>
+          <p:cNvSpPr/>
+          <p:nvPr/>
+        </p:nvSpPr>
+        <p:spPr>
+          <a:xfrm>
+            <a:off x="9427464" y="2148840"/>
+            <a:ext cx="914400" cy="914400"/>
+          </a:xfrm>
+          <a:prstGeom prst="ellipse">
+            <a:avLst/>
+          </a:prstGeom>
+          <a:solidFill>
+            <a:srgbClr val="21295C"/>
+          </a:solidFill>
+          <a:ln/>
+        </p:spPr>
+      </p:sp>
+      <p:pic>
+        <p:nvPicPr>
+          <p:cNvPr id="21" name="Image 2" descr="icon_table_white.png"/>
+          <p:cNvPicPr>
+            <a:picLocks noChangeAspect="1"/>
+          </p:cNvPicPr>
+          <p:nvPr/>
+        </p:nvPicPr>
+        <p:blipFill>
+          <a:blip r:embed="rId5"/>
+          <a:stretch>
+            <a:fillRect/>
+          </a:stretch>
+        </p:blipFill>
+        <p:spPr>
+          <a:xfrm>
+            <a:off x="9637776" y="2359152"/>
+            <a:ext cx="493776" cy="493776"/>
+          </a:xfrm>
+          <a:prstGeom prst="rect">
+            <a:avLst/>
+          </a:prstGeom>
+        </p:spPr>
+      </p:pic>
+      <p:sp>
+        <p:nvSpPr>
+          <p:cNvPr id="22" name="Text 17"/>
+          <p:cNvSpPr/>
+          <p:nvPr/>
+        </p:nvSpPr>
+        <p:spPr>
+          <a:xfrm>
+            <a:off x="8101584" y="3200400"/>
+            <a:ext cx="3520440" cy="457200"/>
+          </a:xfrm>
+          <a:prstGeom prst="rect">
+            <a:avLst/>
+          </a:prstGeom>
+          <a:noFill/>
+          <a:ln/>
+        </p:spPr>
+        <p:txBody>
+          <a:bodyPr wrap="square" rtlCol="0" anchor="ctr"/>
+          <a:lstStyle/>
+          <a:p>
+            <a:pPr marL="0" indent="0" algn="ctr">
+              <a:buNone/>
+            </a:pPr>
+            <a:r>
+              <a:rPr lang="en-US" sz="2000" b="1" dirty="0">
+                <a:solidFill>
+                  <a:srgbClr val="263238"/>
+                </a:solidFill>
+                <a:latin typeface="Cambria" pitchFamily="34" charset="0"/>
+                <a:ea typeface="Cambria" pitchFamily="34" charset="-122"/>
+                <a:cs typeface="Cambria" pitchFamily="34" charset="-120"/>
+              </a:rPr>
+              <a:t>Mart</a:t>
+            </a:r>
+            <a:endParaRPr lang="en-US" sz="2000" dirty="0"/>
+          </a:p>
+        </p:txBody>
+      </p:sp>
+      <p:sp>
+        <p:nvSpPr>
+          <p:cNvPr id="23" name="Text 18"/>
+          <p:cNvSpPr/>
+          <p:nvPr/>
+        </p:nvSpPr>
+        <p:spPr>
+          <a:xfrm>
+            <a:off x="8101584" y="3611880"/>
+            <a:ext cx="3520440" cy="320040"/>
+          </a:xfrm>
+          <a:prstGeom prst="rect">
+            <a:avLst/>
+          </a:prstGeom>
+          <a:noFill/>
+          <a:ln/>
+        </p:spPr>
+        <p:txBody>
+          <a:bodyPr wrap="square" rtlCol="0" anchor="ctr"/>
+          <a:lstStyle/>
+          <a:p>
+            <a:pPr marL="0" indent="0" algn="ctr">
+              <a:buNone/>
+            </a:pPr>
+            <a:r>
+              <a:rPr lang="en-US" sz="1150" b="1" dirty="0">
+                <a:solidFill>
+                  <a:srgbClr val="21295C"/>
+                </a:solidFill>
+                <a:latin typeface="Calibri" pitchFamily="34" charset="0"/>
+                <a:ea typeface="Calibri" pitchFamily="34" charset="-122"/>
+                <a:cs typeface="Calibri" pitchFamily="34" charset="-120"/>
+              </a:rPr>
+              <a:t>1 model</a:t>
+            </a:r>
+            <a:endParaRPr lang="en-US" sz="1150" dirty="0"/>
+          </a:p>
+        </p:txBody>
+      </p:sp>
+      <p:sp>
+        <p:nvSpPr>
+          <p:cNvPr id="24" name="Text 19"/>
+          <p:cNvSpPr/>
+          <p:nvPr/>
+        </p:nvSpPr>
+        <p:spPr>
+          <a:xfrm>
+            <a:off x="8375904" y="4069080"/>
+            <a:ext cx="2971800" cy="1554480"/>
+          </a:xfrm>
+          <a:prstGeom prst="rect">
+            <a:avLst/>
+          </a:prstGeom>
+          <a:noFill/>
+          <a:ln/>
+        </p:spPr>
+        <p:txBody>
+          <a:bodyPr wrap="square" rtlCol="0" anchor="t"/>
+          <a:lstStyle/>
+          <a:p>
+            <a:pPr marL="0" indent="0" algn="ctr">
+              <a:buNone/>
+            </a:pPr>
+            <a:r>
+              <a:rPr lang="en-US" sz="1150" dirty="0">
+                <a:solidFill>
+                  <a:srgbClr val="607080"/>
+                </a:solidFill>
+                <a:latin typeface="Calibri" pitchFamily="34" charset="0"/>
+                <a:ea typeface="Calibri" pitchFamily="34" charset="-122"/>
+                <a:cs typeface="Calibri" pitchFamily="34" charset="-120"/>
+              </a:rPr>
+              <a:t>Aggregate revenue, order counts, and average order value by year, month, and category for reporting</a:t>
+            </a:r>
+            <a:endParaRPr lang="en-US" sz="1150" dirty="0"/>
+          </a:p>
+        </p:txBody>
+      </p:sp>
+      <p:sp>
+        <p:nvSpPr>
+          <p:cNvPr id="25" name="Text 20"/>
+          <p:cNvSpPr/>
+          <p:nvPr/>
+        </p:nvSpPr>
+        <p:spPr>
+          <a:xfrm>
+            <a:off x="548640" y="5989320"/>
+            <a:ext cx="10515600" cy="365760"/>
+          </a:xfrm>
+          <a:prstGeom prst="rect">
+            <a:avLst/>
+          </a:prstGeom>
+          <a:noFill/>
+          <a:ln/>
+        </p:spPr>
+        <p:txBody>
+          <a:bodyPr wrap="square" rtlCol="0" anchor="ctr"/>
+          <a:lstStyle/>
+          <a:p>
+            <a:pPr marL="0" indent="0">
+              <a:buNone/>
+            </a:pPr>
+            <a:r>
+              <a:rPr lang="en-US" sz="1200" i="1" dirty="0">
+                <a:solidFill>
+                  <a:srgbClr val="607080"/>
+                </a:solidFill>
+                <a:latin typeface="Calibri" pitchFamily="34" charset="0"/>
+                <a:ea typeface="Calibri" pitchFamily="34" charset="-122"/>
+                <a:cs typeface="Calibri" pitchFamily="34" charset="-120"/>
+              </a:rPr>
+              <a:t>Validated with automated data tests confirming no missing values in the final mart</a:t>
+            </a:r>
+            <a:endParaRPr lang="en-US" sz="1200" dirty="0"/>
+          </a:p>
+        </p:txBody>
+      </p:sp>
+      <p:sp>
+        <p:nvSpPr>
+          <p:cNvPr id="26" name="Text 21"/>
+          <p:cNvSpPr/>
+          <p:nvPr/>
+        </p:nvSpPr>
+        <p:spPr>
+          <a:xfrm>
+            <a:off x="457200" y="6537960"/>
+            <a:ext cx="5486400" cy="274320"/>
+          </a:xfrm>
+          <a:prstGeom prst="rect">
+            <a:avLst/>
+          </a:prstGeom>
+          <a:noFill/>
+          <a:ln/>
+        </p:spPr>
+        <p:txBody>
+          <a:bodyPr wrap="square" rtlCol="0" anchor="ctr"/>
+          <a:lstStyle/>
+          <a:p>
+            <a:pPr marL="0" indent="0">
+              <a:buNone/>
+            </a:pPr>
+            <a:r>
+              <a:rPr lang="en-US" sz="900" dirty="0">
+                <a:solidFill>
+                  <a:srgbClr val="607080"/>
+                </a:solidFill>
+                <a:latin typeface="Calibri" pitchFamily="34" charset="0"/>
+                <a:ea typeface="Calibri" pitchFamily="34" charset="-122"/>
+                <a:cs typeface="Calibri" pitchFamily="34" charset="-120"/>
+              </a:rPr>
               <a:t>Northwind Sales Insights</a:t>
             </a:r>
             <a:endParaRPr lang="en-US" sz="900" dirty="0"/>
@@ -5981,7 +6556,7 @@
       </p:sp>
       <p:sp>
         <p:nvSpPr>
-          <p:cNvPr id="26" name="Text 21"/>
+          <p:cNvPr id="27" name="Text 22"/>
           <p:cNvSpPr/>
           <p:nvPr/>
         </p:nvSpPr>
@@ -6000,7 +6575,7 @@
           <a:bodyPr wrap="square" rtlCol="0" anchor="ctr"/>
           <a:lstStyle/>
           <a:p>
-            <a:pPr algn="r" indent="0" marL="0">
+            <a:pPr marL="0" indent="0" algn="r">
               <a:buNone/>
             </a:pPr>
             <a:r>
@@ -6034,6 +6609,7 @@
         <a:solidFill>
           <a:srgbClr val="FFFFFF"/>
         </a:solidFill>
+        <a:effectLst/>
       </p:bgPr>
     </p:bg>
     <p:spTree>
@@ -6071,7 +6647,7 @@
           <a:bodyPr wrap="square" rtlCol="0" anchor="ctr"/>
           <a:lstStyle/>
           <a:p>
-            <a:pPr indent="0" marL="0">
+            <a:pPr marL="0" indent="0">
               <a:buNone/>
             </a:pPr>
             <a:r>
@@ -6091,13 +6667,33 @@
       </p:sp>
       <p:sp>
         <p:nvSpPr>
-          <p:cNvPr id="3" name="Text 1"/>
-          <p:cNvSpPr/>
-          <p:nvPr/>
-        </p:nvSpPr>
-        <p:spPr>
-          <a:xfrm>
-            <a:off x="548640" y="914400"/>
+          <p:cNvPr id="3" name="Shape 1"/>
+          <p:cNvSpPr/>
+          <p:nvPr/>
+        </p:nvSpPr>
+        <p:spPr>
+          <a:xfrm>
+            <a:off x="566928" y="932688"/>
+            <a:ext cx="502920" cy="64008"/>
+          </a:xfrm>
+          <a:prstGeom prst="rect">
+            <a:avLst/>
+          </a:prstGeom>
+          <a:solidFill>
+            <a:srgbClr val="1C7293"/>
+          </a:solidFill>
+          <a:ln/>
+        </p:spPr>
+      </p:sp>
+      <p:sp>
+        <p:nvSpPr>
+          <p:cNvPr id="4" name="Text 2"/>
+          <p:cNvSpPr/>
+          <p:nvPr/>
+        </p:nvSpPr>
+        <p:spPr>
+          <a:xfrm>
+            <a:off x="548640" y="1051560"/>
             <a:ext cx="10058400" cy="365760"/>
           </a:xfrm>
           <a:prstGeom prst="rect">
@@ -6110,7 +6706,7 @@
           <a:bodyPr wrap="square" rtlCol="0" anchor="ctr"/>
           <a:lstStyle/>
           <a:p>
-            <a:pPr indent="0" marL="0">
+            <a:pPr marL="0" indent="0">
               <a:buNone/>
             </a:pPr>
             <a:r>
@@ -6128,24 +6724,124 @@
           </a:p>
         </p:txBody>
       </p:sp>
+      <p:sp>
+        <p:nvSpPr>
+          <p:cNvPr id="5" name="Shape 3"/>
+          <p:cNvSpPr/>
+          <p:nvPr/>
+        </p:nvSpPr>
+        <p:spPr>
+          <a:xfrm>
+            <a:off x="640080" y="1536192"/>
+            <a:ext cx="2743200" cy="310896"/>
+          </a:xfrm>
+          <a:prstGeom prst="roundRect">
+            <a:avLst>
+              <a:gd name="adj" fmla="val 50000"/>
+            </a:avLst>
+          </a:prstGeom>
+          <a:solidFill>
+            <a:srgbClr val="065A82"/>
+          </a:solidFill>
+          <a:ln/>
+        </p:spPr>
+      </p:sp>
+      <p:sp>
+        <p:nvSpPr>
+          <p:cNvPr id="6" name="Text 4"/>
+          <p:cNvSpPr/>
+          <p:nvPr/>
+        </p:nvSpPr>
+        <p:spPr>
+          <a:xfrm>
+            <a:off x="640080" y="1536192"/>
+            <a:ext cx="2743200" cy="310896"/>
+          </a:xfrm>
+          <a:prstGeom prst="rect">
+            <a:avLst/>
+          </a:prstGeom>
+          <a:noFill/>
+          <a:ln/>
+        </p:spPr>
+        <p:txBody>
+          <a:bodyPr wrap="square" rtlCol="0" anchor="ctr"/>
+          <a:lstStyle/>
+          <a:p>
+            <a:pPr marL="0" indent="0" algn="ctr">
+              <a:buNone/>
+            </a:pPr>
+            <a:r>
+              <a:rPr lang="en-US" sz="1000" b="1" kern="0" spc="100" dirty="0">
+                <a:solidFill>
+                  <a:srgbClr val="FFFFFF"/>
+                </a:solidFill>
+                <a:latin typeface="Calibri" pitchFamily="34" charset="0"/>
+                <a:ea typeface="Calibri" pitchFamily="34" charset="-122"/>
+                <a:cs typeface="Calibri" pitchFamily="34" charset="-120"/>
+              </a:rPr>
+              <a:t>WHAT THIS SHOWS</a:t>
+            </a:r>
+            <a:endParaRPr lang="en-US" sz="1000" dirty="0"/>
+          </a:p>
+        </p:txBody>
+      </p:sp>
+      <p:sp>
+        <p:nvSpPr>
+          <p:cNvPr id="7" name="Text 5"/>
+          <p:cNvSpPr/>
+          <p:nvPr/>
+        </p:nvSpPr>
+        <p:spPr>
+          <a:xfrm>
+            <a:off x="3520440" y="1536192"/>
+            <a:ext cx="5074920" cy="365760"/>
+          </a:xfrm>
+          <a:prstGeom prst="rect">
+            <a:avLst/>
+          </a:prstGeom>
+          <a:noFill/>
+          <a:ln/>
+        </p:spPr>
+        <p:txBody>
+          <a:bodyPr wrap="square" rtlCol="0" anchor="ctr"/>
+          <a:lstStyle/>
+          <a:p>
+            <a:pPr marL="0" indent="0">
+              <a:buNone/>
+            </a:pPr>
+            <a:r>
+              <a:rPr lang="en-US" sz="1050" i="1" dirty="0">
+                <a:solidFill>
+                  <a:srgbClr val="607080"/>
+                </a:solidFill>
+                <a:latin typeface="Calibri" pitchFamily="34" charset="0"/>
+                <a:ea typeface="Calibri" pitchFamily="34" charset="-122"/>
+                <a:cs typeface="Calibri" pitchFamily="34" charset="-120"/>
+              </a:rPr>
+              <a:t>Each category ranked by total revenue earned across the full period, in thousands of euros</a:t>
+            </a:r>
+            <a:endParaRPr lang="en-US" sz="1050" dirty="0"/>
+          </a:p>
+        </p:txBody>
+      </p:sp>
       <p:pic>
         <p:nvPicPr>
-          <p:cNvPr id="4" name="Image 0" descr="chart_revenue_by_category.png">    </p:cNvPr>
+          <p:cNvPr id="8" name="Image 0" descr="chart_revenue_by_category.png"/>
           <p:cNvPicPr>
             <a:picLocks noChangeAspect="1"/>
           </p:cNvPicPr>
           <p:nvPr/>
         </p:nvPicPr>
         <p:blipFill>
-          <a:blip r:embed="rId1"/>
+          <a:blip r:embed="rId3"/>
           <a:stretch>
             <a:fillRect/>
           </a:stretch>
         </p:blipFill>
         <p:spPr>
           <a:xfrm>
-            <a:off x="640080" y="1417320"/>
-            <a:ext cx="7955280" cy="4663440"/>
+            <a:off x="640080" y="2011680"/>
+            <a:ext cx="7955280" cy="4160520"/>
           </a:xfrm>
           <a:prstGeom prst="rect">
             <a:avLst/>
@@ -6154,7 +6850,7 @@
       </p:pic>
       <p:sp>
         <p:nvSpPr>
-          <p:cNvPr id="5" name="Shape 2"/>
+          <p:cNvPr id="9" name="Shape 6"/>
           <p:cNvSpPr/>
           <p:nvPr/>
         </p:nvSpPr>
@@ -6176,7 +6872,7 @@
       </p:sp>
       <p:sp>
         <p:nvSpPr>
-          <p:cNvPr id="6" name="Text 3"/>
+          <p:cNvPr id="10" name="Text 7"/>
           <p:cNvSpPr/>
           <p:nvPr/>
         </p:nvSpPr>
@@ -6195,7 +6891,7 @@
           <a:bodyPr wrap="square" rtlCol="0" anchor="ctr"/>
           <a:lstStyle/>
           <a:p>
-            <a:pPr algn="ctr" indent="0" marL="0">
+            <a:pPr marL="0" indent="0" algn="ctr">
               <a:buNone/>
             </a:pPr>
             <a:r>
@@ -6215,7 +6911,7 @@
       </p:sp>
       <p:sp>
         <p:nvSpPr>
-          <p:cNvPr id="7" name="Text 4"/>
+          <p:cNvPr id="11" name="Text 8"/>
           <p:cNvSpPr/>
           <p:nvPr/>
         </p:nvSpPr>
@@ -6234,7 +6930,7 @@
           <a:bodyPr wrap="square" rtlCol="0" anchor="ctr"/>
           <a:lstStyle/>
           <a:p>
-            <a:pPr algn="ctr" indent="0" marL="0">
+            <a:pPr marL="0" indent="0" algn="ctr">
               <a:buNone/>
             </a:pPr>
             <a:r>
@@ -6254,7 +6950,7 @@
       </p:sp>
       <p:sp>
         <p:nvSpPr>
-          <p:cNvPr id="8" name="Shape 5"/>
+          <p:cNvPr id="12" name="Shape 9"/>
           <p:cNvSpPr/>
           <p:nvPr/>
         </p:nvSpPr>
@@ -6276,7 +6972,7 @@
       </p:sp>
       <p:sp>
         <p:nvSpPr>
-          <p:cNvPr id="9" name="Text 6"/>
+          <p:cNvPr id="13" name="Text 10"/>
           <p:cNvSpPr/>
           <p:nvPr/>
         </p:nvSpPr>
@@ -6295,7 +6991,7 @@
           <a:bodyPr wrap="square" rtlCol="0" anchor="ctr"/>
           <a:lstStyle/>
           <a:p>
-            <a:pPr algn="ctr" indent="0" marL="0">
+            <a:pPr marL="0" indent="0" algn="ctr">
               <a:buNone/>
             </a:pPr>
             <a:r>
@@ -6315,7 +7011,7 @@
       </p:sp>
       <p:sp>
         <p:nvSpPr>
-          <p:cNvPr id="10" name="Text 7"/>
+          <p:cNvPr id="14" name="Text 11"/>
           <p:cNvSpPr/>
           <p:nvPr/>
         </p:nvSpPr>
@@ -6334,7 +7030,7 @@
           <a:bodyPr wrap="square" rtlCol="0" anchor="ctr"/>
           <a:lstStyle/>
           <a:p>
-            <a:pPr algn="ctr" indent="0" marL="0">
+            <a:pPr marL="0" indent="0" algn="ctr">
               <a:buNone/>
             </a:pPr>
             <a:r>
@@ -6354,7 +7050,7 @@
       </p:sp>
       <p:sp>
         <p:nvSpPr>
-          <p:cNvPr id="11" name="Text 8"/>
+          <p:cNvPr id="15" name="Text 12"/>
           <p:cNvSpPr/>
           <p:nvPr/>
         </p:nvSpPr>
@@ -6373,7 +7069,7 @@
           <a:bodyPr wrap="square" rtlCol="0" anchor="ctr"/>
           <a:lstStyle/>
           <a:p>
-            <a:pPr indent="0" marL="0">
+            <a:pPr marL="0" indent="0">
               <a:buNone/>
             </a:pPr>
             <a:r>
@@ -6393,7 +7089,7 @@
       </p:sp>
       <p:sp>
         <p:nvSpPr>
-          <p:cNvPr id="12" name="Text 9"/>
+          <p:cNvPr id="16" name="Text 13"/>
           <p:cNvSpPr/>
           <p:nvPr/>
         </p:nvSpPr>
@@ -6412,7 +7108,7 @@
           <a:bodyPr wrap="square" rtlCol="0" anchor="ctr"/>
           <a:lstStyle/>
           <a:p>
-            <a:pPr algn="r" indent="0" marL="0">
+            <a:pPr marL="0" indent="0" algn="r">
               <a:buNone/>
             </a:pPr>
             <a:r>
@@ -6446,6 +7142,7 @@
         <a:solidFill>
           <a:srgbClr val="FFFFFF"/>
         </a:solidFill>
+        <a:effectLst/>
       </p:bgPr>
     </p:bg>
     <p:spTree>
@@ -6483,7 +7180,7 @@
           <a:bodyPr wrap="square" rtlCol="0" anchor="ctr"/>
           <a:lstStyle/>
           <a:p>
-            <a:pPr indent="0" marL="0">
+            <a:pPr marL="0" indent="0">
               <a:buNone/>
             </a:pPr>
             <a:r>
@@ -6503,13 +7200,33 @@
       </p:sp>
       <p:sp>
         <p:nvSpPr>
-          <p:cNvPr id="3" name="Text 1"/>
-          <p:cNvSpPr/>
-          <p:nvPr/>
-        </p:nvSpPr>
-        <p:spPr>
-          <a:xfrm>
-            <a:off x="548640" y="914400"/>
+          <p:cNvPr id="3" name="Shape 1"/>
+          <p:cNvSpPr/>
+          <p:nvPr/>
+        </p:nvSpPr>
+        <p:spPr>
+          <a:xfrm>
+            <a:off x="566928" y="932688"/>
+            <a:ext cx="502920" cy="64008"/>
+          </a:xfrm>
+          <a:prstGeom prst="rect">
+            <a:avLst/>
+          </a:prstGeom>
+          <a:solidFill>
+            <a:srgbClr val="1C7293"/>
+          </a:solidFill>
+          <a:ln/>
+        </p:spPr>
+      </p:sp>
+      <p:sp>
+        <p:nvSpPr>
+          <p:cNvPr id="4" name="Text 2"/>
+          <p:cNvSpPr/>
+          <p:nvPr/>
+        </p:nvSpPr>
+        <p:spPr>
+          <a:xfrm>
+            <a:off x="548640" y="1051560"/>
             <a:ext cx="10058400" cy="365760"/>
           </a:xfrm>
           <a:prstGeom prst="rect">
@@ -6522,7 +7239,7 @@
           <a:bodyPr wrap="square" rtlCol="0" anchor="ctr"/>
           <a:lstStyle/>
           <a:p>
-            <a:pPr indent="0" marL="0">
+            <a:pPr marL="0" indent="0">
               <a:buNone/>
             </a:pPr>
             <a:r>
@@ -6540,24 +7257,124 @@
           </a:p>
         </p:txBody>
       </p:sp>
+      <p:sp>
+        <p:nvSpPr>
+          <p:cNvPr id="5" name="Shape 3"/>
+          <p:cNvSpPr/>
+          <p:nvPr/>
+        </p:nvSpPr>
+        <p:spPr>
+          <a:xfrm>
+            <a:off x="548640" y="1536192"/>
+            <a:ext cx="2743200" cy="310896"/>
+          </a:xfrm>
+          <a:prstGeom prst="roundRect">
+            <a:avLst>
+              <a:gd name="adj" fmla="val 50000"/>
+            </a:avLst>
+          </a:prstGeom>
+          <a:solidFill>
+            <a:srgbClr val="065A82"/>
+          </a:solidFill>
+          <a:ln/>
+        </p:spPr>
+      </p:sp>
+      <p:sp>
+        <p:nvSpPr>
+          <p:cNvPr id="6" name="Text 4"/>
+          <p:cNvSpPr/>
+          <p:nvPr/>
+        </p:nvSpPr>
+        <p:spPr>
+          <a:xfrm>
+            <a:off x="548640" y="1536192"/>
+            <a:ext cx="2743200" cy="310896"/>
+          </a:xfrm>
+          <a:prstGeom prst="rect">
+            <a:avLst/>
+          </a:prstGeom>
+          <a:noFill/>
+          <a:ln/>
+        </p:spPr>
+        <p:txBody>
+          <a:bodyPr wrap="square" rtlCol="0" anchor="ctr"/>
+          <a:lstStyle/>
+          <a:p>
+            <a:pPr marL="0" indent="0" algn="ctr">
+              <a:buNone/>
+            </a:pPr>
+            <a:r>
+              <a:rPr lang="en-US" sz="1000" b="1" kern="0" spc="100" dirty="0">
+                <a:solidFill>
+                  <a:srgbClr val="FFFFFF"/>
+                </a:solidFill>
+                <a:latin typeface="Calibri" pitchFamily="34" charset="0"/>
+                <a:ea typeface="Calibri" pitchFamily="34" charset="-122"/>
+                <a:cs typeface="Calibri" pitchFamily="34" charset="-120"/>
+              </a:rPr>
+              <a:t>WHAT THIS SHOWS</a:t>
+            </a:r>
+            <a:endParaRPr lang="en-US" sz="1000" dirty="0"/>
+          </a:p>
+        </p:txBody>
+      </p:sp>
+      <p:sp>
+        <p:nvSpPr>
+          <p:cNvPr id="7" name="Text 5"/>
+          <p:cNvSpPr/>
+          <p:nvPr/>
+        </p:nvSpPr>
+        <p:spPr>
+          <a:xfrm>
+            <a:off x="3429000" y="1536192"/>
+            <a:ext cx="8138160" cy="365760"/>
+          </a:xfrm>
+          <a:prstGeom prst="rect">
+            <a:avLst/>
+          </a:prstGeom>
+          <a:noFill/>
+          <a:ln/>
+        </p:spPr>
+        <p:txBody>
+          <a:bodyPr wrap="square" rtlCol="0" anchor="ctr"/>
+          <a:lstStyle/>
+          <a:p>
+            <a:pPr marL="0" indent="0">
+              <a:buNone/>
+            </a:pPr>
+            <a:r>
+              <a:rPr lang="en-US" sz="1050" i="1" dirty="0">
+                <a:solidFill>
+                  <a:srgbClr val="607080"/>
+                </a:solidFill>
+                <a:latin typeface="Calibri" pitchFamily="34" charset="0"/>
+                <a:ea typeface="Calibri" pitchFamily="34" charset="-122"/>
+                <a:cs typeface="Calibri" pitchFamily="34" charset="-120"/>
+              </a:rPr>
+              <a:t>Each colored band is one category; the total height at any point is that month’s combined revenue</a:t>
+            </a:r>
+            <a:endParaRPr lang="en-US" sz="1050" dirty="0"/>
+          </a:p>
+        </p:txBody>
+      </p:sp>
       <p:pic>
         <p:nvPicPr>
-          <p:cNvPr id="4" name="Image 0" descr="chart_monthly_trend.png">    </p:cNvPr>
+          <p:cNvPr id="8" name="Image 0" descr="chart_monthly_trend.png"/>
           <p:cNvPicPr>
             <a:picLocks noChangeAspect="1"/>
           </p:cNvPicPr>
           <p:nvPr/>
         </p:nvPicPr>
         <p:blipFill>
-          <a:blip r:embed="rId1"/>
+          <a:blip r:embed="rId3"/>
           <a:stretch>
             <a:fillRect/>
           </a:stretch>
         </p:blipFill>
         <p:spPr>
           <a:xfrm>
-            <a:off x="548640" y="1417320"/>
-            <a:ext cx="11064240" cy="5029200"/>
+            <a:off x="548640" y="1965960"/>
+            <a:ext cx="11064240" cy="4480560"/>
           </a:xfrm>
           <a:prstGeom prst="rect">
             <a:avLst/>
@@ -6566,7 +7383,7 @@
       </p:pic>
       <p:sp>
         <p:nvSpPr>
-          <p:cNvPr id="5" name="Text 2"/>
+          <p:cNvPr id="9" name="Text 6"/>
           <p:cNvSpPr/>
           <p:nvPr/>
         </p:nvSpPr>
@@ -6585,7 +7402,7 @@
           <a:bodyPr wrap="square" rtlCol="0" anchor="ctr"/>
           <a:lstStyle/>
           <a:p>
-            <a:pPr indent="0" marL="0">
+            <a:pPr marL="0" indent="0">
               <a:buNone/>
             </a:pPr>
             <a:r>
@@ -6605,7 +7422,7 @@
       </p:sp>
       <p:sp>
         <p:nvSpPr>
-          <p:cNvPr id="6" name="Text 3"/>
+          <p:cNvPr id="10" name="Text 7"/>
           <p:cNvSpPr/>
           <p:nvPr/>
         </p:nvSpPr>
@@ -6624,7 +7441,7 @@
           <a:bodyPr wrap="square" rtlCol="0" anchor="ctr"/>
           <a:lstStyle/>
           <a:p>
-            <a:pPr algn="r" indent="0" marL="0">
+            <a:pPr marL="0" indent="0" algn="r">
               <a:buNone/>
             </a:pPr>
             <a:r>
@@ -6658,6 +7475,7 @@
         <a:solidFill>
           <a:srgbClr val="FFFFFF"/>
         </a:solidFill>
+        <a:effectLst/>
       </p:bgPr>
     </p:bg>
     <p:spTree>
@@ -6695,7 +7513,7 @@
           <a:bodyPr wrap="square" rtlCol="0" anchor="ctr"/>
           <a:lstStyle/>
           <a:p>
-            <a:pPr indent="0" marL="0">
+            <a:pPr marL="0" indent="0">
               <a:buNone/>
             </a:pPr>
             <a:r>
@@ -6715,13 +7533,33 @@
       </p:sp>
       <p:sp>
         <p:nvSpPr>
-          <p:cNvPr id="3" name="Text 1"/>
-          <p:cNvSpPr/>
-          <p:nvPr/>
-        </p:nvSpPr>
-        <p:spPr>
-          <a:xfrm>
-            <a:off x="548640" y="914400"/>
+          <p:cNvPr id="3" name="Shape 1"/>
+          <p:cNvSpPr/>
+          <p:nvPr/>
+        </p:nvSpPr>
+        <p:spPr>
+          <a:xfrm>
+            <a:off x="566928" y="932688"/>
+            <a:ext cx="502920" cy="64008"/>
+          </a:xfrm>
+          <a:prstGeom prst="rect">
+            <a:avLst/>
+          </a:prstGeom>
+          <a:solidFill>
+            <a:srgbClr val="1C7293"/>
+          </a:solidFill>
+          <a:ln/>
+        </p:spPr>
+      </p:sp>
+      <p:sp>
+        <p:nvSpPr>
+          <p:cNvPr id="4" name="Text 2"/>
+          <p:cNvSpPr/>
+          <p:nvPr/>
+        </p:nvSpPr>
+        <p:spPr>
+          <a:xfrm>
+            <a:off x="548640" y="1051560"/>
             <a:ext cx="10058400" cy="365760"/>
           </a:xfrm>
           <a:prstGeom prst="rect">
@@ -6734,7 +7572,7 @@
           <a:bodyPr wrap="square" rtlCol="0" anchor="ctr"/>
           <a:lstStyle/>
           <a:p>
-            <a:pPr indent="0" marL="0">
+            <a:pPr marL="0" indent="0">
               <a:buNone/>
             </a:pPr>
             <a:r>
@@ -6752,24 +7590,124 @@
           </a:p>
         </p:txBody>
       </p:sp>
+      <p:sp>
+        <p:nvSpPr>
+          <p:cNvPr id="5" name="Shape 3"/>
+          <p:cNvSpPr/>
+          <p:nvPr/>
+        </p:nvSpPr>
+        <p:spPr>
+          <a:xfrm>
+            <a:off x="822960" y="1536192"/>
+            <a:ext cx="2743200" cy="310896"/>
+          </a:xfrm>
+          <a:prstGeom prst="roundRect">
+            <a:avLst>
+              <a:gd name="adj" fmla="val 50000"/>
+            </a:avLst>
+          </a:prstGeom>
+          <a:solidFill>
+            <a:srgbClr val="065A82"/>
+          </a:solidFill>
+          <a:ln/>
+        </p:spPr>
+      </p:sp>
+      <p:sp>
+        <p:nvSpPr>
+          <p:cNvPr id="6" name="Text 4"/>
+          <p:cNvSpPr/>
+          <p:nvPr/>
+        </p:nvSpPr>
+        <p:spPr>
+          <a:xfrm>
+            <a:off x="822960" y="1536192"/>
+            <a:ext cx="2743200" cy="310896"/>
+          </a:xfrm>
+          <a:prstGeom prst="rect">
+            <a:avLst/>
+          </a:prstGeom>
+          <a:noFill/>
+          <a:ln/>
+        </p:spPr>
+        <p:txBody>
+          <a:bodyPr wrap="square" rtlCol="0" anchor="ctr"/>
+          <a:lstStyle/>
+          <a:p>
+            <a:pPr marL="0" indent="0" algn="ctr">
+              <a:buNone/>
+            </a:pPr>
+            <a:r>
+              <a:rPr lang="en-US" sz="1000" b="1" kern="0" spc="100" dirty="0">
+                <a:solidFill>
+                  <a:srgbClr val="FFFFFF"/>
+                </a:solidFill>
+                <a:latin typeface="Calibri" pitchFamily="34" charset="0"/>
+                <a:ea typeface="Calibri" pitchFamily="34" charset="-122"/>
+                <a:cs typeface="Calibri" pitchFamily="34" charset="-120"/>
+              </a:rPr>
+              <a:t>WHAT THIS SHOWS</a:t>
+            </a:r>
+            <a:endParaRPr lang="en-US" sz="1000" dirty="0"/>
+          </a:p>
+        </p:txBody>
+      </p:sp>
+      <p:sp>
+        <p:nvSpPr>
+          <p:cNvPr id="7" name="Text 5"/>
+          <p:cNvSpPr/>
+          <p:nvPr/>
+        </p:nvSpPr>
+        <p:spPr>
+          <a:xfrm>
+            <a:off x="3703320" y="1536192"/>
+            <a:ext cx="4846320" cy="365760"/>
+          </a:xfrm>
+          <a:prstGeom prst="rect">
+            <a:avLst/>
+          </a:prstGeom>
+          <a:noFill/>
+          <a:ln/>
+        </p:spPr>
+        <p:txBody>
+          <a:bodyPr wrap="square" rtlCol="0" anchor="ctr"/>
+          <a:lstStyle/>
+          <a:p>
+            <a:pPr marL="0" indent="0">
+              <a:buNone/>
+            </a:pPr>
+            <a:r>
+              <a:rPr lang="en-US" sz="1000" i="1" dirty="0">
+                <a:solidFill>
+                  <a:srgbClr val="607080"/>
+                </a:solidFill>
+                <a:latin typeface="Calibri" pitchFamily="34" charset="0"/>
+                <a:ea typeface="Calibri" pitchFamily="34" charset="-122"/>
+                <a:cs typeface="Calibri" pitchFamily="34" charset="-120"/>
+              </a:rPr>
+              <a:t>Left to right is order count, bottom to top is average order value, bubble size is total revenue</a:t>
+            </a:r>
+            <a:endParaRPr lang="en-US" sz="1000" dirty="0"/>
+          </a:p>
+        </p:txBody>
+      </p:sp>
       <p:pic>
         <p:nvPicPr>
-          <p:cNvPr id="4" name="Image 0" descr="chart_orders_vs_avgvalue.png">    </p:cNvPr>
+          <p:cNvPr id="8" name="Image 0" descr="chart_orders_vs_avgvalue.png"/>
           <p:cNvPicPr>
             <a:picLocks noChangeAspect="1"/>
           </p:cNvPicPr>
           <p:nvPr/>
         </p:nvPicPr>
         <p:blipFill>
-          <a:blip r:embed="rId1"/>
+          <a:blip r:embed="rId3"/>
           <a:stretch>
             <a:fillRect/>
           </a:stretch>
         </p:blipFill>
         <p:spPr>
           <a:xfrm>
-            <a:off x="822960" y="1417320"/>
-            <a:ext cx="7498080" cy="4663440"/>
+            <a:off x="822960" y="2011680"/>
+            <a:ext cx="7498080" cy="4160520"/>
           </a:xfrm>
           <a:prstGeom prst="rect">
             <a:avLst/>
@@ -6778,14 +7716,14 @@
       </p:pic>
       <p:sp>
         <p:nvSpPr>
-          <p:cNvPr id="5" name="Shape 2"/>
+          <p:cNvPr id="9" name="Shape 6"/>
           <p:cNvSpPr/>
           <p:nvPr/>
         </p:nvSpPr>
         <p:spPr>
           <a:xfrm>
             <a:off x="8686800" y="1691640"/>
-            <a:ext cx="2880360" cy="4297680"/>
+            <a:ext cx="2880360" cy="4480560"/>
           </a:xfrm>
           <a:prstGeom prst="roundRect">
             <a:avLst>
@@ -6800,7 +7738,7 @@
       </p:sp>
       <p:sp>
         <p:nvSpPr>
-          <p:cNvPr id="6" name="Text 3"/>
+          <p:cNvPr id="10" name="Text 7"/>
           <p:cNvSpPr/>
           <p:nvPr/>
         </p:nvSpPr>
@@ -6819,7 +7757,7 @@
           <a:bodyPr wrap="square" rtlCol="0" anchor="ctr"/>
           <a:lstStyle/>
           <a:p>
-            <a:pPr indent="0" marL="0">
+            <a:pPr marL="0" indent="0">
               <a:buNone/>
             </a:pPr>
             <a:r>
@@ -6839,14 +7777,14 @@
       </p:sp>
       <p:sp>
         <p:nvSpPr>
-          <p:cNvPr id="7" name="Text 4"/>
+          <p:cNvPr id="11" name="Text 8"/>
           <p:cNvSpPr/>
           <p:nvPr/>
         </p:nvSpPr>
         <p:spPr>
           <a:xfrm>
             <a:off x="8915400" y="2331720"/>
-            <a:ext cx="2514600" cy="3474720"/>
+            <a:ext cx="2514600" cy="3566160"/>
           </a:xfrm>
           <a:prstGeom prst="rect">
             <a:avLst/>
@@ -6858,7 +7796,7 @@
           <a:bodyPr wrap="square" rtlCol="0" anchor="t"/>
           <a:lstStyle/>
           <a:p>
-            <a:pPr indent="0" marL="0">
+            <a:pPr marL="0" indent="0">
               <a:lnSpc>
                 <a:spcPct val="115000"/>
               </a:lnSpc>
@@ -6875,33 +7813,70 @@
               </a:rPr>
               <a:t>Meat and Poultry: </a:t>
             </a:r>
-            <a:pPr indent="0" marL="0">
+            <a:r>
+              <a:rPr lang="en-US" sz="1150" dirty="0">
+                <a:solidFill>
+                  <a:srgbClr val="607080"/>
+                </a:solidFill>
+                <a:latin typeface="Calibri" pitchFamily="34" charset="0"/>
+                <a:ea typeface="Calibri" pitchFamily="34" charset="-122"/>
+                <a:cs typeface="Calibri" pitchFamily="34" charset="-120"/>
+              </a:rPr>
+              <a:t>fewer orders but the highest average value per order</a:t>
+            </a:r>
+            <a:endParaRPr lang="en-US" sz="1150" dirty="0"/>
+          </a:p>
+          <a:p>
+            <a:pPr marL="0" indent="0">
               <a:lnSpc>
                 <a:spcPct val="115000"/>
               </a:lnSpc>
               <a:buNone/>
             </a:pPr>
-            <a:r>
-              <a:rPr lang="en-US" sz="1150" dirty="0">
-                <a:solidFill>
-                  <a:srgbClr val="607080"/>
+            <a:endParaRPr lang="en-US" sz="1150" dirty="0"/>
+          </a:p>
+          <a:p>
+            <a:pPr marL="0" indent="0">
+              <a:lnSpc>
+                <a:spcPct val="115000"/>
+              </a:lnSpc>
+              <a:buNone/>
+            </a:pPr>
+            <a:r>
+              <a:rPr lang="en-US" sz="1150" b="1" dirty="0">
+                <a:solidFill>
+                  <a:srgbClr val="263238"/>
                 </a:solidFill>
                 <a:latin typeface="Calibri" pitchFamily="34" charset="0"/>
                 <a:ea typeface="Calibri" pitchFamily="34" charset="-122"/>
                 <a:cs typeface="Calibri" pitchFamily="34" charset="-120"/>
               </a:rPr>
-              <a:t>fewer orders but the highest average value per order</a:t>
-            </a:r>
-            <a:pPr indent="0" marL="0">
+              <a:t>Beverages and Dairy Products: </a:t>
+            </a:r>
+            <a:endParaRPr lang="en-US" sz="1150" dirty="0"/>
+          </a:p>
+          <a:p>
+            <a:pPr marL="0" indent="0">
               <a:lnSpc>
                 <a:spcPct val="115000"/>
               </a:lnSpc>
               <a:buNone/>
             </a:pPr>
+            <a:r>
+              <a:rPr lang="en-US" sz="1150" dirty="0">
+                <a:solidFill>
+                  <a:srgbClr val="607080"/>
+                </a:solidFill>
+                <a:latin typeface="Calibri" pitchFamily="34" charset="0"/>
+                <a:ea typeface="Calibri" pitchFamily="34" charset="-122"/>
+                <a:cs typeface="Calibri" pitchFamily="34" charset="-120"/>
+              </a:rPr>
+              <a:t>the highest order counts, driving steady volume</a:t>
+            </a:r>
             <a:endParaRPr lang="en-US" sz="1150" dirty="0"/>
           </a:p>
           <a:p>
-            <a:pPr indent="0" marL="0">
+            <a:pPr marL="0" indent="0">
               <a:lnSpc>
                 <a:spcPct val="115000"/>
               </a:lnSpc>
@@ -6910,7 +7885,7 @@
             <a:endParaRPr lang="en-US" sz="1150" dirty="0"/>
           </a:p>
           <a:p>
-            <a:pPr indent="0" marL="0">
+            <a:pPr marL="0" indent="0">
               <a:lnSpc>
                 <a:spcPct val="115000"/>
               </a:lnSpc>
@@ -6925,12 +7900,12 @@
                 <a:ea typeface="Calibri" pitchFamily="34" charset="-122"/>
                 <a:cs typeface="Calibri" pitchFamily="34" charset="-120"/>
               </a:rPr>
-              <a:t>Beverages and Seafood: </a:t>
+              <a:t>Seafood: </a:t>
             </a:r>
             <a:endParaRPr lang="en-US" sz="1150" dirty="0"/>
           </a:p>
           <a:p>
-            <a:pPr indent="0" marL="0">
+            <a:pPr marL="0" indent="0">
               <a:lnSpc>
                 <a:spcPct val="115000"/>
               </a:lnSpc>
@@ -6945,100 +7920,45 @@
                 <a:ea typeface="Calibri" pitchFamily="34" charset="-122"/>
                 <a:cs typeface="Calibri" pitchFamily="34" charset="-120"/>
               </a:rPr>
-              <a:t>the highest order counts, driving steady volume</a:t>
-            </a:r>
-            <a:pPr indent="0" marL="0">
-              <a:lnSpc>
-                <a:spcPct val="115000"/>
-              </a:lnSpc>
-              <a:buNone/>
-            </a:pPr>
+              <a:t>high volume but the lowest average order value, a possible upsell opportunity</a:t>
+            </a:r>
             <a:endParaRPr lang="en-US" sz="1150" dirty="0"/>
           </a:p>
-          <a:p>
-            <a:pPr indent="0" marL="0">
-              <a:lnSpc>
-                <a:spcPct val="115000"/>
-              </a:lnSpc>
-              <a:buNone/>
-            </a:pPr>
-            <a:endParaRPr lang="en-US" sz="1150" dirty="0"/>
-          </a:p>
-          <a:p>
-            <a:pPr indent="0" marL="0">
-              <a:lnSpc>
-                <a:spcPct val="115000"/>
-              </a:lnSpc>
-              <a:buNone/>
-            </a:pPr>
-            <a:r>
-              <a:rPr lang="en-US" sz="1150" b="1" dirty="0">
-                <a:solidFill>
-                  <a:srgbClr val="263238"/>
+        </p:txBody>
+      </p:sp>
+      <p:sp>
+        <p:nvSpPr>
+          <p:cNvPr id="12" name="Text 9"/>
+          <p:cNvSpPr/>
+          <p:nvPr/>
+        </p:nvSpPr>
+        <p:spPr>
+          <a:xfrm>
+            <a:off x="457200" y="6537960"/>
+            <a:ext cx="5486400" cy="274320"/>
+          </a:xfrm>
+          <a:prstGeom prst="rect">
+            <a:avLst/>
+          </a:prstGeom>
+          <a:noFill/>
+          <a:ln/>
+        </p:spPr>
+        <p:txBody>
+          <a:bodyPr wrap="square" rtlCol="0" anchor="ctr"/>
+          <a:lstStyle/>
+          <a:p>
+            <a:pPr marL="0" indent="0">
+              <a:buNone/>
+            </a:pPr>
+            <a:r>
+              <a:rPr lang="en-US" sz="900" dirty="0">
+                <a:solidFill>
+                  <a:srgbClr val="607080"/>
                 </a:solidFill>
                 <a:latin typeface="Calibri" pitchFamily="34" charset="0"/>
                 <a:ea typeface="Calibri" pitchFamily="34" charset="-122"/>
                 <a:cs typeface="Calibri" pitchFamily="34" charset="-120"/>
               </a:rPr>
-              <a:t>Seafood: </a:t>
-            </a:r>
-            <a:endParaRPr lang="en-US" sz="1150" dirty="0"/>
-          </a:p>
-          <a:p>
-            <a:pPr indent="0" marL="0">
-              <a:lnSpc>
-                <a:spcPct val="115000"/>
-              </a:lnSpc>
-              <a:buNone/>
-            </a:pPr>
-            <a:r>
-              <a:rPr lang="en-US" sz="1150" dirty="0">
-                <a:solidFill>
-                  <a:srgbClr val="607080"/>
-                </a:solidFill>
-                <a:latin typeface="Calibri" pitchFamily="34" charset="0"/>
-                <a:ea typeface="Calibri" pitchFamily="34" charset="-122"/>
-                <a:cs typeface="Calibri" pitchFamily="34" charset="-120"/>
-              </a:rPr>
-              <a:t>high volume but the lowest average order value, a possible upsell opportunity</a:t>
-            </a:r>
-            <a:endParaRPr lang="en-US" sz="1150" dirty="0"/>
-          </a:p>
-        </p:txBody>
-      </p:sp>
-      <p:sp>
-        <p:nvSpPr>
-          <p:cNvPr id="8" name="Text 5"/>
-          <p:cNvSpPr/>
-          <p:nvPr/>
-        </p:nvSpPr>
-        <p:spPr>
-          <a:xfrm>
-            <a:off x="457200" y="6537960"/>
-            <a:ext cx="5486400" cy="274320"/>
-          </a:xfrm>
-          <a:prstGeom prst="rect">
-            <a:avLst/>
-          </a:prstGeom>
-          <a:noFill/>
-          <a:ln/>
-        </p:spPr>
-        <p:txBody>
-          <a:bodyPr wrap="square" rtlCol="0" anchor="ctr"/>
-          <a:lstStyle/>
-          <a:p>
-            <a:pPr indent="0" marL="0">
-              <a:buNone/>
-            </a:pPr>
-            <a:r>
-              <a:rPr lang="en-US" sz="900" dirty="0">
-                <a:solidFill>
-                  <a:srgbClr val="607080"/>
-                </a:solidFill>
-                <a:latin typeface="Calibri" pitchFamily="34" charset="0"/>
-                <a:ea typeface="Calibri" pitchFamily="34" charset="-122"/>
-                <a:cs typeface="Calibri" pitchFamily="34" charset="-120"/>
-              </a:rPr>
               <a:t>Northwind Sales Insights</a:t>
             </a:r>
             <a:endParaRPr lang="en-US" sz="900" dirty="0"/>
@@ -7047,7 +7967,7 @@
       </p:sp>
       <p:sp>
         <p:nvSpPr>
-          <p:cNvPr id="9" name="Text 6"/>
+          <p:cNvPr id="13" name="Text 10"/>
           <p:cNvSpPr/>
           <p:nvPr/>
         </p:nvSpPr>
@@ -7066,7 +7986,7 @@
           <a:bodyPr wrap="square" rtlCol="0" anchor="ctr"/>
           <a:lstStyle/>
           <a:p>
-            <a:pPr algn="r" indent="0" marL="0">
+            <a:pPr marL="0" indent="0" algn="r">
               <a:buNone/>
             </a:pPr>
             <a:r>
@@ -7100,6 +8020,7 @@
         <a:solidFill>
           <a:srgbClr val="FFFFFF"/>
         </a:solidFill>
+        <a:effectLst/>
       </p:bgPr>
     </p:bg>
     <p:spTree>
@@ -7137,7 +8058,7 @@
           <a:bodyPr wrap="square" rtlCol="0" anchor="ctr"/>
           <a:lstStyle/>
           <a:p>
-            <a:pPr indent="0" marL="0">
+            <a:pPr marL="0" indent="0">
               <a:buNone/>
             </a:pPr>
             <a:r>
@@ -7157,13 +8078,33 @@
       </p:sp>
       <p:sp>
         <p:nvSpPr>
-          <p:cNvPr id="3" name="Text 1"/>
-          <p:cNvSpPr/>
-          <p:nvPr/>
-        </p:nvSpPr>
-        <p:spPr>
-          <a:xfrm>
-            <a:off x="548640" y="914400"/>
+          <p:cNvPr id="3" name="Shape 1"/>
+          <p:cNvSpPr/>
+          <p:nvPr/>
+        </p:nvSpPr>
+        <p:spPr>
+          <a:xfrm>
+            <a:off x="566928" y="932688"/>
+            <a:ext cx="502920" cy="64008"/>
+          </a:xfrm>
+          <a:prstGeom prst="rect">
+            <a:avLst/>
+          </a:prstGeom>
+          <a:solidFill>
+            <a:srgbClr val="1C7293"/>
+          </a:solidFill>
+          <a:ln/>
+        </p:spPr>
+      </p:sp>
+      <p:sp>
+        <p:nvSpPr>
+          <p:cNvPr id="4" name="Text 2"/>
+          <p:cNvSpPr/>
+          <p:nvPr/>
+        </p:nvSpPr>
+        <p:spPr>
+          <a:xfrm>
+            <a:off x="548640" y="1051560"/>
             <a:ext cx="10058400" cy="365760"/>
           </a:xfrm>
           <a:prstGeom prst="rect">
@@ -7176,7 +8117,7 @@
           <a:bodyPr wrap="square" rtlCol="0" anchor="ctr"/>
           <a:lstStyle/>
           <a:p>
-            <a:pPr indent="0" marL="0">
+            <a:pPr marL="0" indent="0">
               <a:buNone/>
             </a:pPr>
             <a:r>
@@ -7194,24 +8135,124 @@
           </a:p>
         </p:txBody>
       </p:sp>
+      <p:sp>
+        <p:nvSpPr>
+          <p:cNvPr id="5" name="Shape 3"/>
+          <p:cNvSpPr/>
+          <p:nvPr/>
+        </p:nvSpPr>
+        <p:spPr>
+          <a:xfrm>
+            <a:off x="640080" y="1536192"/>
+            <a:ext cx="2743200" cy="310896"/>
+          </a:xfrm>
+          <a:prstGeom prst="roundRect">
+            <a:avLst>
+              <a:gd name="adj" fmla="val 50000"/>
+            </a:avLst>
+          </a:prstGeom>
+          <a:solidFill>
+            <a:srgbClr val="065A82"/>
+          </a:solidFill>
+          <a:ln/>
+        </p:spPr>
+      </p:sp>
+      <p:sp>
+        <p:nvSpPr>
+          <p:cNvPr id="6" name="Text 4"/>
+          <p:cNvSpPr/>
+          <p:nvPr/>
+        </p:nvSpPr>
+        <p:spPr>
+          <a:xfrm>
+            <a:off x="640080" y="1536192"/>
+            <a:ext cx="2743200" cy="310896"/>
+          </a:xfrm>
+          <a:prstGeom prst="rect">
+            <a:avLst/>
+          </a:prstGeom>
+          <a:noFill/>
+          <a:ln/>
+        </p:spPr>
+        <p:txBody>
+          <a:bodyPr wrap="square" rtlCol="0" anchor="ctr"/>
+          <a:lstStyle/>
+          <a:p>
+            <a:pPr marL="0" indent="0" algn="ctr">
+              <a:buNone/>
+            </a:pPr>
+            <a:r>
+              <a:rPr lang="en-US" sz="1000" b="1" kern="0" spc="100" dirty="0">
+                <a:solidFill>
+                  <a:srgbClr val="FFFFFF"/>
+                </a:solidFill>
+                <a:latin typeface="Calibri" pitchFamily="34" charset="0"/>
+                <a:ea typeface="Calibri" pitchFamily="34" charset="-122"/>
+                <a:cs typeface="Calibri" pitchFamily="34" charset="-120"/>
+              </a:rPr>
+              <a:t>WHAT THIS SHOWS</a:t>
+            </a:r>
+            <a:endParaRPr lang="en-US" sz="1000" dirty="0"/>
+          </a:p>
+        </p:txBody>
+      </p:sp>
+      <p:sp>
+        <p:nvSpPr>
+          <p:cNvPr id="7" name="Text 5"/>
+          <p:cNvSpPr/>
+          <p:nvPr/>
+        </p:nvSpPr>
+        <p:spPr>
+          <a:xfrm>
+            <a:off x="3520440" y="1536192"/>
+            <a:ext cx="5074920" cy="365760"/>
+          </a:xfrm>
+          <a:prstGeom prst="rect">
+            <a:avLst/>
+          </a:prstGeom>
+          <a:noFill/>
+          <a:ln/>
+        </p:spPr>
+        <p:txBody>
+          <a:bodyPr wrap="square" rtlCol="0" anchor="ctr"/>
+          <a:lstStyle/>
+          <a:p>
+            <a:pPr marL="0" indent="0">
+              <a:buNone/>
+            </a:pPr>
+            <a:r>
+              <a:rPr lang="en-US" sz="1050" i="1" dirty="0">
+                <a:solidFill>
+                  <a:srgbClr val="607080"/>
+                </a:solidFill>
+                <a:latin typeface="Calibri" pitchFamily="34" charset="0"/>
+                <a:ea typeface="Calibri" pitchFamily="34" charset="-122"/>
+                <a:cs typeface="Calibri" pitchFamily="34" charset="-120"/>
+              </a:rPr>
+              <a:t>Grouped bars let you compare the same category side by side across three consecutive years</a:t>
+            </a:r>
+            <a:endParaRPr lang="en-US" sz="1050" dirty="0"/>
+          </a:p>
+        </p:txBody>
+      </p:sp>
       <p:pic>
         <p:nvPicPr>
-          <p:cNvPr id="4" name="Image 0" descr="chart_yearly_top4.png">    </p:cNvPr>
+          <p:cNvPr id="8" name="Image 0" descr="chart_yearly_top4.png"/>
           <p:cNvPicPr>
             <a:picLocks noChangeAspect="1"/>
           </p:cNvPicPr>
           <p:nvPr/>
         </p:nvPicPr>
         <p:blipFill>
-          <a:blip r:embed="rId1"/>
+          <a:blip r:embed="rId3"/>
           <a:stretch>
             <a:fillRect/>
           </a:stretch>
         </p:blipFill>
         <p:spPr>
           <a:xfrm>
-            <a:off x="640080" y="1417320"/>
-            <a:ext cx="7955280" cy="4663440"/>
+            <a:off x="640080" y="2011680"/>
+            <a:ext cx="7955280" cy="4160520"/>
           </a:xfrm>
           <a:prstGeom prst="rect">
             <a:avLst/>
@@ -7220,14 +8261,14 @@
       </p:pic>
       <p:sp>
         <p:nvSpPr>
-          <p:cNvPr id="5" name="Shape 2"/>
+          <p:cNvPr id="9" name="Shape 6"/>
           <p:cNvSpPr/>
           <p:nvPr/>
         </p:nvSpPr>
         <p:spPr>
           <a:xfrm>
             <a:off x="8823960" y="1691640"/>
-            <a:ext cx="2743200" cy="4297680"/>
+            <a:ext cx="2743200" cy="4480560"/>
           </a:xfrm>
           <a:prstGeom prst="roundRect">
             <a:avLst>
@@ -7242,7 +8283,7 @@
       </p:sp>
       <p:sp>
         <p:nvSpPr>
-          <p:cNvPr id="6" name="Text 3"/>
+          <p:cNvPr id="10" name="Text 7"/>
           <p:cNvSpPr/>
           <p:nvPr/>
         </p:nvSpPr>
@@ -7261,7 +8302,7 @@
           <a:bodyPr wrap="square" rtlCol="0" anchor="ctr"/>
           <a:lstStyle/>
           <a:p>
-            <a:pPr indent="0" marL="0">
+            <a:pPr marL="0" indent="0">
               <a:buNone/>
             </a:pPr>
             <a:r>
@@ -7281,7 +8322,7 @@
       </p:sp>
       <p:sp>
         <p:nvSpPr>
-          <p:cNvPr id="7" name="Text 4"/>
+          <p:cNvPr id="11" name="Text 8"/>
           <p:cNvSpPr/>
           <p:nvPr/>
         </p:nvSpPr>
@@ -7300,7 +8341,7 @@
           <a:bodyPr wrap="square" rtlCol="0" anchor="t"/>
           <a:lstStyle/>
           <a:p>
-            <a:pPr indent="0" marL="0">
+            <a:pPr marL="0" indent="0">
               <a:lnSpc>
                 <a:spcPct val="120000"/>
               </a:lnSpc>
@@ -7323,7 +8364,7 @@
       </p:sp>
       <p:sp>
         <p:nvSpPr>
-          <p:cNvPr id="8" name="Text 5"/>
+          <p:cNvPr id="12" name="Text 9"/>
           <p:cNvSpPr/>
           <p:nvPr/>
         </p:nvSpPr>
@@ -7342,7 +8383,7 @@
           <a:bodyPr wrap="square" rtlCol="0" anchor="ctr"/>
           <a:lstStyle/>
           <a:p>
-            <a:pPr indent="0" marL="0">
+            <a:pPr marL="0" indent="0">
               <a:buNone/>
             </a:pPr>
             <a:r>
@@ -7362,7 +8403,7 @@
       </p:sp>
       <p:sp>
         <p:nvSpPr>
-          <p:cNvPr id="9" name="Text 6"/>
+          <p:cNvPr id="13" name="Text 10"/>
           <p:cNvSpPr/>
           <p:nvPr/>
         </p:nvSpPr>
@@ -7381,7 +8422,7 @@
           <a:bodyPr wrap="square" rtlCol="0" anchor="ctr"/>
           <a:lstStyle/>
           <a:p>
-            <a:pPr algn="r" indent="0" marL="0">
+            <a:pPr marL="0" indent="0" algn="r">
               <a:buNone/>
             </a:pPr>
             <a:r>
@@ -7415,6 +8456,7 @@
         <a:solidFill>
           <a:srgbClr val="F7FAFC"/>
         </a:solidFill>
+        <a:effectLst/>
       </p:bgPr>
     </p:bg>
     <p:spTree>
@@ -7452,7 +8494,7 @@
           <a:bodyPr wrap="square" rtlCol="0" anchor="ctr"/>
           <a:lstStyle/>
           <a:p>
-            <a:pPr indent="0" marL="0">
+            <a:pPr marL="0" indent="0">
               <a:buNone/>
             </a:pPr>
             <a:r>
@@ -7473,6 +8515,26 @@
       <p:sp>
         <p:nvSpPr>
           <p:cNvPr id="3" name="Shape 1"/>
+          <p:cNvSpPr/>
+          <p:nvPr/>
+        </p:nvSpPr>
+        <p:spPr>
+          <a:xfrm>
+            <a:off x="566928" y="1024128"/>
+            <a:ext cx="502920" cy="64008"/>
+          </a:xfrm>
+          <a:prstGeom prst="rect">
+            <a:avLst/>
+          </a:prstGeom>
+          <a:solidFill>
+            <a:srgbClr val="1C7293"/>
+          </a:solidFill>
+          <a:ln/>
+        </p:spPr>
+      </p:sp>
+      <p:sp>
+        <p:nvSpPr>
+          <p:cNvPr id="4" name="Shape 2"/>
           <p:cNvSpPr/>
           <p:nvPr/>
         </p:nvSpPr>
@@ -7499,7 +8561,7 @@
       </p:sp>
       <p:sp>
         <p:nvSpPr>
-          <p:cNvPr id="4" name="Shape 2"/>
+          <p:cNvPr id="5" name="Shape 3"/>
           <p:cNvSpPr/>
           <p:nvPr/>
         </p:nvSpPr>
@@ -7519,7 +8581,7 @@
       </p:sp>
       <p:sp>
         <p:nvSpPr>
-          <p:cNvPr id="5" name="Text 3"/>
+          <p:cNvPr id="6" name="Text 4"/>
           <p:cNvSpPr/>
           <p:nvPr/>
         </p:nvSpPr>
@@ -7538,7 +8600,7 @@
           <a:bodyPr wrap="square" rtlCol="0" anchor="ctr"/>
           <a:lstStyle/>
           <a:p>
-            <a:pPr algn="ctr" indent="0" marL="0">
+            <a:pPr marL="0" indent="0" algn="ctr">
               <a:buNone/>
             </a:pPr>
             <a:r>
@@ -7558,7 +8620,7 @@
       </p:sp>
       <p:sp>
         <p:nvSpPr>
-          <p:cNvPr id="6" name="Text 4"/>
+          <p:cNvPr id="7" name="Text 5"/>
           <p:cNvSpPr/>
           <p:nvPr/>
         </p:nvSpPr>
@@ -7577,7 +8639,7 @@
           <a:bodyPr wrap="square" rtlCol="0" anchor="ctr"/>
           <a:lstStyle/>
           <a:p>
-            <a:pPr indent="0" marL="0">
+            <a:pPr marL="0" indent="0">
               <a:buNone/>
             </a:pPr>
             <a:r>
@@ -7597,7 +8659,7 @@
       </p:sp>
       <p:sp>
         <p:nvSpPr>
-          <p:cNvPr id="7" name="Shape 5"/>
+          <p:cNvPr id="8" name="Shape 6"/>
           <p:cNvSpPr/>
           <p:nvPr/>
         </p:nvSpPr>
@@ -7624,7 +8686,7 @@
       </p:sp>
       <p:sp>
         <p:nvSpPr>
-          <p:cNvPr id="8" name="Shape 6"/>
+          <p:cNvPr id="9" name="Shape 7"/>
           <p:cNvSpPr/>
           <p:nvPr/>
         </p:nvSpPr>
@@ -7644,7 +8706,7 @@
       </p:sp>
       <p:sp>
         <p:nvSpPr>
-          <p:cNvPr id="9" name="Text 7"/>
+          <p:cNvPr id="10" name="Text 8"/>
           <p:cNvSpPr/>
           <p:nvPr/>
         </p:nvSpPr>
@@ -7663,7 +8725,7 @@
           <a:bodyPr wrap="square" rtlCol="0" anchor="ctr"/>
           <a:lstStyle/>
           <a:p>
-            <a:pPr algn="ctr" indent="0" marL="0">
+            <a:pPr marL="0" indent="0" algn="ctr">
               <a:buNone/>
             </a:pPr>
             <a:r>
@@ -7683,7 +8745,7 @@
       </p:sp>
       <p:sp>
         <p:nvSpPr>
-          <p:cNvPr id="10" name="Text 8"/>
+          <p:cNvPr id="11" name="Text 9"/>
           <p:cNvSpPr/>
           <p:nvPr/>
         </p:nvSpPr>
@@ -7702,7 +8764,7 @@
           <a:bodyPr wrap="square" rtlCol="0" anchor="ctr"/>
           <a:lstStyle/>
           <a:p>
-            <a:pPr indent="0" marL="0">
+            <a:pPr marL="0" indent="0">
               <a:buNone/>
             </a:pPr>
             <a:r>
@@ -7722,7 +8784,7 @@
       </p:sp>
       <p:sp>
         <p:nvSpPr>
-          <p:cNvPr id="11" name="Shape 9"/>
+          <p:cNvPr id="12" name="Shape 10"/>
           <p:cNvSpPr/>
           <p:nvPr/>
         </p:nvSpPr>
@@ -7749,7 +8811,7 @@
       </p:sp>
       <p:sp>
         <p:nvSpPr>
-          <p:cNvPr id="12" name="Shape 10"/>
+          <p:cNvPr id="13" name="Shape 11"/>
           <p:cNvSpPr/>
           <p:nvPr/>
         </p:nvSpPr>
@@ -7769,7 +8831,7 @@
       </p:sp>
       <p:sp>
         <p:nvSpPr>
-          <p:cNvPr id="13" name="Text 11"/>
+          <p:cNvPr id="14" name="Text 12"/>
           <p:cNvSpPr/>
           <p:nvPr/>
         </p:nvSpPr>
@@ -7788,7 +8850,7 @@
           <a:bodyPr wrap="square" rtlCol="0" anchor="ctr"/>
           <a:lstStyle/>
           <a:p>
-            <a:pPr algn="ctr" indent="0" marL="0">
+            <a:pPr marL="0" indent="0" algn="ctr">
               <a:buNone/>
             </a:pPr>
             <a:r>
@@ -7808,7 +8870,7 @@
       </p:sp>
       <p:sp>
         <p:nvSpPr>
-          <p:cNvPr id="14" name="Text 12"/>
+          <p:cNvPr id="15" name="Text 13"/>
           <p:cNvSpPr/>
           <p:nvPr/>
         </p:nvSpPr>
@@ -7827,7 +8889,7 @@
           <a:bodyPr wrap="square" rtlCol="0" anchor="ctr"/>
           <a:lstStyle/>
           <a:p>
-            <a:pPr indent="0" marL="0">
+            <a:pPr marL="0" indent="0">
               <a:buNone/>
             </a:pPr>
             <a:r>
@@ -7847,7 +8909,7 @@
       </p:sp>
       <p:sp>
         <p:nvSpPr>
-          <p:cNvPr id="15" name="Shape 13"/>
+          <p:cNvPr id="16" name="Shape 14"/>
           <p:cNvSpPr/>
           <p:nvPr/>
         </p:nvSpPr>
@@ -7874,7 +8936,7 @@
       </p:sp>
       <p:sp>
         <p:nvSpPr>
-          <p:cNvPr id="16" name="Shape 14"/>
+          <p:cNvPr id="17" name="Shape 15"/>
           <p:cNvSpPr/>
           <p:nvPr/>
         </p:nvSpPr>
@@ -7894,7 +8956,7 @@
       </p:sp>
       <p:sp>
         <p:nvSpPr>
-          <p:cNvPr id="17" name="Text 15"/>
+          <p:cNvPr id="18" name="Text 16"/>
           <p:cNvSpPr/>
           <p:nvPr/>
         </p:nvSpPr>
@@ -7913,7 +8975,7 @@
           <a:bodyPr wrap="square" rtlCol="0" anchor="ctr"/>
           <a:lstStyle/>
           <a:p>
-            <a:pPr algn="ctr" indent="0" marL="0">
+            <a:pPr marL="0" indent="0" algn="ctr">
               <a:buNone/>
             </a:pPr>
             <a:r>
@@ -7933,7 +8995,7 @@
       </p:sp>
       <p:sp>
         <p:nvSpPr>
-          <p:cNvPr id="18" name="Text 16"/>
+          <p:cNvPr id="19" name="Text 17"/>
           <p:cNvSpPr/>
           <p:nvPr/>
         </p:nvSpPr>
@@ -7952,7 +9014,7 @@
           <a:bodyPr wrap="square" rtlCol="0" anchor="ctr"/>
           <a:lstStyle/>
           <a:p>
-            <a:pPr indent="0" marL="0">
+            <a:pPr marL="0" indent="0">
               <a:buNone/>
             </a:pPr>
             <a:r>
@@ -7972,7 +9034,7 @@
       </p:sp>
       <p:sp>
         <p:nvSpPr>
-          <p:cNvPr id="19" name="Text 17"/>
+          <p:cNvPr id="20" name="Text 18"/>
           <p:cNvSpPr/>
           <p:nvPr/>
         </p:nvSpPr>
@@ -7991,7 +9053,7 @@
           <a:bodyPr wrap="square" rtlCol="0" anchor="ctr"/>
           <a:lstStyle/>
           <a:p>
-            <a:pPr indent="0" marL="0">
+            <a:pPr marL="0" indent="0">
               <a:buNone/>
             </a:pPr>
             <a:r>
@@ -8011,7 +9073,7 @@
       </p:sp>
       <p:sp>
         <p:nvSpPr>
-          <p:cNvPr id="20" name="Text 18"/>
+          <p:cNvPr id="21" name="Text 19"/>
           <p:cNvSpPr/>
           <p:nvPr/>
         </p:nvSpPr>
@@ -8030,7 +9092,7 @@
           <a:bodyPr wrap="square" rtlCol="0" anchor="ctr"/>
           <a:lstStyle/>
           <a:p>
-            <a:pPr algn="r" indent="0" marL="0">
+            <a:pPr marL="0" indent="0" algn="r">
               <a:buNone/>
             </a:pPr>
             <a:r>
@@ -8349,4 +9411,319 @@
     </a:ext>
   </a:extLst>
 </a:theme>
+</file>
+
+<file path=ppt/theme/theme2.xml><?xml version="1.0" encoding="utf-8"?>
+<a:theme xmlns:a="http://schemas.openxmlformats.org/drawingml/2006/main" name="Office Theme">
+  <a:themeElements>
+    <a:clrScheme name="Office">
+      <a:dk1>
+        <a:sysClr val="windowText" lastClr="000000"/>
+      </a:dk1>
+      <a:lt1>
+        <a:sysClr val="window" lastClr="FFFFFF"/>
+      </a:lt1>
+      <a:dk2>
+        <a:srgbClr val="0E2841"/>
+      </a:dk2>
+      <a:lt2>
+        <a:srgbClr val="E8E8E8"/>
+      </a:lt2>
+      <a:accent1>
+        <a:srgbClr val="156082"/>
+      </a:accent1>
+      <a:accent2>
+        <a:srgbClr val="E97132"/>
+      </a:accent2>
+      <a:accent3>
+        <a:srgbClr val="196B24"/>
+      </a:accent3>
+      <a:accent4>
+        <a:srgbClr val="0F9ED5"/>
+      </a:accent4>
+      <a:accent5>
+        <a:srgbClr val="A02B93"/>
+      </a:accent5>
+      <a:accent6>
+        <a:srgbClr val="4EA72E"/>
+      </a:accent6>
+      <a:hlink>
+        <a:srgbClr val="467886"/>
+      </a:hlink>
+      <a:folHlink>
+        <a:srgbClr val="96607D"/>
+      </a:folHlink>
+    </a:clrScheme>
+    <a:fontScheme name="Office">
+      <a:majorFont>
+        <a:latin typeface="Aptos Display" panose="02110004020202020204"/>
+        <a:ea typeface=""/>
+        <a:cs typeface=""/>
+        <a:font script="Jpan" typeface="游ゴシック Light"/>
+        <a:font script="Hang" typeface="맑은 고딕"/>
+        <a:font script="Hans" typeface="等线 Light"/>
+        <a:font script="Hant" typeface="新細明體"/>
+        <a:font script="Arab" typeface="Times New Roman"/>
+        <a:font script="Hebr" typeface="Times New Roman"/>
+        <a:font script="Thai" typeface="Angsana New"/>
+        <a:font script="Ethi" typeface="Nyala"/>
+        <a:font script="Beng" typeface="Vrinda"/>
+        <a:font script="Gujr" typeface="Shruti"/>
+        <a:font script="Khmr" typeface="MoolBoran"/>
+        <a:font script="Knda" typeface="Tunga"/>
+        <a:font script="Guru" typeface="Raavi"/>
+        <a:font script="Cans" typeface="Euphemia"/>
+        <a:font script="Cher" typeface="Plantagenet Cherokee"/>
+        <a:font script="Yiii" typeface="Microsoft Yi Baiti"/>
+        <a:font script="Tibt" typeface="Microsoft Himalaya"/>
+        <a:font script="Thaa" typeface="MV Boli"/>
+        <a:font script="Deva" typeface="Mangal"/>
+        <a:font script="Telu" typeface="Gautami"/>
+        <a:font script="Taml" typeface="Latha"/>
+        <a:font script="Syrc" typeface="Estrangelo Edessa"/>
+        <a:font script="Orya" typeface="Kalinga"/>
+        <a:font script="Mlym" typeface="Kartika"/>
+        <a:font script="Laoo" typeface="DokChampa"/>
+        <a:font script="Sinh" typeface="Iskoola Pota"/>
+        <a:font script="Mong" typeface="Mongolian Baiti"/>
+        <a:font script="Viet" typeface="Times New Roman"/>
+        <a:font script="Uigh" typeface="Microsoft Uighur"/>
+        <a:font script="Geor" typeface="Sylfaen"/>
+        <a:font script="Armn" typeface="Arial"/>
+        <a:font script="Bugi" typeface="Leelawadee UI"/>
+        <a:font script="Bopo" typeface="Microsoft JhengHei"/>
+        <a:font script="Java" typeface="Javanese Text"/>
+        <a:font script="Lisu" typeface="Segoe UI"/>
+        <a:font script="Mymr" typeface="Myanmar Text"/>
+        <a:font script="Nkoo" typeface="Ebrima"/>
+        <a:font script="Olck" typeface="Nirmala UI"/>
+        <a:font script="Osma" typeface="Ebrima"/>
+        <a:font script="Phag" typeface="Phagspa"/>
+        <a:font script="Syrn" typeface="Estrangelo Edessa"/>
+        <a:font script="Syrj" typeface="Estrangelo Edessa"/>
+        <a:font script="Syre" typeface="Estrangelo Edessa"/>
+        <a:font script="Sora" typeface="Nirmala UI"/>
+        <a:font script="Tale" typeface="Microsoft Tai Le"/>
+        <a:font script="Talu" typeface="Microsoft New Tai Lue"/>
+        <a:font script="Tfng" typeface="Ebrima"/>
+      </a:majorFont>
+      <a:minorFont>
+        <a:latin typeface="Aptos" panose="02110004020202020204"/>
+        <a:ea typeface=""/>
+        <a:cs typeface=""/>
+        <a:font script="Jpan" typeface="游ゴシック"/>
+        <a:font script="Hang" typeface="맑은 고딕"/>
+        <a:font script="Hans" typeface="等线"/>
+        <a:font script="Hant" typeface="新細明體"/>
+        <a:font script="Arab" typeface="Arial"/>
+        <a:font script="Hebr" typeface="Arial"/>
+        <a:font script="Thai" typeface="Cordia New"/>
+        <a:font script="Ethi" typeface="Nyala"/>
+        <a:font script="Beng" typeface="Vrinda"/>
+        <a:font script="Gujr" typeface="Shruti"/>
+        <a:font script="Khmr" typeface="DaunPenh"/>
+        <a:font script="Knda" typeface="Tunga"/>
+        <a:font script="Guru" typeface="Raavi"/>
+        <a:font script="Cans" typeface="Euphemia"/>
+        <a:font script="Cher" typeface="Plantagenet Cherokee"/>
+        <a:font script="Yiii" typeface="Microsoft Yi Baiti"/>
+        <a:font script="Tibt" typeface="Microsoft Himalaya"/>
+        <a:font script="Thaa" typeface="MV Boli"/>
+        <a:font script="Deva" typeface="Mangal"/>
+        <a:font script="Telu" typeface="Gautami"/>
+        <a:font script="Taml" typeface="Latha"/>
+        <a:font script="Syrc" typeface="Estrangelo Edessa"/>
+        <a:font script="Orya" typeface="Kalinga"/>
+        <a:font script="Mlym" typeface="Kartika"/>
+        <a:font script="Laoo" typeface="DokChampa"/>
+        <a:font script="Sinh" typeface="Iskoola Pota"/>
+        <a:font script="Mong" typeface="Mongolian Baiti"/>
+        <a:font script="Viet" typeface="Arial"/>
+        <a:font script="Uigh" typeface="Microsoft Uighur"/>
+        <a:font script="Geor" typeface="Sylfaen"/>
+        <a:font script="Armn" typeface="Arial"/>
+        <a:font script="Bugi" typeface="Leelawadee UI"/>
+        <a:font script="Bopo" typeface="Microsoft JhengHei"/>
+        <a:font script="Java" typeface="Javanese Text"/>
+        <a:font script="Lisu" typeface="Segoe UI"/>
+        <a:font script="Mymr" typeface="Myanmar Text"/>
+        <a:font script="Nkoo" typeface="Ebrima"/>
+        <a:font script="Olck" typeface="Nirmala UI"/>
+        <a:font script="Osma" typeface="Ebrima"/>
+        <a:font script="Phag" typeface="Phagspa"/>
+        <a:font script="Syrn" typeface="Estrangelo Edessa"/>
+        <a:font script="Syrj" typeface="Estrangelo Edessa"/>
+        <a:font script="Syre" typeface="Estrangelo Edessa"/>
+        <a:font script="Sora" typeface="Nirmala UI"/>
+        <a:font script="Tale" typeface="Microsoft Tai Le"/>
+        <a:font script="Talu" typeface="Microsoft New Tai Lue"/>
+        <a:font script="Tfng" typeface="Ebrima"/>
+      </a:minorFont>
+    </a:fontScheme>
+    <a:fmtScheme name="Office">
+      <a:fillStyleLst>
+        <a:solidFill>
+          <a:schemeClr val="phClr"/>
+        </a:solidFill>
+        <a:gradFill rotWithShape="1">
+          <a:gsLst>
+            <a:gs pos="0">
+              <a:schemeClr val="phClr">
+                <a:lumMod val="110000"/>
+                <a:satMod val="105000"/>
+                <a:tint val="67000"/>
+              </a:schemeClr>
+            </a:gs>
+            <a:gs pos="50000">
+              <a:schemeClr val="phClr">
+                <a:lumMod val="105000"/>
+                <a:satMod val="103000"/>
+                <a:tint val="73000"/>
+              </a:schemeClr>
+            </a:gs>
+            <a:gs pos="100000">
+              <a:schemeClr val="phClr">
+                <a:lumMod val="105000"/>
+                <a:satMod val="109000"/>
+                <a:tint val="81000"/>
+              </a:schemeClr>
+            </a:gs>
+          </a:gsLst>
+          <a:lin ang="5400000" scaled="0"/>
+        </a:gradFill>
+        <a:gradFill rotWithShape="1">
+          <a:gsLst>
+            <a:gs pos="0">
+              <a:schemeClr val="phClr">
+                <a:satMod val="103000"/>
+                <a:lumMod val="102000"/>
+                <a:tint val="94000"/>
+              </a:schemeClr>
+            </a:gs>
+            <a:gs pos="50000">
+              <a:schemeClr val="phClr">
+                <a:satMod val="110000"/>
+                <a:lumMod val="100000"/>
+                <a:shade val="100000"/>
+              </a:schemeClr>
+            </a:gs>
+            <a:gs pos="100000">
+              <a:schemeClr val="phClr">
+                <a:lumMod val="99000"/>
+                <a:satMod val="120000"/>
+                <a:shade val="78000"/>
+              </a:schemeClr>
+            </a:gs>
+          </a:gsLst>
+          <a:lin ang="5400000" scaled="0"/>
+        </a:gradFill>
+      </a:fillStyleLst>
+      <a:lnStyleLst>
+        <a:ln w="12700" cap="flat" cmpd="sng" algn="ctr">
+          <a:solidFill>
+            <a:schemeClr val="phClr"/>
+          </a:solidFill>
+          <a:prstDash val="solid"/>
+          <a:miter lim="800000"/>
+        </a:ln>
+        <a:ln w="19050" cap="flat" cmpd="sng" algn="ctr">
+          <a:solidFill>
+            <a:schemeClr val="phClr"/>
+          </a:solidFill>
+          <a:prstDash val="solid"/>
+          <a:miter lim="800000"/>
+        </a:ln>
+        <a:ln w="25400" cap="flat" cmpd="sng" algn="ctr">
+          <a:solidFill>
+            <a:schemeClr val="phClr"/>
+          </a:solidFill>
+          <a:prstDash val="solid"/>
+          <a:miter lim="800000"/>
+        </a:ln>
+      </a:lnStyleLst>
+      <a:effectStyleLst>
+        <a:effectStyle>
+          <a:effectLst/>
+        </a:effectStyle>
+        <a:effectStyle>
+          <a:effectLst/>
+        </a:effectStyle>
+        <a:effectStyle>
+          <a:effectLst>
+            <a:outerShdw blurRad="57150" dist="19050" dir="5400000" algn="ctr" rotWithShape="0">
+              <a:srgbClr val="000000">
+                <a:alpha val="63000"/>
+              </a:srgbClr>
+            </a:outerShdw>
+          </a:effectLst>
+        </a:effectStyle>
+      </a:effectStyleLst>
+      <a:bgFillStyleLst>
+        <a:solidFill>
+          <a:schemeClr val="phClr"/>
+        </a:solidFill>
+        <a:solidFill>
+          <a:schemeClr val="phClr">
+            <a:tint val="95000"/>
+            <a:satMod val="170000"/>
+          </a:schemeClr>
+        </a:solidFill>
+        <a:gradFill rotWithShape="1">
+          <a:gsLst>
+            <a:gs pos="0">
+              <a:schemeClr val="phClr">
+                <a:tint val="93000"/>
+                <a:satMod val="150000"/>
+                <a:shade val="98000"/>
+                <a:lumMod val="102000"/>
+              </a:schemeClr>
+            </a:gs>
+            <a:gs pos="50000">
+              <a:schemeClr val="phClr">
+                <a:tint val="98000"/>
+                <a:satMod val="130000"/>
+                <a:shade val="90000"/>
+                <a:lumMod val="103000"/>
+              </a:schemeClr>
+            </a:gs>
+            <a:gs pos="100000">
+              <a:schemeClr val="phClr">
+                <a:shade val="63000"/>
+                <a:satMod val="120000"/>
+              </a:schemeClr>
+            </a:gs>
+          </a:gsLst>
+          <a:lin ang="5400000" scaled="0"/>
+        </a:gradFill>
+      </a:bgFillStyleLst>
+    </a:fmtScheme>
+  </a:themeElements>
+  <a:objectDefaults>
+    <a:lnDef>
+      <a:spPr/>
+      <a:bodyPr/>
+      <a:lstStyle/>
+      <a:style>
+        <a:lnRef idx="2">
+          <a:schemeClr val="accent1"/>
+        </a:lnRef>
+        <a:fillRef idx="0">
+          <a:schemeClr val="accent1"/>
+        </a:fillRef>
+        <a:effectRef idx="1">
+          <a:schemeClr val="accent1"/>
+        </a:effectRef>
+        <a:fontRef idx="minor">
+          <a:schemeClr val="tx1"/>
+        </a:fontRef>
+      </a:style>
+    </a:lnDef>
+  </a:objectDefaults>
+  <a:extraClrSchemeLst/>
+  <a:extLst>
+    <a:ext uri="{05A4C25C-085E-4340-85A3-A5531E510DB2}">
+      <thm15:themeFamily xmlns:thm15="http://schemas.microsoft.com/office/thememl/2012/main" name="Office Theme" id="{2E142A2C-CD16-42D6-873A-C26D2A0506FA}" vid="{1BDDFF52-6CD6-40A5-AB3C-68EB2F1E4D0A}"/>
+    </a:ext>
+  </a:extLst>
+</a:theme>
 </file>
--- a/models/northwind/docs/Northwind_Sales_Insights.pptx
+++ b/models/northwind/docs/Northwind_Sales_Insights.pptx
@@ -1697,6 +1697,13 @@
           </a:solidFill>
           <a:ln/>
         </p:spPr>
+        <p:txBody>
+          <a:bodyPr/>
+          <a:lstStyle/>
+          <a:p>
+            <a:endParaRPr lang="en-US" dirty="0"/>
+          </a:p>
+        </p:txBody>
       </p:sp>
       <p:sp>
         <p:nvSpPr>
@@ -1892,7 +1899,18 @@
                 <a:ea typeface="Calibri" pitchFamily="34" charset="-122"/>
                 <a:cs typeface="Calibri" pitchFamily="34" charset="-120"/>
               </a:rPr>
-              <a:t>Stakeholder Review   •   Data Analytics and AI Bootcamp Project</a:t>
+              <a:t>Stakeholder Review   •   Data Analytics and AI Bootcamp Project • Presented </a:t>
+            </a:r>
+            <a:r>
+              <a:rPr lang="en-US" sz="1200">
+                <a:solidFill>
+                  <a:srgbClr val="A9BEDD"/>
+                </a:solidFill>
+                <a:latin typeface="Calibri" pitchFamily="34" charset="0"/>
+                <a:ea typeface="Calibri" pitchFamily="34" charset="-122"/>
+                <a:cs typeface="Calibri" pitchFamily="34" charset="-120"/>
+              </a:rPr>
+              <a:t>by Mahmoud</a:t>
             </a:r>
             <a:endParaRPr lang="en-US" sz="1200" dirty="0"/>
           </a:p>
